--- a/LectureSlides/14_HierarchicalBayesModels.pptx
+++ b/LectureSlides/14_HierarchicalBayesModels.pptx
@@ -359,7 +359,7 @@
           <a:p>
             <a:fld id="{241EB5C9-1307-BA42-ABA2-0BC069CD8E7F}" type="datetimeFigureOut">
               <a:rPr lang="en-US" smtClean="0"/>
-              <a:t>11/20/2025</a:t>
+              <a:t>10/28/2026</a:t>
             </a:fld>
             <a:endParaRPr lang="en-US"/>
           </a:p>
@@ -527,7 +527,7 @@
           <a:p>
             <a:fld id="{241EB5C9-1307-BA42-ABA2-0BC069CD8E7F}" type="datetimeFigureOut">
               <a:rPr lang="en-US" smtClean="0"/>
-              <a:t>11/20/2025</a:t>
+              <a:t>10/28/2026</a:t>
             </a:fld>
             <a:endParaRPr lang="en-US"/>
           </a:p>
@@ -705,7 +705,7 @@
           <a:p>
             <a:fld id="{241EB5C9-1307-BA42-ABA2-0BC069CD8E7F}" type="datetimeFigureOut">
               <a:rPr lang="en-US" smtClean="0"/>
-              <a:t>11/20/2025</a:t>
+              <a:t>10/28/2026</a:t>
             </a:fld>
             <a:endParaRPr lang="en-US"/>
           </a:p>
@@ -873,7 +873,7 @@
           <a:p>
             <a:fld id="{241EB5C9-1307-BA42-ABA2-0BC069CD8E7F}" type="datetimeFigureOut">
               <a:rPr lang="en-US" smtClean="0"/>
-              <a:t>11/20/2025</a:t>
+              <a:t>10/28/2026</a:t>
             </a:fld>
             <a:endParaRPr lang="en-US"/>
           </a:p>
@@ -1118,7 +1118,7 @@
           <a:p>
             <a:fld id="{241EB5C9-1307-BA42-ABA2-0BC069CD8E7F}" type="datetimeFigureOut">
               <a:rPr lang="en-US" smtClean="0"/>
-              <a:t>11/20/2025</a:t>
+              <a:t>10/28/2026</a:t>
             </a:fld>
             <a:endParaRPr lang="en-US"/>
           </a:p>
@@ -1403,7 +1403,7 @@
           <a:p>
             <a:fld id="{241EB5C9-1307-BA42-ABA2-0BC069CD8E7F}" type="datetimeFigureOut">
               <a:rPr lang="en-US" smtClean="0"/>
-              <a:t>11/20/2025</a:t>
+              <a:t>10/28/2026</a:t>
             </a:fld>
             <a:endParaRPr lang="en-US"/>
           </a:p>
@@ -1822,7 +1822,7 @@
           <a:p>
             <a:fld id="{241EB5C9-1307-BA42-ABA2-0BC069CD8E7F}" type="datetimeFigureOut">
               <a:rPr lang="en-US" smtClean="0"/>
-              <a:t>11/20/2025</a:t>
+              <a:t>10/28/2026</a:t>
             </a:fld>
             <a:endParaRPr lang="en-US"/>
           </a:p>
@@ -1939,7 +1939,7 @@
           <a:p>
             <a:fld id="{241EB5C9-1307-BA42-ABA2-0BC069CD8E7F}" type="datetimeFigureOut">
               <a:rPr lang="en-US" smtClean="0"/>
-              <a:t>11/20/2025</a:t>
+              <a:t>10/28/2026</a:t>
             </a:fld>
             <a:endParaRPr lang="en-US"/>
           </a:p>
@@ -2034,7 +2034,7 @@
           <a:p>
             <a:fld id="{241EB5C9-1307-BA42-ABA2-0BC069CD8E7F}" type="datetimeFigureOut">
               <a:rPr lang="en-US" smtClean="0"/>
-              <a:t>11/20/2025</a:t>
+              <a:t>10/28/2026</a:t>
             </a:fld>
             <a:endParaRPr lang="en-US"/>
           </a:p>
@@ -2309,7 +2309,7 @@
           <a:p>
             <a:fld id="{241EB5C9-1307-BA42-ABA2-0BC069CD8E7F}" type="datetimeFigureOut">
               <a:rPr lang="en-US" smtClean="0"/>
-              <a:t>11/20/2025</a:t>
+              <a:t>10/28/2026</a:t>
             </a:fld>
             <a:endParaRPr lang="en-US"/>
           </a:p>
@@ -2561,7 +2561,7 @@
           <a:p>
             <a:fld id="{241EB5C9-1307-BA42-ABA2-0BC069CD8E7F}" type="datetimeFigureOut">
               <a:rPr lang="en-US" smtClean="0"/>
-              <a:t>11/20/2025</a:t>
+              <a:t>10/28/2026</a:t>
             </a:fld>
             <a:endParaRPr lang="en-US"/>
           </a:p>
@@ -2772,7 +2772,7 @@
           <a:p>
             <a:fld id="{241EB5C9-1307-BA42-ABA2-0BC069CD8E7F}" type="datetimeFigureOut">
               <a:rPr lang="en-US" smtClean="0"/>
-              <a:t>11/20/2025</a:t>
+              <a:t>10/28/2026</a:t>
             </a:fld>
             <a:endParaRPr lang="en-US"/>
           </a:p>
@@ -3428,7 +3428,7 @@
                     <m:sSub>
                       <m:sSubPr>
                         <m:ctrlPr>
-                          <a:rPr i="1">
+                          <a:rPr>
                             <a:latin typeface="Cambria Math" panose="02040503050406030204" pitchFamily="18" charset="0"/>
                           </a:rPr>
                         </m:ctrlPr>
@@ -3875,7 +3875,7 @@
                     <m:sSub>
                       <m:sSubPr>
                         <m:ctrlPr>
-                          <a:rPr i="1">
+                          <a:rPr>
                             <a:latin typeface="Cambria Math" panose="02040503050406030204" pitchFamily="18" charset="0"/>
                           </a:rPr>
                         </m:ctrlPr>
@@ -5114,7 +5114,7 @@
             <a:pPr lvl="1"/>
             <a:r>
               <a:rPr lang="en-US" dirty="0"/>
-              <a:t>Single slope and intercept coefficients</a:t>
+              <a:t>Single slope and intercept coefficients for all counties   </a:t>
             </a:r>
             <a:endParaRPr dirty="0"/>
           </a:p>
@@ -5185,22 +5185,26 @@
           <a:p>
             <a:pPr lvl="0"/>
             <a:r>
+              <a:rPr b="1" dirty="0"/>
+              <a:t>Exchangeable values are assumed to be </a:t>
+            </a:r>
+            <a:r>
+              <a:rPr b="1" dirty="0" err="1"/>
+              <a:t>iid</a:t>
+            </a:r>
+            <a:r>
               <a:rPr dirty="0"/>
-              <a:t>Exchangeable values are assumed to be </a:t>
-            </a:r>
-            <a:r>
-              <a:rPr dirty="0" err="1"/>
-              <a:t>iid</a:t>
-            </a:r>
-            <a:r>
-              <a:rPr dirty="0"/>
-              <a:t>, and therefore have the same </a:t>
-            </a:r>
-            <a:r>
-              <a:rPr lang="en-US" dirty="0"/>
+              <a:t>, and therefore have the </a:t>
+            </a:r>
+            <a:r>
+              <a:rPr b="1" dirty="0"/>
+              <a:t>same </a:t>
+            </a:r>
+            <a:r>
+              <a:rPr lang="en-US" b="1" dirty="0"/>
               <a:t>distribution</a:t>
             </a:r>
-            <a:endParaRPr dirty="0"/>
+            <a:endParaRPr b="1" dirty="0"/>
           </a:p>
         </p:txBody>
       </p:sp>
@@ -5585,10 +5589,7 @@
                 </a:pPr>
                 <a14:m>
                   <m:oMathPara xmlns:m="http://schemas.openxmlformats.org/officeDocument/2006/math">
-                    <m:oMathParaPr>
-                      <m:jc m:val="centerGroup"/>
-                    </m:oMathParaPr>
-                    <m:oMath xmlns:m="http://schemas.openxmlformats.org/officeDocument/2006/math">
+                    <m:oMath>
                       <m:r>
                         <a:rPr lang="en-US" b="0" i="1" smtClean="0">
                           <a:latin typeface="Cambria Math" panose="02040503050406030204" pitchFamily="18" charset="0"/>
@@ -5670,10 +5671,7 @@
                 </a:pPr>
                 <a14:m>
                   <m:oMathPara xmlns:m="http://schemas.openxmlformats.org/officeDocument/2006/math">
-                    <m:oMathParaPr>
-                      <m:jc m:val="centerGroup"/>
-                    </m:oMathParaPr>
-                    <m:oMath xmlns:m="http://schemas.openxmlformats.org/officeDocument/2006/math">
+                    <m:oMath>
                       <m:r>
                         <a:rPr lang="en-US" i="1" smtClean="0">
                           <a:latin typeface="Cambria Math" panose="02040503050406030204" pitchFamily="18" charset="0"/>
@@ -5691,7 +5689,7 @@
                       <m:sSub>
                         <m:sSubPr>
                           <m:ctrlPr>
-                            <a:rPr lang="en-US" i="1" smtClean="0">
+                            <a:rPr lang="en-US" i="1">
                               <a:latin typeface="Cambria Math" panose="02040503050406030204" pitchFamily="18" charset="0"/>
                               <a:ea typeface="Cambria Math" panose="02040503050406030204" pitchFamily="18" charset="0"/>
                             </a:rPr>
@@ -5726,7 +5724,7 @@
                       <m:sSub>
                         <m:sSubPr>
                           <m:ctrlPr>
-                            <a:rPr lang="en-US" b="0" i="1" smtClean="0">
+                            <a:rPr lang="en-US" i="1">
                               <a:latin typeface="Cambria Math" panose="02040503050406030204" pitchFamily="18" charset="0"/>
                               <a:ea typeface="Cambria Math" panose="02040503050406030204" pitchFamily="18" charset="0"/>
                             </a:rPr>
@@ -5797,8 +5795,9 @@
                         <m:begChr m:val="["/>
                         <m:endChr m:val="]"/>
                         <m:ctrlPr>
-                          <a:rPr lang="ar-AE" i="1">
+                          <a:rPr lang="en-US" i="1">
                             <a:latin typeface="Cambria Math" panose="02040503050406030204" pitchFamily="18" charset="0"/>
+                            <a:ea typeface="Cambria Math" panose="02040503050406030204" pitchFamily="18" charset="0"/>
                           </a:rPr>
                         </m:ctrlPr>
                       </m:dPr>
@@ -5885,10 +5884,7 @@
                 </a:pPr>
                 <a14:m>
                   <m:oMathPara xmlns:m="http://schemas.openxmlformats.org/officeDocument/2006/math">
-                    <m:oMathParaPr>
-                      <m:jc m:val="centerGroup"/>
-                    </m:oMathParaPr>
-                    <m:oMath xmlns:m="http://schemas.openxmlformats.org/officeDocument/2006/math">
+                    <m:oMath>
                       <m:r>
                         <a:rPr lang="en-US" b="0" i="1" smtClean="0">
                           <a:latin typeface="Cambria Math" panose="02040503050406030204" pitchFamily="18" charset="0"/>
@@ -6443,8 +6439,9 @@
                         <m:begChr m:val="["/>
                         <m:endChr m:val="]"/>
                         <m:ctrlPr>
-                          <a:rPr lang="ar-AE" sz="2000" i="1">
+                          <a:rPr lang="en-US" sz="2000" i="1">
                             <a:latin typeface="Cambria Math" panose="02040503050406030204" pitchFamily="18" charset="0"/>
+                            <a:ea typeface="Cambria Math" panose="02040503050406030204" pitchFamily="18" charset="0"/>
                           </a:rPr>
                         </m:ctrlPr>
                       </m:dPr>
@@ -6487,7 +6484,7 @@
                         <m:sSub>
                           <m:sSubPr>
                             <m:ctrlPr>
-                              <a:rPr lang="en-US" sz="2000" i="1">
+                              <a:rPr lang="en-US" sz="2000" b="0" i="1" smtClean="0">
                                 <a:latin typeface="Cambria Math" panose="02040503050406030204" pitchFamily="18" charset="0"/>
                                 <a:ea typeface="Cambria Math" panose="02040503050406030204" pitchFamily="18" charset="0"/>
                               </a:rPr>
@@ -6557,10 +6554,7 @@
                 <a:pPr lvl="0"/>
                 <a14:m>
                   <m:oMathPara xmlns:m="http://schemas.openxmlformats.org/officeDocument/2006/math">
-                    <m:oMathParaPr>
-                      <m:jc m:val="centerGroup"/>
-                    </m:oMathParaPr>
-                    <m:oMath xmlns:m="http://schemas.openxmlformats.org/officeDocument/2006/math">
+                    <m:oMath>
                       <m:sSub>
                         <m:sSubPr>
                           <m:ctrlPr>
@@ -6592,7 +6586,7 @@
                       <m:sSub>
                         <m:sSubPr>
                           <m:ctrlPr>
-                            <a:rPr lang="en-US" sz="2000" i="1">
+                            <a:rPr lang="en-US" sz="2000" b="0" i="1" smtClean="0">
                               <a:latin typeface="Cambria Math" panose="02040503050406030204" pitchFamily="18" charset="0"/>
                               <a:ea typeface="Cambria Math" panose="02040503050406030204" pitchFamily="18" charset="0"/>
                             </a:rPr>
@@ -6653,14 +6647,7 @@
                               <a:latin typeface="Cambria Math" panose="02040503050406030204" pitchFamily="18" charset="0"/>
                               <a:ea typeface="Cambria Math" panose="02040503050406030204" pitchFamily="18" charset="0"/>
                             </a:rPr>
-                            <m:t>0</m:t>
-                          </m:r>
-                          <m:r>
-                            <a:rPr lang="en-US" sz="2000" b="0" i="1" smtClean="0">
-                              <a:latin typeface="Cambria Math" panose="02040503050406030204" pitchFamily="18" charset="0"/>
-                              <a:ea typeface="Cambria Math" panose="02040503050406030204" pitchFamily="18" charset="0"/>
-                            </a:rPr>
-                            <m:t>,</m:t>
+                            <m:t>0,</m:t>
                           </m:r>
                           <m:r>
                             <a:rPr lang="en-US" sz="2000" b="0" i="1" smtClean="0">
@@ -6680,10 +6667,7 @@
                 <a:pPr lvl="0"/>
                 <a14:m>
                   <m:oMathPara xmlns:m="http://schemas.openxmlformats.org/officeDocument/2006/math">
-                    <m:oMathParaPr>
-                      <m:jc m:val="centerGroup"/>
-                    </m:oMathParaPr>
-                    <m:oMath xmlns:m="http://schemas.openxmlformats.org/officeDocument/2006/math">
+                    <m:oMath>
                       <m:r>
                         <a:rPr lang="en-US" sz="2000" i="1" smtClean="0">
                           <a:latin typeface="Cambria Math" panose="02040503050406030204" pitchFamily="18" charset="0"/>
@@ -6703,28 +6687,13 @@
                           <a:latin typeface="Cambria Math" panose="02040503050406030204" pitchFamily="18" charset="0"/>
                           <a:ea typeface="Cambria Math" panose="02040503050406030204" pitchFamily="18" charset="0"/>
                         </a:rPr>
-                        <m:t>𝐶𝑎𝑢𝑐</m:t>
-                      </m:r>
-                      <m:r>
-                        <a:rPr lang="en-US" sz="2000" b="0" i="1" smtClean="0">
-                          <a:latin typeface="Cambria Math" panose="02040503050406030204" pitchFamily="18" charset="0"/>
-                          <a:ea typeface="Cambria Math" panose="02040503050406030204" pitchFamily="18" charset="0"/>
-                        </a:rPr>
-                        <m:t>h</m:t>
-                      </m:r>
-                      <m:r>
-                        <a:rPr lang="en-US" sz="2000" b="0" i="1" smtClean="0">
-                          <a:latin typeface="Cambria Math" panose="02040503050406030204" pitchFamily="18" charset="0"/>
-                          <a:ea typeface="Cambria Math" panose="02040503050406030204" pitchFamily="18" charset="0"/>
-                        </a:rPr>
-                        <m:t>𝑦</m:t>
+                        <m:t>𝐶𝑎𝑢𝑐ℎ𝑦</m:t>
                       </m:r>
                       <m:d>
                         <m:dPr>
                           <m:ctrlPr>
-                            <a:rPr lang="en-US" sz="2000" b="0" i="1" smtClean="0">
+                            <a:rPr lang="en-US" sz="2000">
                               <a:latin typeface="Cambria Math" panose="02040503050406030204" pitchFamily="18" charset="0"/>
-                              <a:ea typeface="Cambria Math" panose="02040503050406030204" pitchFamily="18" charset="0"/>
                             </a:rPr>
                           </m:ctrlPr>
                         </m:dPr>
@@ -6795,13 +6764,7 @@
                       <a:rPr lang="en-US" sz="2000">
                         <a:latin typeface="Cambria Math" panose="02040503050406030204" pitchFamily="18" charset="0"/>
                       </a:rPr>
-                      <m:t>&lt;</m:t>
-                    </m:r>
-                    <m:r>
-                      <a:rPr lang="en-US" sz="2000">
-                        <a:latin typeface="Cambria Math" panose="02040503050406030204" pitchFamily="18" charset="0"/>
-                      </a:rPr>
-                      <m:t>0</m:t>
+                      <m:t>&lt;0</m:t>
                     </m:r>
                   </m:oMath>
                 </a14:m>
@@ -7284,6 +7247,7 @@
                   <a:rPr lang="en-US" sz="2000" b="1" dirty="0"/>
                   <a:t>pooled model</a:t>
                 </a:r>
+                <a:endParaRPr lang="en-US" sz="2000" dirty="0"/>
               </a:p>
               <a:p>
                 <a:pPr marL="342900" lvl="0" indent="-342900">
@@ -7311,8 +7275,9 @@
                         <m:begChr m:val="["/>
                         <m:endChr m:val="]"/>
                         <m:ctrlPr>
-                          <a:rPr lang="ar-AE" sz="2000" i="1">
+                          <a:rPr lang="en-US" sz="2000" i="1">
                             <a:latin typeface="Cambria Math" panose="02040503050406030204" pitchFamily="18" charset="0"/>
+                            <a:ea typeface="Cambria Math" panose="02040503050406030204" pitchFamily="18" charset="0"/>
                           </a:rPr>
                         </m:ctrlPr>
                       </m:dPr>
@@ -7413,10 +7378,7 @@
                 <a:pPr lvl="0"/>
                 <a14:m>
                   <m:oMathPara xmlns:m="http://schemas.openxmlformats.org/officeDocument/2006/math">
-                    <m:oMathParaPr>
-                      <m:jc m:val="centerGroup"/>
-                    </m:oMathParaPr>
-                    <m:oMath xmlns:m="http://schemas.openxmlformats.org/officeDocument/2006/math">
+                    <m:oMath>
                       <m:sSub>
                         <m:sSubPr>
                           <m:ctrlPr>
@@ -7509,14 +7471,7 @@
                               <a:latin typeface="Cambria Math" panose="02040503050406030204" pitchFamily="18" charset="0"/>
                               <a:ea typeface="Cambria Math" panose="02040503050406030204" pitchFamily="18" charset="0"/>
                             </a:rPr>
-                            <m:t>0</m:t>
-                          </m:r>
-                          <m:r>
-                            <a:rPr lang="en-US" sz="2000" b="0" i="1" smtClean="0">
-                              <a:latin typeface="Cambria Math" panose="02040503050406030204" pitchFamily="18" charset="0"/>
-                              <a:ea typeface="Cambria Math" panose="02040503050406030204" pitchFamily="18" charset="0"/>
-                            </a:rPr>
-                            <m:t>,</m:t>
+                            <m:t>0,</m:t>
                           </m:r>
                           <m:r>
                             <a:rPr lang="en-US" sz="2000" b="0" i="1" smtClean="0">
@@ -7536,10 +7491,7 @@
                 <a:pPr lvl="0"/>
                 <a14:m>
                   <m:oMathPara xmlns:m="http://schemas.openxmlformats.org/officeDocument/2006/math">
-                    <m:oMathParaPr>
-                      <m:jc m:val="centerGroup"/>
-                    </m:oMathParaPr>
-                    <m:oMath xmlns:m="http://schemas.openxmlformats.org/officeDocument/2006/math">
+                    <m:oMath>
                       <m:r>
                         <a:rPr lang="en-US" sz="2000" i="1" smtClean="0">
                           <a:latin typeface="Cambria Math" panose="02040503050406030204" pitchFamily="18" charset="0"/>
@@ -7559,28 +7511,13 @@
                           <a:latin typeface="Cambria Math" panose="02040503050406030204" pitchFamily="18" charset="0"/>
                           <a:ea typeface="Cambria Math" panose="02040503050406030204" pitchFamily="18" charset="0"/>
                         </a:rPr>
-                        <m:t>𝐶𝑎𝑢𝑐</m:t>
-                      </m:r>
-                      <m:r>
-                        <a:rPr lang="en-US" sz="2000" b="0" i="1" smtClean="0">
-                          <a:latin typeface="Cambria Math" panose="02040503050406030204" pitchFamily="18" charset="0"/>
-                          <a:ea typeface="Cambria Math" panose="02040503050406030204" pitchFamily="18" charset="0"/>
-                        </a:rPr>
-                        <m:t>h</m:t>
-                      </m:r>
-                      <m:r>
-                        <a:rPr lang="en-US" sz="2000" b="0" i="1" smtClean="0">
-                          <a:latin typeface="Cambria Math" panose="02040503050406030204" pitchFamily="18" charset="0"/>
-                          <a:ea typeface="Cambria Math" panose="02040503050406030204" pitchFamily="18" charset="0"/>
-                        </a:rPr>
-                        <m:t>𝑦</m:t>
+                        <m:t>𝐶𝑎𝑢𝑐ℎ𝑦</m:t>
                       </m:r>
                       <m:d>
                         <m:dPr>
                           <m:ctrlPr>
-                            <a:rPr lang="en-US" sz="2000" b="0" i="1" smtClean="0">
+                            <a:rPr lang="en-US" sz="2000">
                               <a:latin typeface="Cambria Math" panose="02040503050406030204" pitchFamily="18" charset="0"/>
-                              <a:ea typeface="Cambria Math" panose="02040503050406030204" pitchFamily="18" charset="0"/>
                             </a:rPr>
                           </m:ctrlPr>
                         </m:dPr>
@@ -7612,10 +7549,7 @@
                 <a:pPr lvl="0"/>
                 <a14:m>
                   <m:oMathPara xmlns:m="http://schemas.openxmlformats.org/officeDocument/2006/math">
-                    <m:oMathParaPr>
-                      <m:jc m:val="centerGroup"/>
-                    </m:oMathParaPr>
-                    <m:oMath xmlns:m="http://schemas.openxmlformats.org/officeDocument/2006/math">
+                    <m:oMath>
                       <m:r>
                         <a:rPr lang="en-US" sz="2000" i="1">
                           <a:latin typeface="Cambria Math" panose="02040503050406030204" pitchFamily="18" charset="0"/>
@@ -7695,10 +7629,7 @@
                 <a:pPr/>
                 <a14:m>
                   <m:oMathPara xmlns:m="http://schemas.openxmlformats.org/officeDocument/2006/math">
-                    <m:oMathParaPr>
-                      <m:jc m:val="centerGroup"/>
-                    </m:oMathParaPr>
-                    <m:oMath xmlns:m="http://schemas.openxmlformats.org/officeDocument/2006/math">
+                    <m:oMath>
                       <m:r>
                         <a:rPr lang="en-US" sz="2000" i="1">
                           <a:latin typeface="Cambria Math" panose="02040503050406030204" pitchFamily="18" charset="0"/>
@@ -9061,7 +8992,7 @@
             <a:pPr lvl="0"/>
             <a:r>
               <a:rPr dirty="0"/>
-              <a:t>Apply an hierarchical Bayes model for these situations</a:t>
+              <a:t>Apply a hierarchical Bayes model for these situations</a:t>
             </a:r>
           </a:p>
         </p:txBody>
@@ -9506,12 +9437,133 @@
           </a:p>
         </p:txBody>
       </p:sp>
+      <mc:AlternateContent xmlns:mc="http://schemas.openxmlformats.org/markup-compatibility/2006">
+        <mc:Choice xmlns:a14="http://schemas.microsoft.com/office/drawing/2010/main" Requires="a14">
+          <p:sp>
+            <p:nvSpPr>
+              <p:cNvPr id="5" name="Content Placeholder 2">
+                <a:extLst>
+                  <a:ext uri="{FF2B5EF4-FFF2-40B4-BE49-F238E27FC236}">
+                    <a16:creationId xmlns:a16="http://schemas.microsoft.com/office/drawing/2014/main" id="{E7958055-EE8D-79CD-9765-B5A9104C5E08}"/>
+                  </a:ext>
+                </a:extLst>
+              </p:cNvPr>
+              <p:cNvSpPr>
+                <a:spLocks noGrp="1"/>
+              </p:cNvSpPr>
+              <p:nvPr>
+                <p:ph idx="1"/>
+              </p:nvPr>
+            </p:nvSpPr>
+            <p:spPr>
+              <a:xfrm>
+                <a:off x="430530" y="980330"/>
+                <a:ext cx="4282440" cy="3892660"/>
+              </a:xfrm>
+            </p:spPr>
+            <p:txBody>
+              <a:bodyPr>
+                <a:normAutofit/>
+              </a:bodyPr>
+              <a:lstStyle/>
+              <a:p>
+                <a:pPr marL="0" lvl="0" indent="0">
+                  <a:buNone/>
+                </a:pPr>
+                <a:r>
+                  <a:rPr lang="en-US" sz="2000" dirty="0"/>
+                  <a:t>Posterior predictive checks show good fit</a:t>
+                </a:r>
+              </a:p>
+              <a:p>
+                <a:r>
+                  <a:rPr lang="en-US" sz="2000" dirty="0"/>
+                  <a:t>Predicted close to the observed response with notable deviations</a:t>
+                </a:r>
+              </a:p>
+              <a:p>
+                <a:r>
+                  <a:rPr lang="en-US" sz="2000" dirty="0"/>
+                  <a:t>The Bayesian p-value shows significant deviations respect to the ideal distribution </a:t>
+                </a:r>
+              </a:p>
+              <a:p>
+                <a14:m>
+                  <m:oMath xmlns:m="http://schemas.openxmlformats.org/officeDocument/2006/math">
+                    <m:r>
+                      <a:rPr lang="en-US" sz="2000" i="1">
+                        <a:latin typeface="Cambria Math" panose="02040503050406030204" pitchFamily="18" charset="0"/>
+                        <a:ea typeface="Cambria Math" panose="02040503050406030204" pitchFamily="18" charset="0"/>
+                      </a:rPr>
+                      <m:t>∆−</m:t>
+                    </m:r>
+                    <m:r>
+                      <a:rPr lang="en-US" sz="2000" i="1">
+                        <a:latin typeface="Cambria Math" panose="02040503050406030204" pitchFamily="18" charset="0"/>
+                        <a:ea typeface="Cambria Math" panose="02040503050406030204" pitchFamily="18" charset="0"/>
+                      </a:rPr>
+                      <m:t>𝐸𝐶𝐷𝐹</m:t>
+                    </m:r>
+                  </m:oMath>
+                </a14:m>
+                <a:r>
+                  <a:rPr lang="en-US" sz="2000" dirty="0"/>
+                  <a:t> distribution is skewed with respect to the observed   </a:t>
+                </a:r>
+              </a:p>
+            </p:txBody>
+          </p:sp>
+        </mc:Choice>
+        <mc:Fallback>
+          <p:sp>
+            <p:nvSpPr>
+              <p:cNvPr id="5" name="Content Placeholder 2">
+                <a:extLst>
+                  <a:ext uri="{FF2B5EF4-FFF2-40B4-BE49-F238E27FC236}">
+                    <a16:creationId xmlns:a16="http://schemas.microsoft.com/office/drawing/2014/main" id="{E7958055-EE8D-79CD-9765-B5A9104C5E08}"/>
+                  </a:ext>
+                </a:extLst>
+              </p:cNvPr>
+              <p:cNvSpPr>
+                <a:spLocks noGrp="1" noRot="1" noChangeAspect="1" noMove="1" noResize="1" noEditPoints="1" noAdjustHandles="1" noChangeArrowheads="1" noChangeShapeType="1" noTextEdit="1"/>
+              </p:cNvSpPr>
+              <p:nvPr>
+                <p:ph idx="1"/>
+              </p:nvPr>
+            </p:nvSpPr>
+            <p:spPr>
+              <a:xfrm>
+                <a:off x="430530" y="980330"/>
+                <a:ext cx="4282440" cy="3892660"/>
+              </a:xfrm>
+              <a:blipFill>
+                <a:blip r:embed="rId2"/>
+                <a:stretch>
+                  <a:fillRect l="-1567" t="-940" r="-855"/>
+                </a:stretch>
+              </a:blipFill>
+            </p:spPr>
+            <p:txBody>
+              <a:bodyPr/>
+              <a:lstStyle/>
+              <a:p>
+                <a:r>
+                  <a:rPr lang="en-US">
+                    <a:noFill/>
+                  </a:rPr>
+                  <a:t> </a:t>
+                </a:r>
+              </a:p>
+            </p:txBody>
+          </p:sp>
+        </mc:Fallback>
+      </mc:AlternateContent>
       <p:pic>
         <p:nvPicPr>
-          <p:cNvPr id="4" name="Picture 3">
+          <p:cNvPr id="6" name="Picture 5">
             <a:extLst>
               <a:ext uri="{FF2B5EF4-FFF2-40B4-BE49-F238E27FC236}">
-                <a16:creationId xmlns:a16="http://schemas.microsoft.com/office/drawing/2014/main" id="{C73F8FB9-0F46-EF35-296E-E0A51E7F58C0}"/>
+                <a16:creationId xmlns:a16="http://schemas.microsoft.com/office/drawing/2014/main" id="{7BD68258-E451-0EF9-E488-518296EBAA34}"/>
               </a:ext>
             </a:extLst>
           </p:cNvPr>
@@ -9521,83 +9573,203 @@
           <p:nvPr/>
         </p:nvPicPr>
         <p:blipFill>
-          <a:blip r:embed="rId2"/>
+          <a:blip r:embed="rId3"/>
           <a:stretch>
             <a:fillRect/>
           </a:stretch>
         </p:blipFill>
         <p:spPr>
           <a:xfrm>
-            <a:off x="5097781" y="737275"/>
-            <a:ext cx="3882586" cy="4360266"/>
+            <a:off x="5046092" y="757484"/>
+            <a:ext cx="3938439" cy="4340057"/>
           </a:xfrm>
           <a:prstGeom prst="rect">
             <a:avLst/>
           </a:prstGeom>
         </p:spPr>
       </p:pic>
-      <p:sp>
-        <p:nvSpPr>
-          <p:cNvPr id="5" name="Content Placeholder 2">
-            <a:extLst>
-              <a:ext uri="{FF2B5EF4-FFF2-40B4-BE49-F238E27FC236}">
-                <a16:creationId xmlns:a16="http://schemas.microsoft.com/office/drawing/2014/main" id="{E7958055-EE8D-79CD-9765-B5A9104C5E08}"/>
-              </a:ext>
-            </a:extLst>
-          </p:cNvPr>
-          <p:cNvSpPr>
-            <a:spLocks noGrp="1"/>
-          </p:cNvSpPr>
-          <p:nvPr>
-            <p:ph idx="1"/>
-          </p:nvPr>
-        </p:nvSpPr>
-        <p:spPr>
-          <a:xfrm>
-            <a:off x="430530" y="980330"/>
-            <a:ext cx="4282440" cy="3892660"/>
-          </a:xfrm>
-        </p:spPr>
-        <p:txBody>
-          <a:bodyPr>
-            <a:normAutofit/>
-          </a:bodyPr>
-          <a:lstStyle/>
-          <a:p>
-            <a:pPr marL="0" lvl="0" indent="0">
-              <a:buNone/>
-            </a:pPr>
-            <a:r>
-              <a:rPr lang="en-US" sz="2000" dirty="0"/>
-              <a:t>Posterior predictive checks show good fit</a:t>
-            </a:r>
-          </a:p>
-          <a:p>
-            <a:r>
-              <a:rPr lang="en-US" sz="2000" dirty="0"/>
-              <a:t>Predicted close to the observed response</a:t>
-            </a:r>
-          </a:p>
-          <a:p>
-            <a:r>
-              <a:rPr lang="en-US" sz="2000" dirty="0"/>
-              <a:t>The Bayesian p-value shows small skew with respect to the ideal distribution </a:t>
-            </a:r>
-          </a:p>
-          <a:p>
-            <a:r>
-              <a:rPr lang="en-US" sz="2000" dirty="0"/>
-              <a:t>Bayesian u-value is within credible interval of 1.0 </a:t>
-            </a:r>
-            <a:endParaRPr sz="2000" dirty="0"/>
-          </a:p>
-        </p:txBody>
-      </p:sp>
     </p:spTree>
   </p:cSld>
   <p:clrMapOvr>
     <a:masterClrMapping/>
   </p:clrMapOvr>
+  <p:timing>
+    <p:tnLst>
+      <p:par>
+        <p:cTn id="1" dur="indefinite" restart="never" nodeType="tmRoot">
+          <p:childTnLst>
+            <p:seq concurrent="1" nextAc="seek">
+              <p:cTn id="2" dur="indefinite" nodeType="mainSeq">
+                <p:childTnLst>
+                  <p:par>
+                    <p:cTn id="3" fill="hold">
+                      <p:stCondLst>
+                        <p:cond delay="indefinite"/>
+                      </p:stCondLst>
+                      <p:childTnLst>
+                        <p:par>
+                          <p:cTn id="4" fill="hold">
+                            <p:stCondLst>
+                              <p:cond delay="0"/>
+                            </p:stCondLst>
+                            <p:childTnLst>
+                              <p:par>
+                                <p:cTn id="5" presetID="1" presetClass="entr" presetSubtype="0" fill="hold" nodeType="clickEffect">
+                                  <p:stCondLst>
+                                    <p:cond delay="0"/>
+                                  </p:stCondLst>
+                                  <p:childTnLst>
+                                    <p:set>
+                                      <p:cBhvr>
+                                        <p:cTn id="6" dur="1" fill="hold">
+                                          <p:stCondLst>
+                                            <p:cond delay="0"/>
+                                          </p:stCondLst>
+                                        </p:cTn>
+                                        <p:tgtEl>
+                                          <p:spTgt spid="5">
+                                            <p:txEl>
+                                              <p:pRg st="1" end="1"/>
+                                            </p:txEl>
+                                          </p:spTgt>
+                                        </p:tgtEl>
+                                        <p:attrNameLst>
+                                          <p:attrName>style.visibility</p:attrName>
+                                        </p:attrNameLst>
+                                      </p:cBhvr>
+                                      <p:to>
+                                        <p:strVal val="visible"/>
+                                      </p:to>
+                                    </p:set>
+                                  </p:childTnLst>
+                                </p:cTn>
+                              </p:par>
+                            </p:childTnLst>
+                          </p:cTn>
+                        </p:par>
+                      </p:childTnLst>
+                    </p:cTn>
+                  </p:par>
+                  <p:par>
+                    <p:cTn id="7" fill="hold">
+                      <p:stCondLst>
+                        <p:cond delay="indefinite"/>
+                      </p:stCondLst>
+                      <p:childTnLst>
+                        <p:par>
+                          <p:cTn id="8" fill="hold">
+                            <p:stCondLst>
+                              <p:cond delay="0"/>
+                            </p:stCondLst>
+                            <p:childTnLst>
+                              <p:par>
+                                <p:cTn id="9" presetID="1" presetClass="entr" presetSubtype="0" fill="hold" nodeType="clickEffect">
+                                  <p:stCondLst>
+                                    <p:cond delay="0"/>
+                                  </p:stCondLst>
+                                  <p:childTnLst>
+                                    <p:set>
+                                      <p:cBhvr>
+                                        <p:cTn id="10" dur="1" fill="hold">
+                                          <p:stCondLst>
+                                            <p:cond delay="0"/>
+                                          </p:stCondLst>
+                                        </p:cTn>
+                                        <p:tgtEl>
+                                          <p:spTgt spid="5">
+                                            <p:txEl>
+                                              <p:pRg st="2" end="2"/>
+                                            </p:txEl>
+                                          </p:spTgt>
+                                        </p:tgtEl>
+                                        <p:attrNameLst>
+                                          <p:attrName>style.visibility</p:attrName>
+                                        </p:attrNameLst>
+                                      </p:cBhvr>
+                                      <p:to>
+                                        <p:strVal val="visible"/>
+                                      </p:to>
+                                    </p:set>
+                                  </p:childTnLst>
+                                </p:cTn>
+                              </p:par>
+                            </p:childTnLst>
+                          </p:cTn>
+                        </p:par>
+                      </p:childTnLst>
+                    </p:cTn>
+                  </p:par>
+                  <p:par>
+                    <p:cTn id="11" fill="hold">
+                      <p:stCondLst>
+                        <p:cond delay="indefinite"/>
+                      </p:stCondLst>
+                      <p:childTnLst>
+                        <p:par>
+                          <p:cTn id="12" fill="hold">
+                            <p:stCondLst>
+                              <p:cond delay="0"/>
+                            </p:stCondLst>
+                            <p:childTnLst>
+                              <p:par>
+                                <p:cTn id="13" presetID="1" presetClass="entr" presetSubtype="0" fill="hold" nodeType="clickEffect">
+                                  <p:stCondLst>
+                                    <p:cond delay="0"/>
+                                  </p:stCondLst>
+                                  <p:childTnLst>
+                                    <p:set>
+                                      <p:cBhvr>
+                                        <p:cTn id="14" dur="1" fill="hold">
+                                          <p:stCondLst>
+                                            <p:cond delay="0"/>
+                                          </p:stCondLst>
+                                        </p:cTn>
+                                        <p:tgtEl>
+                                          <p:spTgt spid="5">
+                                            <p:txEl>
+                                              <p:pRg st="3" end="3"/>
+                                            </p:txEl>
+                                          </p:spTgt>
+                                        </p:tgtEl>
+                                        <p:attrNameLst>
+                                          <p:attrName>style.visibility</p:attrName>
+                                        </p:attrNameLst>
+                                      </p:cBhvr>
+                                      <p:to>
+                                        <p:strVal val="visible"/>
+                                      </p:to>
+                                    </p:set>
+                                  </p:childTnLst>
+                                </p:cTn>
+                              </p:par>
+                            </p:childTnLst>
+                          </p:cTn>
+                        </p:par>
+                      </p:childTnLst>
+                    </p:cTn>
+                  </p:par>
+                </p:childTnLst>
+              </p:cTn>
+              <p:prevCondLst>
+                <p:cond evt="onPrev" delay="0">
+                  <p:tgtEl>
+                    <p:sldTgt/>
+                  </p:tgtEl>
+                </p:cond>
+              </p:prevCondLst>
+              <p:nextCondLst>
+                <p:cond evt="onNext" delay="0">
+                  <p:tgtEl>
+                    <p:sldTgt/>
+                  </p:tgtEl>
+                </p:cond>
+              </p:nextCondLst>
+            </p:seq>
+          </p:childTnLst>
+        </p:cTn>
+      </p:par>
+    </p:tnLst>
+  </p:timing>
 </p:sld>
 </file>
 
@@ -9759,6 +9931,7 @@
                         <m:ctrlPr>
                           <a:rPr lang="en-US" sz="2000" i="1" smtClean="0">
                             <a:latin typeface="Cambria Math" panose="02040503050406030204" pitchFamily="18" charset="0"/>
+                            <a:ea typeface="Cambria Math" panose="02040503050406030204" pitchFamily="18" charset="0"/>
                           </a:rPr>
                         </m:ctrlPr>
                       </m:sSubPr>
@@ -9799,6 +9972,7 @@
                         <m:ctrlPr>
                           <a:rPr lang="en-US" sz="2000" i="1" smtClean="0">
                             <a:latin typeface="Cambria Math" panose="02040503050406030204" pitchFamily="18" charset="0"/>
+                            <a:ea typeface="Cambria Math" panose="02040503050406030204" pitchFamily="18" charset="0"/>
                           </a:rPr>
                         </m:ctrlPr>
                       </m:sSubPr>
@@ -9906,6 +10080,183 @@
   <p:clrMapOvr>
     <a:masterClrMapping/>
   </p:clrMapOvr>
+  <p:timing>
+    <p:tnLst>
+      <p:par>
+        <p:cTn id="1" dur="indefinite" restart="never" nodeType="tmRoot">
+          <p:childTnLst>
+            <p:seq concurrent="1" nextAc="seek">
+              <p:cTn id="2" dur="indefinite" nodeType="mainSeq">
+                <p:childTnLst>
+                  <p:par>
+                    <p:cTn id="3" fill="hold">
+                      <p:stCondLst>
+                        <p:cond delay="indefinite"/>
+                      </p:stCondLst>
+                      <p:childTnLst>
+                        <p:par>
+                          <p:cTn id="4" fill="hold">
+                            <p:stCondLst>
+                              <p:cond delay="0"/>
+                            </p:stCondLst>
+                            <p:childTnLst>
+                              <p:par>
+                                <p:cTn id="5" presetID="1" presetClass="entr" presetSubtype="0" fill="hold" nodeType="clickEffect">
+                                  <p:stCondLst>
+                                    <p:cond delay="0"/>
+                                  </p:stCondLst>
+                                  <p:childTnLst>
+                                    <p:set>
+                                      <p:cBhvr>
+                                        <p:cTn id="6" dur="1" fill="hold">
+                                          <p:stCondLst>
+                                            <p:cond delay="0"/>
+                                          </p:stCondLst>
+                                        </p:cTn>
+                                        <p:tgtEl>
+                                          <p:spTgt spid="5">
+                                            <p:txEl>
+                                              <p:pRg st="1" end="1"/>
+                                            </p:txEl>
+                                          </p:spTgt>
+                                        </p:tgtEl>
+                                        <p:attrNameLst>
+                                          <p:attrName>style.visibility</p:attrName>
+                                        </p:attrNameLst>
+                                      </p:cBhvr>
+                                      <p:to>
+                                        <p:strVal val="visible"/>
+                                      </p:to>
+                                    </p:set>
+                                  </p:childTnLst>
+                                </p:cTn>
+                              </p:par>
+                            </p:childTnLst>
+                          </p:cTn>
+                        </p:par>
+                      </p:childTnLst>
+                    </p:cTn>
+                  </p:par>
+                  <p:par>
+                    <p:cTn id="7" fill="hold">
+                      <p:stCondLst>
+                        <p:cond delay="indefinite"/>
+                      </p:stCondLst>
+                      <p:childTnLst>
+                        <p:par>
+                          <p:cTn id="8" fill="hold">
+                            <p:stCondLst>
+                              <p:cond delay="0"/>
+                            </p:stCondLst>
+                            <p:childTnLst>
+                              <p:par>
+                                <p:cTn id="9" presetID="1" presetClass="entr" presetSubtype="0" fill="hold" nodeType="clickEffect">
+                                  <p:stCondLst>
+                                    <p:cond delay="0"/>
+                                  </p:stCondLst>
+                                  <p:childTnLst>
+                                    <p:set>
+                                      <p:cBhvr>
+                                        <p:cTn id="10" dur="1" fill="hold">
+                                          <p:stCondLst>
+                                            <p:cond delay="0"/>
+                                          </p:stCondLst>
+                                        </p:cTn>
+                                        <p:tgtEl>
+                                          <p:spTgt spid="5">
+                                            <p:txEl>
+                                              <p:pRg st="2" end="2"/>
+                                            </p:txEl>
+                                          </p:spTgt>
+                                        </p:tgtEl>
+                                        <p:attrNameLst>
+                                          <p:attrName>style.visibility</p:attrName>
+                                        </p:attrNameLst>
+                                      </p:cBhvr>
+                                      <p:to>
+                                        <p:strVal val="visible"/>
+                                      </p:to>
+                                    </p:set>
+                                  </p:childTnLst>
+                                </p:cTn>
+                              </p:par>
+                            </p:childTnLst>
+                          </p:cTn>
+                        </p:par>
+                      </p:childTnLst>
+                    </p:cTn>
+                  </p:par>
+                  <p:par>
+                    <p:cTn id="11" fill="hold">
+                      <p:stCondLst>
+                        <p:cond delay="indefinite"/>
+                      </p:stCondLst>
+                      <p:childTnLst>
+                        <p:par>
+                          <p:cTn id="12" fill="hold">
+                            <p:stCondLst>
+                              <p:cond delay="0"/>
+                            </p:stCondLst>
+                            <p:childTnLst>
+                              <p:par>
+                                <p:cTn id="13" presetID="1" presetClass="entr" presetSubtype="0" fill="hold" nodeType="clickEffect">
+                                  <p:stCondLst>
+                                    <p:cond delay="0"/>
+                                  </p:stCondLst>
+                                  <p:childTnLst>
+                                    <p:set>
+                                      <p:cBhvr>
+                                        <p:cTn id="14" dur="1" fill="hold">
+                                          <p:stCondLst>
+                                            <p:cond delay="0"/>
+                                          </p:stCondLst>
+                                        </p:cTn>
+                                        <p:tgtEl>
+                                          <p:spTgt spid="5">
+                                            <p:txEl>
+                                              <p:pRg st="3" end="3"/>
+                                            </p:txEl>
+                                          </p:spTgt>
+                                        </p:tgtEl>
+                                        <p:attrNameLst>
+                                          <p:attrName>style.visibility</p:attrName>
+                                        </p:attrNameLst>
+                                      </p:cBhvr>
+                                      <p:to>
+                                        <p:strVal val="visible"/>
+                                      </p:to>
+                                    </p:set>
+                                  </p:childTnLst>
+                                </p:cTn>
+                              </p:par>
+                            </p:childTnLst>
+                          </p:cTn>
+                        </p:par>
+                      </p:childTnLst>
+                    </p:cTn>
+                  </p:par>
+                </p:childTnLst>
+              </p:cTn>
+              <p:prevCondLst>
+                <p:cond evt="onPrev" delay="0">
+                  <p:tgtEl>
+                    <p:sldTgt/>
+                  </p:tgtEl>
+                </p:cond>
+              </p:prevCondLst>
+              <p:nextCondLst>
+                <p:cond evt="onNext" delay="0">
+                  <p:tgtEl>
+                    <p:sldTgt/>
+                  </p:tgtEl>
+                </p:cond>
+              </p:nextCondLst>
+            </p:seq>
+          </p:childTnLst>
+        </p:cTn>
+      </p:par>
+    </p:tnLst>
+  </p:timing>
 </p:sld>
 </file>
 
@@ -10545,8 +10896,8 @@
           </a:p>
         </p:txBody>
       </p:sp>
-      <mc:AlternateContent xmlns:mc="http://schemas.openxmlformats.org/markup-compatibility/2006">
-        <mc:Choice xmlns:a14="http://schemas.microsoft.com/office/drawing/2010/main" Requires="a14">
+      <mc:AlternateContent xmlns:mc="http://schemas.openxmlformats.org/markup-compatibility/2006" xmlns:a14="http://schemas.microsoft.com/office/drawing/2010/main">
+        <mc:Choice Requires="a14">
           <p:sp>
             <p:nvSpPr>
               <p:cNvPr id="3" name="Content Placeholder 2">
@@ -10607,10 +10958,7 @@
                 </a:pPr>
                 <a14:m>
                   <m:oMathPara xmlns:m="http://schemas.openxmlformats.org/officeDocument/2006/math">
-                    <m:oMathParaPr>
-                      <m:jc m:val="centerGroup"/>
-                    </m:oMathParaPr>
-                    <m:oMath xmlns:m="http://schemas.openxmlformats.org/officeDocument/2006/math">
+                    <m:oMath>
                       <m:r>
                         <a:rPr lang="en-US" b="0" i="1" smtClean="0">
                           <a:latin typeface="Cambria Math" panose="02040503050406030204" pitchFamily="18" charset="0"/>
@@ -10651,7 +10999,7 @@
                       <m:d>
                         <m:dPr>
                           <m:ctrlPr>
-                            <a:rPr lang="en-US" b="0" i="1" smtClean="0">
+                            <a:rPr lang="en-US" i="1">
                               <a:latin typeface="Cambria Math" panose="02040503050406030204" pitchFamily="18" charset="0"/>
                               <a:ea typeface="Cambria Math" panose="02040503050406030204" pitchFamily="18" charset="0"/>
                             </a:rPr>
@@ -10713,10 +11061,7 @@
                 </a:pPr>
                 <a14:m>
                   <m:oMathPara xmlns:m="http://schemas.openxmlformats.org/officeDocument/2006/math">
-                    <m:oMathParaPr>
-                      <m:jc m:val="centerGroup"/>
-                    </m:oMathParaPr>
-                    <m:oMath xmlns:m="http://schemas.openxmlformats.org/officeDocument/2006/math">
+                    <m:oMath>
                       <m:sSub>
                         <m:sSubPr>
                           <m:ctrlPr>
@@ -10755,7 +11100,7 @@
                       <m:sSub>
                         <m:sSubPr>
                           <m:ctrlPr>
-                            <a:rPr lang="en-US" i="1" smtClean="0">
+                            <a:rPr lang="en-US" i="1">
                               <a:latin typeface="Cambria Math" panose="02040503050406030204" pitchFamily="18" charset="0"/>
                               <a:ea typeface="Cambria Math" panose="02040503050406030204" pitchFamily="18" charset="0"/>
                             </a:rPr>
@@ -10776,14 +11121,7 @@
                               <a:latin typeface="Cambria Math" panose="02040503050406030204" pitchFamily="18" charset="0"/>
                               <a:ea typeface="Cambria Math" panose="02040503050406030204" pitchFamily="18" charset="0"/>
                             </a:rPr>
-                            <m:t>0</m:t>
-                          </m:r>
-                          <m:r>
-                            <a:rPr lang="en-US" b="0" i="1" smtClean="0">
-                              <a:latin typeface="Cambria Math" panose="02040503050406030204" pitchFamily="18" charset="0"/>
-                              <a:ea typeface="Cambria Math" panose="02040503050406030204" pitchFamily="18" charset="0"/>
-                            </a:rPr>
-                            <m:t>,</m:t>
+                            <m:t>0,</m:t>
                           </m:r>
                           <m:r>
                             <a:rPr lang="en-US" b="0" i="1" smtClean="0">
@@ -10804,7 +11142,7 @@
                       <m:sSub>
                         <m:sSubPr>
                           <m:ctrlPr>
-                            <a:rPr lang="en-US" b="0" i="1" smtClean="0">
+                            <a:rPr lang="en-US" i="1">
                               <a:latin typeface="Cambria Math" panose="02040503050406030204" pitchFamily="18" charset="0"/>
                               <a:ea typeface="Cambria Math" panose="02040503050406030204" pitchFamily="18" charset="0"/>
                             </a:rPr>
@@ -10825,14 +11163,7 @@
                               <a:latin typeface="Cambria Math" panose="02040503050406030204" pitchFamily="18" charset="0"/>
                               <a:ea typeface="Cambria Math" panose="02040503050406030204" pitchFamily="18" charset="0"/>
                             </a:rPr>
-                            <m:t>1</m:t>
-                          </m:r>
-                          <m:r>
-                            <a:rPr lang="en-US" b="0" i="1" smtClean="0">
-                              <a:latin typeface="Cambria Math" panose="02040503050406030204" pitchFamily="18" charset="0"/>
-                              <a:ea typeface="Cambria Math" panose="02040503050406030204" pitchFamily="18" charset="0"/>
-                            </a:rPr>
-                            <m:t>,</m:t>
+                            <m:t>1,</m:t>
                           </m:r>
                           <m:r>
                             <a:rPr lang="en-US" b="0" i="1" smtClean="0">
@@ -10846,7 +11177,7 @@
                       <m:sSub>
                         <m:sSubPr>
                           <m:ctrlPr>
-                            <a:rPr lang="en-US" i="1" smtClean="0">
+                            <a:rPr lang="en-US" b="0" i="1" smtClean="0">
                               <a:latin typeface="Cambria Math" panose="02040503050406030204" pitchFamily="18" charset="0"/>
                               <a:ea typeface="Cambria Math" panose="02040503050406030204" pitchFamily="18" charset="0"/>
                             </a:rPr>
@@ -10937,8 +11268,9 @@
                         <m:begChr m:val="["/>
                         <m:endChr m:val="]"/>
                         <m:ctrlPr>
-                          <a:rPr lang="ar-AE" i="1">
+                          <a:rPr lang="en-US" i="1">
                             <a:latin typeface="Cambria Math" panose="02040503050406030204" pitchFamily="18" charset="0"/>
+                            <a:ea typeface="Cambria Math" panose="02040503050406030204" pitchFamily="18" charset="0"/>
                           </a:rPr>
                         </m:ctrlPr>
                       </m:dPr>
@@ -11053,10 +11385,7 @@
                 </a:pPr>
                 <a14:m>
                   <m:oMathPara xmlns:m="http://schemas.openxmlformats.org/officeDocument/2006/math">
-                    <m:oMathParaPr>
-                      <m:jc m:val="centerGroup"/>
-                    </m:oMathParaPr>
-                    <m:oMath xmlns:m="http://schemas.openxmlformats.org/officeDocument/2006/math">
+                    <m:oMath>
                       <m:r>
                         <a:rPr lang="en-US" b="0" i="1" smtClean="0">
                           <a:latin typeface="Cambria Math" panose="02040503050406030204" pitchFamily="18" charset="0"/>
@@ -11066,8 +11395,9 @@
                       <m:d>
                         <m:dPr>
                           <m:ctrlPr>
-                            <a:rPr lang="en-US" b="0" i="1" smtClean="0">
+                            <a:rPr lang="en-US" i="1">
                               <a:latin typeface="Cambria Math" panose="02040503050406030204" pitchFamily="18" charset="0"/>
+                              <a:ea typeface="Cambria Math" panose="02040503050406030204" pitchFamily="18" charset="0"/>
                             </a:rPr>
                           </m:ctrlPr>
                         </m:dPr>
@@ -11078,6 +11408,7 @@
                               <m:ctrlPr>
                                 <a:rPr lang="en-US" b="0" i="1" smtClean="0">
                                   <a:latin typeface="Cambria Math" panose="02040503050406030204" pitchFamily="18" charset="0"/>
+                                  <a:ea typeface="Cambria Math" panose="02040503050406030204" pitchFamily="18" charset="0"/>
                                 </a:rPr>
                               </m:ctrlPr>
                             </m:accPr>
@@ -11085,7 +11416,7 @@
                               <m:sSub>
                                 <m:sSubPr>
                                   <m:ctrlPr>
-                                    <a:rPr lang="en-US" i="1">
+                                    <a:rPr lang="en-US" b="0" i="1" smtClean="0">
                                       <a:latin typeface="Cambria Math" panose="02040503050406030204" pitchFamily="18" charset="0"/>
                                       <a:ea typeface="Cambria Math" panose="02040503050406030204" pitchFamily="18" charset="0"/>
                                     </a:rPr>
@@ -11144,14 +11475,7 @@
                               <a:latin typeface="Cambria Math" panose="02040503050406030204" pitchFamily="18" charset="0"/>
                               <a:ea typeface="Cambria Math" panose="02040503050406030204" pitchFamily="18" charset="0"/>
                             </a:rPr>
-                            <m:t>0</m:t>
-                          </m:r>
-                          <m:r>
-                            <a:rPr lang="en-US" i="1">
-                              <a:latin typeface="Cambria Math" panose="02040503050406030204" pitchFamily="18" charset="0"/>
-                              <a:ea typeface="Cambria Math" panose="02040503050406030204" pitchFamily="18" charset="0"/>
-                            </a:rPr>
-                            <m:t>,</m:t>
+                            <m:t>0,</m:t>
                           </m:r>
                           <m:r>
                             <a:rPr lang="en-US" i="1">
@@ -11193,14 +11517,7 @@
                               <a:latin typeface="Cambria Math" panose="02040503050406030204" pitchFamily="18" charset="0"/>
                               <a:ea typeface="Cambria Math" panose="02040503050406030204" pitchFamily="18" charset="0"/>
                             </a:rPr>
-                            <m:t>1</m:t>
-                          </m:r>
-                          <m:r>
-                            <a:rPr lang="en-US" i="1">
-                              <a:latin typeface="Cambria Math" panose="02040503050406030204" pitchFamily="18" charset="0"/>
-                              <a:ea typeface="Cambria Math" panose="02040503050406030204" pitchFamily="18" charset="0"/>
-                            </a:rPr>
-                            <m:t>,</m:t>
+                            <m:t>1,</m:t>
                           </m:r>
                           <m:r>
                             <a:rPr lang="en-US" i="1">
@@ -11291,7 +11608,7 @@
             </p:txBody>
           </p:sp>
         </mc:Choice>
-        <mc:Fallback>
+        <mc:Fallback xmlns="">
           <p:sp>
             <p:nvSpPr>
               <p:cNvPr id="3" name="Content Placeholder 2">
@@ -11341,6 +11658,307 @@
   <p:clrMapOvr>
     <a:masterClrMapping/>
   </p:clrMapOvr>
+  <p:timing>
+    <p:tnLst>
+      <p:par>
+        <p:cTn id="1" dur="indefinite" restart="never" nodeType="tmRoot">
+          <p:childTnLst>
+            <p:seq concurrent="1" nextAc="seek">
+              <p:cTn id="2" dur="indefinite" nodeType="mainSeq">
+                <p:childTnLst>
+                  <p:par>
+                    <p:cTn id="3" fill="hold">
+                      <p:stCondLst>
+                        <p:cond delay="indefinite"/>
+                      </p:stCondLst>
+                      <p:childTnLst>
+                        <p:par>
+                          <p:cTn id="4" fill="hold">
+                            <p:stCondLst>
+                              <p:cond delay="0"/>
+                            </p:stCondLst>
+                            <p:childTnLst>
+                              <p:par>
+                                <p:cTn id="5" presetID="1" presetClass="entr" presetSubtype="0" fill="hold" nodeType="clickEffect">
+                                  <p:stCondLst>
+                                    <p:cond delay="0"/>
+                                  </p:stCondLst>
+                                  <p:childTnLst>
+                                    <p:set>
+                                      <p:cBhvr>
+                                        <p:cTn id="6" dur="1" fill="hold">
+                                          <p:stCondLst>
+                                            <p:cond delay="0"/>
+                                          </p:stCondLst>
+                                        </p:cTn>
+                                        <p:tgtEl>
+                                          <p:spTgt spid="3">
+                                            <p:txEl>
+                                              <p:pRg st="1" end="1"/>
+                                            </p:txEl>
+                                          </p:spTgt>
+                                        </p:tgtEl>
+                                        <p:attrNameLst>
+                                          <p:attrName>style.visibility</p:attrName>
+                                        </p:attrNameLst>
+                                      </p:cBhvr>
+                                      <p:to>
+                                        <p:strVal val="visible"/>
+                                      </p:to>
+                                    </p:set>
+                                  </p:childTnLst>
+                                </p:cTn>
+                              </p:par>
+                              <p:par>
+                                <p:cTn id="7" presetID="1" presetClass="entr" presetSubtype="0" fill="hold" nodeType="withEffect">
+                                  <p:stCondLst>
+                                    <p:cond delay="0"/>
+                                  </p:stCondLst>
+                                  <p:childTnLst>
+                                    <p:set>
+                                      <p:cBhvr>
+                                        <p:cTn id="8" dur="1" fill="hold">
+                                          <p:stCondLst>
+                                            <p:cond delay="0"/>
+                                          </p:stCondLst>
+                                        </p:cTn>
+                                        <p:tgtEl>
+                                          <p:spTgt spid="3">
+                                            <p:txEl>
+                                              <p:pRg st="2" end="2"/>
+                                            </p:txEl>
+                                          </p:spTgt>
+                                        </p:tgtEl>
+                                        <p:attrNameLst>
+                                          <p:attrName>style.visibility</p:attrName>
+                                        </p:attrNameLst>
+                                      </p:cBhvr>
+                                      <p:to>
+                                        <p:strVal val="visible"/>
+                                      </p:to>
+                                    </p:set>
+                                  </p:childTnLst>
+                                </p:cTn>
+                              </p:par>
+                              <p:par>
+                                <p:cTn id="9" presetID="1" presetClass="entr" presetSubtype="0" fill="hold" nodeType="withEffect">
+                                  <p:stCondLst>
+                                    <p:cond delay="0"/>
+                                  </p:stCondLst>
+                                  <p:childTnLst>
+                                    <p:set>
+                                      <p:cBhvr>
+                                        <p:cTn id="10" dur="1" fill="hold">
+                                          <p:stCondLst>
+                                            <p:cond delay="0"/>
+                                          </p:stCondLst>
+                                        </p:cTn>
+                                        <p:tgtEl>
+                                          <p:spTgt spid="3">
+                                            <p:txEl>
+                                              <p:pRg st="3" end="3"/>
+                                            </p:txEl>
+                                          </p:spTgt>
+                                        </p:tgtEl>
+                                        <p:attrNameLst>
+                                          <p:attrName>style.visibility</p:attrName>
+                                        </p:attrNameLst>
+                                      </p:cBhvr>
+                                      <p:to>
+                                        <p:strVal val="visible"/>
+                                      </p:to>
+                                    </p:set>
+                                  </p:childTnLst>
+                                </p:cTn>
+                              </p:par>
+                              <p:par>
+                                <p:cTn id="11" presetID="1" presetClass="entr" presetSubtype="0" fill="hold" nodeType="withEffect">
+                                  <p:stCondLst>
+                                    <p:cond delay="0"/>
+                                  </p:stCondLst>
+                                  <p:childTnLst>
+                                    <p:set>
+                                      <p:cBhvr>
+                                        <p:cTn id="12" dur="1" fill="hold">
+                                          <p:stCondLst>
+                                            <p:cond delay="0"/>
+                                          </p:stCondLst>
+                                        </p:cTn>
+                                        <p:tgtEl>
+                                          <p:spTgt spid="3">
+                                            <p:txEl>
+                                              <p:pRg st="4" end="4"/>
+                                            </p:txEl>
+                                          </p:spTgt>
+                                        </p:tgtEl>
+                                        <p:attrNameLst>
+                                          <p:attrName>style.visibility</p:attrName>
+                                        </p:attrNameLst>
+                                      </p:cBhvr>
+                                      <p:to>
+                                        <p:strVal val="visible"/>
+                                      </p:to>
+                                    </p:set>
+                                  </p:childTnLst>
+                                </p:cTn>
+                              </p:par>
+                            </p:childTnLst>
+                          </p:cTn>
+                        </p:par>
+                      </p:childTnLst>
+                    </p:cTn>
+                  </p:par>
+                  <p:par>
+                    <p:cTn id="13" fill="hold">
+                      <p:stCondLst>
+                        <p:cond delay="indefinite"/>
+                      </p:stCondLst>
+                      <p:childTnLst>
+                        <p:par>
+                          <p:cTn id="14" fill="hold">
+                            <p:stCondLst>
+                              <p:cond delay="0"/>
+                            </p:stCondLst>
+                            <p:childTnLst>
+                              <p:par>
+                                <p:cTn id="15" presetID="1" presetClass="entr" presetSubtype="0" fill="hold" nodeType="clickEffect">
+                                  <p:stCondLst>
+                                    <p:cond delay="0"/>
+                                  </p:stCondLst>
+                                  <p:childTnLst>
+                                    <p:set>
+                                      <p:cBhvr>
+                                        <p:cTn id="16" dur="1" fill="hold">
+                                          <p:stCondLst>
+                                            <p:cond delay="0"/>
+                                          </p:stCondLst>
+                                        </p:cTn>
+                                        <p:tgtEl>
+                                          <p:spTgt spid="3">
+                                            <p:txEl>
+                                              <p:pRg st="5" end="5"/>
+                                            </p:txEl>
+                                          </p:spTgt>
+                                        </p:tgtEl>
+                                        <p:attrNameLst>
+                                          <p:attrName>style.visibility</p:attrName>
+                                        </p:attrNameLst>
+                                      </p:cBhvr>
+                                      <p:to>
+                                        <p:strVal val="visible"/>
+                                      </p:to>
+                                    </p:set>
+                                  </p:childTnLst>
+                                </p:cTn>
+                              </p:par>
+                              <p:par>
+                                <p:cTn id="17" presetID="1" presetClass="entr" presetSubtype="0" fill="hold" nodeType="withEffect">
+                                  <p:stCondLst>
+                                    <p:cond delay="0"/>
+                                  </p:stCondLst>
+                                  <p:childTnLst>
+                                    <p:set>
+                                      <p:cBhvr>
+                                        <p:cTn id="18" dur="1" fill="hold">
+                                          <p:stCondLst>
+                                            <p:cond delay="0"/>
+                                          </p:stCondLst>
+                                        </p:cTn>
+                                        <p:tgtEl>
+                                          <p:spTgt spid="3">
+                                            <p:txEl>
+                                              <p:pRg st="6" end="6"/>
+                                            </p:txEl>
+                                          </p:spTgt>
+                                        </p:tgtEl>
+                                        <p:attrNameLst>
+                                          <p:attrName>style.visibility</p:attrName>
+                                        </p:attrNameLst>
+                                      </p:cBhvr>
+                                      <p:to>
+                                        <p:strVal val="visible"/>
+                                      </p:to>
+                                    </p:set>
+                                  </p:childTnLst>
+                                </p:cTn>
+                              </p:par>
+                            </p:childTnLst>
+                          </p:cTn>
+                        </p:par>
+                      </p:childTnLst>
+                    </p:cTn>
+                  </p:par>
+                  <p:par>
+                    <p:cTn id="19" fill="hold">
+                      <p:stCondLst>
+                        <p:cond delay="indefinite"/>
+                      </p:stCondLst>
+                      <p:childTnLst>
+                        <p:par>
+                          <p:cTn id="20" fill="hold">
+                            <p:stCondLst>
+                              <p:cond delay="0"/>
+                            </p:stCondLst>
+                            <p:childTnLst>
+                              <p:par>
+                                <p:cTn id="21" presetID="1" presetClass="entr" presetSubtype="0" fill="hold" nodeType="clickEffect">
+                                  <p:stCondLst>
+                                    <p:cond delay="0"/>
+                                  </p:stCondLst>
+                                  <p:childTnLst>
+                                    <p:set>
+                                      <p:cBhvr>
+                                        <p:cTn id="22" dur="1" fill="hold">
+                                          <p:stCondLst>
+                                            <p:cond delay="0"/>
+                                          </p:stCondLst>
+                                        </p:cTn>
+                                        <p:tgtEl>
+                                          <p:spTgt spid="3">
+                                            <p:txEl>
+                                              <p:pRg st="7" end="7"/>
+                                            </p:txEl>
+                                          </p:spTgt>
+                                        </p:tgtEl>
+                                        <p:attrNameLst>
+                                          <p:attrName>style.visibility</p:attrName>
+                                        </p:attrNameLst>
+                                      </p:cBhvr>
+                                      <p:to>
+                                        <p:strVal val="visible"/>
+                                      </p:to>
+                                    </p:set>
+                                  </p:childTnLst>
+                                </p:cTn>
+                              </p:par>
+                            </p:childTnLst>
+                          </p:cTn>
+                        </p:par>
+                      </p:childTnLst>
+                    </p:cTn>
+                  </p:par>
+                </p:childTnLst>
+              </p:cTn>
+              <p:prevCondLst>
+                <p:cond evt="onPrev" delay="0">
+                  <p:tgtEl>
+                    <p:sldTgt/>
+                  </p:tgtEl>
+                </p:cond>
+              </p:prevCondLst>
+              <p:nextCondLst>
+                <p:cond evt="onNext" delay="0">
+                  <p:tgtEl>
+                    <p:sldTgt/>
+                  </p:tgtEl>
+                </p:cond>
+              </p:nextCondLst>
+            </p:seq>
+          </p:childTnLst>
+        </p:cTn>
+      </p:par>
+    </p:tnLst>
+  </p:timing>
 </p:sld>
 </file>
 
@@ -11413,8 +12031,8 @@
           </a:p>
         </p:txBody>
       </p:sp>
-      <mc:AlternateContent xmlns:mc="http://schemas.openxmlformats.org/markup-compatibility/2006">
-        <mc:Choice xmlns:a14="http://schemas.microsoft.com/office/drawing/2010/main" Requires="a14">
+      <mc:AlternateContent xmlns:mc="http://schemas.openxmlformats.org/markup-compatibility/2006" xmlns:a14="http://schemas.microsoft.com/office/drawing/2010/main">
+        <mc:Choice Requires="a14">
           <p:sp>
             <p:nvSpPr>
               <p:cNvPr id="4" name="Text Placeholder 3">
@@ -11486,8 +12104,9 @@
                         <m:begChr m:val="["/>
                         <m:endChr m:val="]"/>
                         <m:ctrlPr>
-                          <a:rPr lang="ar-AE" sz="2000" i="1">
+                          <a:rPr lang="en-US" sz="2000" i="1">
                             <a:latin typeface="Cambria Math" panose="02040503050406030204" pitchFamily="18" charset="0"/>
+                            <a:ea typeface="Cambria Math" panose="02040503050406030204" pitchFamily="18" charset="0"/>
                           </a:rPr>
                         </m:ctrlPr>
                       </m:dPr>
@@ -11616,10 +12235,7 @@
                 <a:pPr lvl="0"/>
                 <a14:m>
                   <m:oMathPara xmlns:m="http://schemas.openxmlformats.org/officeDocument/2006/math">
-                    <m:oMathParaPr>
-                      <m:jc m:val="centerGroup"/>
-                    </m:oMathParaPr>
-                    <m:oMath xmlns:m="http://schemas.openxmlformats.org/officeDocument/2006/math">
+                    <m:oMath>
                       <m:sSub>
                         <m:sSubPr>
                           <m:ctrlPr>
@@ -11740,14 +12356,7 @@
                               <a:latin typeface="Cambria Math" panose="02040503050406030204" pitchFamily="18" charset="0"/>
                               <a:ea typeface="Cambria Math" panose="02040503050406030204" pitchFamily="18" charset="0"/>
                             </a:rPr>
-                            <m:t>0</m:t>
-                          </m:r>
-                          <m:r>
-                            <a:rPr lang="en-US" sz="2000" b="0" i="1" smtClean="0">
-                              <a:latin typeface="Cambria Math" panose="02040503050406030204" pitchFamily="18" charset="0"/>
-                              <a:ea typeface="Cambria Math" panose="02040503050406030204" pitchFamily="18" charset="0"/>
-                            </a:rPr>
-                            <m:t>,</m:t>
+                            <m:t>0,</m:t>
                           </m:r>
                           <m:r>
                             <a:rPr lang="en-US" sz="2000" b="0" i="1" smtClean="0">
@@ -11767,10 +12376,7 @@
                 <a:pPr lvl="0"/>
                 <a14:m>
                   <m:oMathPara xmlns:m="http://schemas.openxmlformats.org/officeDocument/2006/math">
-                    <m:oMathParaPr>
-                      <m:jc m:val="centerGroup"/>
-                    </m:oMathParaPr>
-                    <m:oMath xmlns:m="http://schemas.openxmlformats.org/officeDocument/2006/math">
+                    <m:oMath>
                       <m:r>
                         <a:rPr lang="en-US" sz="2000" i="1" smtClean="0">
                           <a:latin typeface="Cambria Math" panose="02040503050406030204" pitchFamily="18" charset="0"/>
@@ -11790,28 +12396,13 @@
                           <a:latin typeface="Cambria Math" panose="02040503050406030204" pitchFamily="18" charset="0"/>
                           <a:ea typeface="Cambria Math" panose="02040503050406030204" pitchFamily="18" charset="0"/>
                         </a:rPr>
-                        <m:t>𝐶𝑎𝑢𝑐</m:t>
-                      </m:r>
-                      <m:r>
-                        <a:rPr lang="en-US" sz="2000" b="0" i="1" smtClean="0">
-                          <a:latin typeface="Cambria Math" panose="02040503050406030204" pitchFamily="18" charset="0"/>
-                          <a:ea typeface="Cambria Math" panose="02040503050406030204" pitchFamily="18" charset="0"/>
-                        </a:rPr>
-                        <m:t>h</m:t>
-                      </m:r>
-                      <m:r>
-                        <a:rPr lang="en-US" sz="2000" b="0" i="1" smtClean="0">
-                          <a:latin typeface="Cambria Math" panose="02040503050406030204" pitchFamily="18" charset="0"/>
-                          <a:ea typeface="Cambria Math" panose="02040503050406030204" pitchFamily="18" charset="0"/>
-                        </a:rPr>
-                        <m:t>𝑦</m:t>
+                        <m:t>𝐶𝑎𝑢𝑐ℎ𝑦</m:t>
                       </m:r>
                       <m:d>
                         <m:dPr>
                           <m:ctrlPr>
-                            <a:rPr lang="en-US" sz="2000" b="0" i="1" smtClean="0">
+                            <a:rPr lang="en-US" sz="2000">
                               <a:latin typeface="Cambria Math" panose="02040503050406030204" pitchFamily="18" charset="0"/>
-                              <a:ea typeface="Cambria Math" panose="02040503050406030204" pitchFamily="18" charset="0"/>
                             </a:rPr>
                           </m:ctrlPr>
                         </m:dPr>
@@ -11843,10 +12434,7 @@
                 <a:pPr lvl="0"/>
                 <a14:m>
                   <m:oMathPara xmlns:m="http://schemas.openxmlformats.org/officeDocument/2006/math">
-                    <m:oMathParaPr>
-                      <m:jc m:val="centerGroup"/>
-                    </m:oMathParaPr>
-                    <m:oMath xmlns:m="http://schemas.openxmlformats.org/officeDocument/2006/math">
+                    <m:oMath>
                       <m:r>
                         <a:rPr lang="en-US" sz="2000" i="1">
                           <a:latin typeface="Cambria Math" panose="02040503050406030204" pitchFamily="18" charset="0"/>
@@ -11947,10 +12535,7 @@
                 <a:pPr/>
                 <a14:m>
                   <m:oMathPara xmlns:m="http://schemas.openxmlformats.org/officeDocument/2006/math">
-                    <m:oMathParaPr>
-                      <m:jc m:val="centerGroup"/>
-                    </m:oMathParaPr>
-                    <m:oMath xmlns:m="http://schemas.openxmlformats.org/officeDocument/2006/math">
+                    <m:oMath>
                       <m:sSub>
                         <m:sSubPr>
                           <m:ctrlPr>
@@ -12010,14 +12595,7 @@
                               <a:latin typeface="Cambria Math" panose="02040503050406030204" pitchFamily="18" charset="0"/>
                               <a:ea typeface="Cambria Math" panose="02040503050406030204" pitchFamily="18" charset="0"/>
                             </a:rPr>
-                            <m:t>0</m:t>
-                          </m:r>
-                          <m:r>
-                            <a:rPr lang="en-US" sz="2000" i="1">
-                              <a:latin typeface="Cambria Math" panose="02040503050406030204" pitchFamily="18" charset="0"/>
-                              <a:ea typeface="Cambria Math" panose="02040503050406030204" pitchFamily="18" charset="0"/>
-                            </a:rPr>
-                            <m:t>,</m:t>
+                            <m:t>0,</m:t>
                           </m:r>
                           <m:r>
                             <a:rPr lang="en-US" sz="2000" i="1">
@@ -12059,14 +12637,7 @@
                               <a:latin typeface="Cambria Math" panose="02040503050406030204" pitchFamily="18" charset="0"/>
                               <a:ea typeface="Cambria Math" panose="02040503050406030204" pitchFamily="18" charset="0"/>
                             </a:rPr>
-                            <m:t>1</m:t>
-                          </m:r>
-                          <m:r>
-                            <a:rPr lang="en-US" sz="2000" i="1">
-                              <a:latin typeface="Cambria Math" panose="02040503050406030204" pitchFamily="18" charset="0"/>
-                              <a:ea typeface="Cambria Math" panose="02040503050406030204" pitchFamily="18" charset="0"/>
-                            </a:rPr>
-                            <m:t>,</m:t>
+                            <m:t>1,</m:t>
                           </m:r>
                           <m:r>
                             <a:rPr lang="en-US" sz="2000" i="1">
@@ -12117,7 +12688,7 @@
             </p:txBody>
           </p:sp>
         </mc:Choice>
-        <mc:Fallback>
+        <mc:Fallback xmlns="">
           <p:sp>
             <p:nvSpPr>
               <p:cNvPr id="4" name="Text Placeholder 3">
@@ -12213,9 +12784,6 @@
                     <p:cTn id="3" fill="hold">
                       <p:stCondLst>
                         <p:cond delay="indefinite"/>
-                        <p:cond evt="onBegin" delay="0">
-                          <p:tn val="2"/>
-                        </p:cond>
                       </p:stCondLst>
                       <p:childTnLst>
                         <p:par>
@@ -12225,7 +12793,7 @@
                             </p:stCondLst>
                             <p:childTnLst>
                               <p:par>
-                                <p:cTn id="5" presetID="1" presetClass="entr" presetSubtype="0" fill="hold" nodeType="withEffect">
+                                <p:cTn id="5" presetID="1" presetClass="entr" presetSubtype="0" fill="hold" nodeType="clickEffect">
                                   <p:stCondLst>
                                     <p:cond delay="0"/>
                                   </p:stCondLst>
@@ -12238,7 +12806,309 @@
                                           </p:stCondLst>
                                         </p:cTn>
                                         <p:tgtEl>
+                                          <p:spTgt spid="4">
+                                            <p:txEl>
+                                              <p:pRg st="1" end="1"/>
+                                            </p:txEl>
+                                          </p:spTgt>
+                                        </p:tgtEl>
+                                        <p:attrNameLst>
+                                          <p:attrName>style.visibility</p:attrName>
+                                        </p:attrNameLst>
+                                      </p:cBhvr>
+                                      <p:to>
+                                        <p:strVal val="visible"/>
+                                      </p:to>
+                                    </p:set>
+                                  </p:childTnLst>
+                                </p:cTn>
+                              </p:par>
+                              <p:par>
+                                <p:cTn id="7" presetID="1" presetClass="entr" presetSubtype="0" fill="hold" nodeType="withEffect">
+                                  <p:stCondLst>
+                                    <p:cond delay="0"/>
+                                  </p:stCondLst>
+                                  <p:childTnLst>
+                                    <p:set>
+                                      <p:cBhvr>
+                                        <p:cTn id="8" dur="1" fill="hold">
+                                          <p:stCondLst>
+                                            <p:cond delay="0"/>
+                                          </p:stCondLst>
+                                        </p:cTn>
+                                        <p:tgtEl>
                                           <p:spTgt spid="5"/>
+                                        </p:tgtEl>
+                                        <p:attrNameLst>
+                                          <p:attrName>style.visibility</p:attrName>
+                                        </p:attrNameLst>
+                                      </p:cBhvr>
+                                      <p:to>
+                                        <p:strVal val="visible"/>
+                                      </p:to>
+                                    </p:set>
+                                  </p:childTnLst>
+                                </p:cTn>
+                              </p:par>
+                            </p:childTnLst>
+                          </p:cTn>
+                        </p:par>
+                      </p:childTnLst>
+                    </p:cTn>
+                  </p:par>
+                  <p:par>
+                    <p:cTn id="9" fill="hold">
+                      <p:stCondLst>
+                        <p:cond delay="indefinite"/>
+                      </p:stCondLst>
+                      <p:childTnLst>
+                        <p:par>
+                          <p:cTn id="10" fill="hold">
+                            <p:stCondLst>
+                              <p:cond delay="0"/>
+                            </p:stCondLst>
+                            <p:childTnLst>
+                              <p:par>
+                                <p:cTn id="11" presetID="1" presetClass="entr" presetSubtype="0" fill="hold" nodeType="clickEffect">
+                                  <p:stCondLst>
+                                    <p:cond delay="0"/>
+                                  </p:stCondLst>
+                                  <p:childTnLst>
+                                    <p:set>
+                                      <p:cBhvr>
+                                        <p:cTn id="12" dur="1" fill="hold">
+                                          <p:stCondLst>
+                                            <p:cond delay="0"/>
+                                          </p:stCondLst>
+                                        </p:cTn>
+                                        <p:tgtEl>
+                                          <p:spTgt spid="4">
+                                            <p:txEl>
+                                              <p:pRg st="2" end="2"/>
+                                            </p:txEl>
+                                          </p:spTgt>
+                                        </p:tgtEl>
+                                        <p:attrNameLst>
+                                          <p:attrName>style.visibility</p:attrName>
+                                        </p:attrNameLst>
+                                      </p:cBhvr>
+                                      <p:to>
+                                        <p:strVal val="visible"/>
+                                      </p:to>
+                                    </p:set>
+                                  </p:childTnLst>
+                                </p:cTn>
+                              </p:par>
+                            </p:childTnLst>
+                          </p:cTn>
+                        </p:par>
+                      </p:childTnLst>
+                    </p:cTn>
+                  </p:par>
+                  <p:par>
+                    <p:cTn id="13" fill="hold">
+                      <p:stCondLst>
+                        <p:cond delay="indefinite"/>
+                      </p:stCondLst>
+                      <p:childTnLst>
+                        <p:par>
+                          <p:cTn id="14" fill="hold">
+                            <p:stCondLst>
+                              <p:cond delay="0"/>
+                            </p:stCondLst>
+                            <p:childTnLst>
+                              <p:par>
+                                <p:cTn id="15" presetID="1" presetClass="entr" presetSubtype="0" fill="hold" nodeType="clickEffect">
+                                  <p:stCondLst>
+                                    <p:cond delay="0"/>
+                                  </p:stCondLst>
+                                  <p:childTnLst>
+                                    <p:set>
+                                      <p:cBhvr>
+                                        <p:cTn id="16" dur="1" fill="hold">
+                                          <p:stCondLst>
+                                            <p:cond delay="0"/>
+                                          </p:stCondLst>
+                                        </p:cTn>
+                                        <p:tgtEl>
+                                          <p:spTgt spid="4">
+                                            <p:txEl>
+                                              <p:pRg st="3" end="3"/>
+                                            </p:txEl>
+                                          </p:spTgt>
+                                        </p:tgtEl>
+                                        <p:attrNameLst>
+                                          <p:attrName>style.visibility</p:attrName>
+                                        </p:attrNameLst>
+                                      </p:cBhvr>
+                                      <p:to>
+                                        <p:strVal val="visible"/>
+                                      </p:to>
+                                    </p:set>
+                                  </p:childTnLst>
+                                </p:cTn>
+                              </p:par>
+                              <p:par>
+                                <p:cTn id="17" presetID="1" presetClass="entr" presetSubtype="0" fill="hold" nodeType="withEffect">
+                                  <p:stCondLst>
+                                    <p:cond delay="0"/>
+                                  </p:stCondLst>
+                                  <p:childTnLst>
+                                    <p:set>
+                                      <p:cBhvr>
+                                        <p:cTn id="18" dur="1" fill="hold">
+                                          <p:stCondLst>
+                                            <p:cond delay="0"/>
+                                          </p:stCondLst>
+                                        </p:cTn>
+                                        <p:tgtEl>
+                                          <p:spTgt spid="4">
+                                            <p:txEl>
+                                              <p:pRg st="4" end="4"/>
+                                            </p:txEl>
+                                          </p:spTgt>
+                                        </p:tgtEl>
+                                        <p:attrNameLst>
+                                          <p:attrName>style.visibility</p:attrName>
+                                        </p:attrNameLst>
+                                      </p:cBhvr>
+                                      <p:to>
+                                        <p:strVal val="visible"/>
+                                      </p:to>
+                                    </p:set>
+                                  </p:childTnLst>
+                                </p:cTn>
+                              </p:par>
+                              <p:par>
+                                <p:cTn id="19" presetID="1" presetClass="entr" presetSubtype="0" fill="hold" nodeType="withEffect">
+                                  <p:stCondLst>
+                                    <p:cond delay="0"/>
+                                  </p:stCondLst>
+                                  <p:childTnLst>
+                                    <p:set>
+                                      <p:cBhvr>
+                                        <p:cTn id="20" dur="1" fill="hold">
+                                          <p:stCondLst>
+                                            <p:cond delay="0"/>
+                                          </p:stCondLst>
+                                        </p:cTn>
+                                        <p:tgtEl>
+                                          <p:spTgt spid="4">
+                                            <p:txEl>
+                                              <p:pRg st="5" end="5"/>
+                                            </p:txEl>
+                                          </p:spTgt>
+                                        </p:tgtEl>
+                                        <p:attrNameLst>
+                                          <p:attrName>style.visibility</p:attrName>
+                                        </p:attrNameLst>
+                                      </p:cBhvr>
+                                      <p:to>
+                                        <p:strVal val="visible"/>
+                                      </p:to>
+                                    </p:set>
+                                  </p:childTnLst>
+                                </p:cTn>
+                              </p:par>
+                            </p:childTnLst>
+                          </p:cTn>
+                        </p:par>
+                      </p:childTnLst>
+                    </p:cTn>
+                  </p:par>
+                  <p:par>
+                    <p:cTn id="21" fill="hold">
+                      <p:stCondLst>
+                        <p:cond delay="indefinite"/>
+                      </p:stCondLst>
+                      <p:childTnLst>
+                        <p:par>
+                          <p:cTn id="22" fill="hold">
+                            <p:stCondLst>
+                              <p:cond delay="0"/>
+                            </p:stCondLst>
+                            <p:childTnLst>
+                              <p:par>
+                                <p:cTn id="23" presetID="1" presetClass="entr" presetSubtype="0" fill="hold" nodeType="clickEffect">
+                                  <p:stCondLst>
+                                    <p:cond delay="0"/>
+                                  </p:stCondLst>
+                                  <p:childTnLst>
+                                    <p:set>
+                                      <p:cBhvr>
+                                        <p:cTn id="24" dur="1" fill="hold">
+                                          <p:stCondLst>
+                                            <p:cond delay="0"/>
+                                          </p:stCondLst>
+                                        </p:cTn>
+                                        <p:tgtEl>
+                                          <p:spTgt spid="4">
+                                            <p:txEl>
+                                              <p:pRg st="6" end="6"/>
+                                            </p:txEl>
+                                          </p:spTgt>
+                                        </p:tgtEl>
+                                        <p:attrNameLst>
+                                          <p:attrName>style.visibility</p:attrName>
+                                        </p:attrNameLst>
+                                      </p:cBhvr>
+                                      <p:to>
+                                        <p:strVal val="visible"/>
+                                      </p:to>
+                                    </p:set>
+                                  </p:childTnLst>
+                                </p:cTn>
+                              </p:par>
+                              <p:par>
+                                <p:cTn id="25" presetID="1" presetClass="entr" presetSubtype="0" fill="hold" nodeType="withEffect">
+                                  <p:stCondLst>
+                                    <p:cond delay="0"/>
+                                  </p:stCondLst>
+                                  <p:childTnLst>
+                                    <p:set>
+                                      <p:cBhvr>
+                                        <p:cTn id="26" dur="1" fill="hold">
+                                          <p:stCondLst>
+                                            <p:cond delay="0"/>
+                                          </p:stCondLst>
+                                        </p:cTn>
+                                        <p:tgtEl>
+                                          <p:spTgt spid="4">
+                                            <p:txEl>
+                                              <p:pRg st="7" end="7"/>
+                                            </p:txEl>
+                                          </p:spTgt>
+                                        </p:tgtEl>
+                                        <p:attrNameLst>
+                                          <p:attrName>style.visibility</p:attrName>
+                                        </p:attrNameLst>
+                                      </p:cBhvr>
+                                      <p:to>
+                                        <p:strVal val="visible"/>
+                                      </p:to>
+                                    </p:set>
+                                  </p:childTnLst>
+                                </p:cTn>
+                              </p:par>
+                              <p:par>
+                                <p:cTn id="27" presetID="1" presetClass="entr" presetSubtype="0" fill="hold" nodeType="withEffect">
+                                  <p:stCondLst>
+                                    <p:cond delay="0"/>
+                                  </p:stCondLst>
+                                  <p:childTnLst>
+                                    <p:set>
+                                      <p:cBhvr>
+                                        <p:cTn id="28" dur="1" fill="hold">
+                                          <p:stCondLst>
+                                            <p:cond delay="0"/>
+                                          </p:stCondLst>
+                                        </p:cTn>
+                                        <p:tgtEl>
+                                          <p:spTgt spid="4">
+                                            <p:txEl>
+                                              <p:pRg st="8" end="8"/>
+                                            </p:txEl>
+                                          </p:spTgt>
                                         </p:tgtEl>
                                         <p:attrNameLst>
                                           <p:attrName>style.visibility</p:attrName>
@@ -12351,8 +13221,8 @@
           </a:p>
         </p:txBody>
       </p:sp>
-      <mc:AlternateContent xmlns:mc="http://schemas.openxmlformats.org/markup-compatibility/2006">
-        <mc:Choice xmlns:a14="http://schemas.microsoft.com/office/drawing/2010/main" Requires="a14">
+      <mc:AlternateContent xmlns:mc="http://schemas.openxmlformats.org/markup-compatibility/2006" xmlns:a14="http://schemas.microsoft.com/office/drawing/2010/main">
+        <mc:Choice Requires="a14">
           <p:sp>
             <p:nvSpPr>
               <p:cNvPr id="4" name="Text Placeholder 3">
@@ -12453,7 +13323,7 @@
             </p:txBody>
           </p:sp>
         </mc:Choice>
-        <mc:Fallback>
+        <mc:Fallback xmlns="">
           <p:sp>
             <p:nvSpPr>
               <p:cNvPr id="4" name="Text Placeholder 3">
@@ -12580,10 +13450,7 @@
                 <a:pPr/>
                 <a14:m>
                   <m:oMathPara xmlns:m="http://schemas.openxmlformats.org/officeDocument/2006/math">
-                    <m:oMathParaPr>
-                      <m:jc m:val="centerGroup"/>
-                    </m:oMathParaPr>
-                    <m:oMath xmlns:m="http://schemas.openxmlformats.org/officeDocument/2006/math">
+                    <m:oMath>
                       <m:r>
                         <a:rPr lang="en-US" b="0" i="1" smtClean="0">
                           <a:latin typeface="Cambria Math" panose="02040503050406030204" pitchFamily="18" charset="0"/>
@@ -13823,7 +14690,7 @@
                     <m:sSub>
                       <m:sSubPr>
                         <m:ctrlPr>
-                          <a:rPr lang="en-US" sz="2000" i="1" smtClean="0">
+                          <a:rPr lang="en-US" sz="2000" i="1">
                             <a:latin typeface="Cambria Math" panose="02040503050406030204" pitchFamily="18" charset="0"/>
                             <a:ea typeface="Cambria Math" panose="02040503050406030204" pitchFamily="18" charset="0"/>
                           </a:rPr>
@@ -13844,14 +14711,7 @@
                             <a:latin typeface="Cambria Math" panose="02040503050406030204" pitchFamily="18" charset="0"/>
                             <a:ea typeface="Cambria Math" panose="02040503050406030204" pitchFamily="18" charset="0"/>
                           </a:rPr>
-                          <m:t>0</m:t>
-                        </m:r>
-                        <m:r>
-                          <a:rPr lang="en-US" sz="2000" i="1">
-                            <a:latin typeface="Cambria Math" panose="02040503050406030204" pitchFamily="18" charset="0"/>
-                            <a:ea typeface="Cambria Math" panose="02040503050406030204" pitchFamily="18" charset="0"/>
-                          </a:rPr>
-                          <m:t>,</m:t>
+                          <m:t>0,</m:t>
                         </m:r>
                         <m:r>
                           <a:rPr lang="en-US" sz="2000" i="1">
@@ -13906,14 +14766,7 @@
                             <a:latin typeface="Cambria Math" panose="02040503050406030204" pitchFamily="18" charset="0"/>
                             <a:ea typeface="Cambria Math" panose="02040503050406030204" pitchFamily="18" charset="0"/>
                           </a:rPr>
-                          <m:t>1</m:t>
-                        </m:r>
-                        <m:r>
-                          <a:rPr lang="en-US" sz="2000" i="1">
-                            <a:latin typeface="Cambria Math" panose="02040503050406030204" pitchFamily="18" charset="0"/>
-                            <a:ea typeface="Cambria Math" panose="02040503050406030204" pitchFamily="18" charset="0"/>
-                          </a:rPr>
-                          <m:t>,</m:t>
+                          <m:t>1,</m:t>
                         </m:r>
                         <m:r>
                           <a:rPr lang="en-US" sz="2000" i="1">
@@ -14689,208 +15542,274 @@
           </a:p>
         </p:txBody>
       </p:sp>
-      <p:sp>
-        <p:nvSpPr>
-          <p:cNvPr id="4" name="Text Placeholder 3">
+      <mc:AlternateContent xmlns:mc="http://schemas.openxmlformats.org/markup-compatibility/2006">
+        <mc:Choice xmlns:a14="http://schemas.microsoft.com/office/drawing/2010/main" Requires="a14">
+          <p:sp>
+            <p:nvSpPr>
+              <p:cNvPr id="4" name="Text Placeholder 3">
+                <a:extLst>
+                  <a:ext uri="{FF2B5EF4-FFF2-40B4-BE49-F238E27FC236}">
+                    <a16:creationId xmlns:a16="http://schemas.microsoft.com/office/drawing/2014/main" id="{671C0910-09D1-EF37-84D5-B68A51152C8F}"/>
+                  </a:ext>
+                </a:extLst>
+              </p:cNvPr>
+              <p:cNvSpPr txBox="1">
+                <a:spLocks/>
+              </p:cNvSpPr>
+              <p:nvPr/>
+            </p:nvSpPr>
+            <p:spPr>
+              <a:xfrm>
+                <a:off x="457201" y="1837580"/>
+                <a:ext cx="4495799" cy="3101132"/>
+              </a:xfrm>
+              <a:prstGeom prst="rect">
+                <a:avLst/>
+              </a:prstGeom>
+            </p:spPr>
+            <p:txBody>
+              <a:bodyPr>
+                <a:noAutofit/>
+              </a:bodyPr>
+              <a:lstStyle>
+                <a:lvl1pPr marL="342900" indent="-342900" algn="l" defTabSz="342900" rtl="0" eaLnBrk="1" latinLnBrk="0" hangingPunct="1">
+                  <a:spcBef>
+                    <a:spcPct val="20000"/>
+                  </a:spcBef>
+                  <a:buFont typeface="Arial"/>
+                  <a:buChar char="•"/>
+                  <a:defRPr sz="2400" kern="1200">
+                    <a:solidFill>
+                      <a:schemeClr val="tx1"/>
+                    </a:solidFill>
+                    <a:latin typeface="+mn-lt"/>
+                    <a:ea typeface="+mn-ea"/>
+                    <a:cs typeface="+mn-cs"/>
+                  </a:defRPr>
+                </a:lvl1pPr>
+                <a:lvl2pPr marL="685800" indent="-342900" algn="l" defTabSz="342900" rtl="0" eaLnBrk="1" latinLnBrk="0" hangingPunct="1">
+                  <a:spcBef>
+                    <a:spcPct val="20000"/>
+                  </a:spcBef>
+                  <a:buFont typeface="Arial"/>
+                  <a:buChar char="–"/>
+                  <a:defRPr sz="2100" kern="1200">
+                    <a:solidFill>
+                      <a:schemeClr val="tx1"/>
+                    </a:solidFill>
+                    <a:latin typeface="+mn-lt"/>
+                    <a:ea typeface="+mn-ea"/>
+                    <a:cs typeface="+mn-cs"/>
+                  </a:defRPr>
+                </a:lvl2pPr>
+                <a:lvl3pPr marL="1028700" indent="-342900" algn="l" defTabSz="342900" rtl="0" eaLnBrk="1" latinLnBrk="0" hangingPunct="1">
+                  <a:spcBef>
+                    <a:spcPct val="20000"/>
+                  </a:spcBef>
+                  <a:buFont typeface="Arial"/>
+                  <a:buChar char="•"/>
+                  <a:defRPr sz="1800" kern="1200">
+                    <a:solidFill>
+                      <a:schemeClr val="tx1"/>
+                    </a:solidFill>
+                    <a:latin typeface="+mn-lt"/>
+                    <a:ea typeface="+mn-ea"/>
+                    <a:cs typeface="+mn-cs"/>
+                  </a:defRPr>
+                </a:lvl3pPr>
+                <a:lvl4pPr marL="1371600" indent="-342900" algn="l" defTabSz="342900" rtl="0" eaLnBrk="1" latinLnBrk="0" hangingPunct="1">
+                  <a:spcBef>
+                    <a:spcPct val="20000"/>
+                  </a:spcBef>
+                  <a:buFont typeface="Arial"/>
+                  <a:buChar char="–"/>
+                  <a:defRPr sz="1500" kern="1200">
+                    <a:solidFill>
+                      <a:schemeClr val="tx1"/>
+                    </a:solidFill>
+                    <a:latin typeface="+mn-lt"/>
+                    <a:ea typeface="+mn-ea"/>
+                    <a:cs typeface="+mn-cs"/>
+                  </a:defRPr>
+                </a:lvl4pPr>
+                <a:lvl5pPr marL="1714500" indent="-342900" algn="l" defTabSz="342900" rtl="0" eaLnBrk="1" latinLnBrk="0" hangingPunct="1">
+                  <a:spcBef>
+                    <a:spcPct val="20000"/>
+                  </a:spcBef>
+                  <a:buFont typeface="Arial"/>
+                  <a:buChar char="»"/>
+                  <a:defRPr sz="1500" kern="1200">
+                    <a:solidFill>
+                      <a:schemeClr val="tx1"/>
+                    </a:solidFill>
+                    <a:latin typeface="+mn-lt"/>
+                    <a:ea typeface="+mn-ea"/>
+                    <a:cs typeface="+mn-cs"/>
+                  </a:defRPr>
+                </a:lvl5pPr>
+                <a:lvl6pPr marL="2057400" indent="-342900" algn="l" defTabSz="342900" rtl="0" eaLnBrk="1" latinLnBrk="0" hangingPunct="1">
+                  <a:spcBef>
+                    <a:spcPct val="20000"/>
+                  </a:spcBef>
+                  <a:buFont typeface="Arial"/>
+                  <a:buChar char="•"/>
+                  <a:defRPr sz="1500" kern="1200">
+                    <a:solidFill>
+                      <a:schemeClr val="tx1"/>
+                    </a:solidFill>
+                    <a:latin typeface="+mn-lt"/>
+                    <a:ea typeface="+mn-ea"/>
+                    <a:cs typeface="+mn-cs"/>
+                  </a:defRPr>
+                </a:lvl6pPr>
+                <a:lvl7pPr marL="2400300" indent="-342900" algn="l" defTabSz="342900" rtl="0" eaLnBrk="1" latinLnBrk="0" hangingPunct="1">
+                  <a:spcBef>
+                    <a:spcPct val="20000"/>
+                  </a:spcBef>
+                  <a:buFont typeface="Arial"/>
+                  <a:buChar char="•"/>
+                  <a:defRPr sz="1500" kern="1200">
+                    <a:solidFill>
+                      <a:schemeClr val="tx1"/>
+                    </a:solidFill>
+                    <a:latin typeface="+mn-lt"/>
+                    <a:ea typeface="+mn-ea"/>
+                    <a:cs typeface="+mn-cs"/>
+                  </a:defRPr>
+                </a:lvl7pPr>
+                <a:lvl8pPr marL="2743200" indent="-342900" algn="l" defTabSz="342900" rtl="0" eaLnBrk="1" latinLnBrk="0" hangingPunct="1">
+                  <a:spcBef>
+                    <a:spcPct val="20000"/>
+                  </a:spcBef>
+                  <a:buFont typeface="Arial"/>
+                  <a:buChar char="•"/>
+                  <a:defRPr sz="1500" kern="1200">
+                    <a:solidFill>
+                      <a:schemeClr val="tx1"/>
+                    </a:solidFill>
+                    <a:latin typeface="+mn-lt"/>
+                    <a:ea typeface="+mn-ea"/>
+                    <a:cs typeface="+mn-cs"/>
+                  </a:defRPr>
+                </a:lvl8pPr>
+                <a:lvl9pPr marL="3086100" indent="-342900" algn="l" defTabSz="342900" rtl="0" eaLnBrk="1" latinLnBrk="0" hangingPunct="1">
+                  <a:spcBef>
+                    <a:spcPct val="20000"/>
+                  </a:spcBef>
+                  <a:buFont typeface="Arial"/>
+                  <a:buChar char="•"/>
+                  <a:defRPr sz="1500" kern="1200">
+                    <a:solidFill>
+                      <a:schemeClr val="tx1"/>
+                    </a:solidFill>
+                    <a:latin typeface="+mn-lt"/>
+                    <a:ea typeface="+mn-ea"/>
+                    <a:cs typeface="+mn-cs"/>
+                  </a:defRPr>
+                </a:lvl9pPr>
+              </a:lstStyle>
+              <a:p>
+                <a:pPr>
+                  <a:buFont typeface="Arial" panose="020B0604020202020204" pitchFamily="34" charset="0"/>
+                  <a:buChar char="•"/>
+                </a:pPr>
+                <a:r>
+                  <a:rPr lang="en-US" sz="2000" dirty="0"/>
+                  <a:t>Predicted close to the observed response with notable deviations</a:t>
+                </a:r>
+              </a:p>
+              <a:p>
+                <a:pPr>
+                  <a:buFont typeface="Arial" panose="020B0604020202020204" pitchFamily="34" charset="0"/>
+                  <a:buChar char="•"/>
+                </a:pPr>
+                <a:r>
+                  <a:rPr lang="en-US" sz="2000" dirty="0"/>
+                  <a:t>The Bayesian p-value shows large bias with respect to the ideal distribution </a:t>
+                </a:r>
+              </a:p>
+              <a:p>
+                <a:pPr>
+                  <a:buFont typeface="Arial" panose="020B0604020202020204" pitchFamily="34" charset="0"/>
+                  <a:buChar char="•"/>
+                </a:pPr>
+                <a14:m>
+                  <m:oMath xmlns:m="http://schemas.openxmlformats.org/officeDocument/2006/math">
+                    <m:r>
+                      <a:rPr lang="en-US" sz="2000" i="1">
+                        <a:latin typeface="Cambria Math" panose="02040503050406030204" pitchFamily="18" charset="0"/>
+                        <a:ea typeface="Cambria Math" panose="02040503050406030204" pitchFamily="18" charset="0"/>
+                      </a:rPr>
+                      <m:t>∆−</m:t>
+                    </m:r>
+                    <m:r>
+                      <a:rPr lang="en-US" sz="2000" i="1">
+                        <a:latin typeface="Cambria Math" panose="02040503050406030204" pitchFamily="18" charset="0"/>
+                        <a:ea typeface="Cambria Math" panose="02040503050406030204" pitchFamily="18" charset="0"/>
+                      </a:rPr>
+                      <m:t>𝐸𝐶𝐷𝐹</m:t>
+                    </m:r>
+                  </m:oMath>
+                </a14:m>
+                <a:r>
+                  <a:rPr lang="en-US" sz="2000" dirty="0"/>
+                  <a:t> distribution shows minimal with respect to the observed   </a:t>
+                </a:r>
+              </a:p>
+            </p:txBody>
+          </p:sp>
+        </mc:Choice>
+        <mc:Fallback>
+          <p:sp>
+            <p:nvSpPr>
+              <p:cNvPr id="4" name="Text Placeholder 3">
+                <a:extLst>
+                  <a:ext uri="{FF2B5EF4-FFF2-40B4-BE49-F238E27FC236}">
+                    <a16:creationId xmlns:a16="http://schemas.microsoft.com/office/drawing/2014/main" id="{671C0910-09D1-EF37-84D5-B68A51152C8F}"/>
+                  </a:ext>
+                </a:extLst>
+              </p:cNvPr>
+              <p:cNvSpPr txBox="1">
+                <a:spLocks noRot="1" noChangeAspect="1" noMove="1" noResize="1" noEditPoints="1" noAdjustHandles="1" noChangeArrowheads="1" noChangeShapeType="1" noTextEdit="1"/>
+              </p:cNvSpPr>
+              <p:nvPr/>
+            </p:nvSpPr>
+            <p:spPr>
+              <a:xfrm>
+                <a:off x="457201" y="1837580"/>
+                <a:ext cx="4495799" cy="3101132"/>
+              </a:xfrm>
+              <a:prstGeom prst="rect">
+                <a:avLst/>
+              </a:prstGeom>
+              <a:blipFill>
+                <a:blip r:embed="rId2"/>
+                <a:stretch>
+                  <a:fillRect l="-1220" t="-982" r="-2168"/>
+                </a:stretch>
+              </a:blipFill>
+            </p:spPr>
+            <p:txBody>
+              <a:bodyPr/>
+              <a:lstStyle/>
+              <a:p>
+                <a:r>
+                  <a:rPr lang="en-US">
+                    <a:noFill/>
+                  </a:rPr>
+                  <a:t> </a:t>
+                </a:r>
+              </a:p>
+            </p:txBody>
+          </p:sp>
+        </mc:Fallback>
+      </mc:AlternateContent>
+      <p:pic>
+        <p:nvPicPr>
+          <p:cNvPr id="6" name="Picture 5">
             <a:extLst>
               <a:ext uri="{FF2B5EF4-FFF2-40B4-BE49-F238E27FC236}">
-                <a16:creationId xmlns:a16="http://schemas.microsoft.com/office/drawing/2014/main" id="{671C0910-09D1-EF37-84D5-B68A51152C8F}"/>
-              </a:ext>
-            </a:extLst>
-          </p:cNvPr>
-          <p:cNvSpPr txBox="1">
-            <a:spLocks/>
-          </p:cNvSpPr>
-          <p:nvPr/>
-        </p:nvSpPr>
-        <p:spPr>
-          <a:xfrm>
-            <a:off x="457201" y="1837580"/>
-            <a:ext cx="4495799" cy="3101132"/>
-          </a:xfrm>
-          <a:prstGeom prst="rect">
-            <a:avLst/>
-          </a:prstGeom>
-        </p:spPr>
-        <p:txBody>
-          <a:bodyPr>
-            <a:noAutofit/>
-          </a:bodyPr>
-          <a:lstStyle>
-            <a:lvl1pPr marL="342900" indent="-342900" algn="l" defTabSz="342900" rtl="0" eaLnBrk="1" latinLnBrk="0" hangingPunct="1">
-              <a:spcBef>
-                <a:spcPct val="20000"/>
-              </a:spcBef>
-              <a:buFont typeface="Arial"/>
-              <a:buChar char="•"/>
-              <a:defRPr sz="2400" kern="1200">
-                <a:solidFill>
-                  <a:schemeClr val="tx1"/>
-                </a:solidFill>
-                <a:latin typeface="+mn-lt"/>
-                <a:ea typeface="+mn-ea"/>
-                <a:cs typeface="+mn-cs"/>
-              </a:defRPr>
-            </a:lvl1pPr>
-            <a:lvl2pPr marL="685800" indent="-342900" algn="l" defTabSz="342900" rtl="0" eaLnBrk="1" latinLnBrk="0" hangingPunct="1">
-              <a:spcBef>
-                <a:spcPct val="20000"/>
-              </a:spcBef>
-              <a:buFont typeface="Arial"/>
-              <a:buChar char="–"/>
-              <a:defRPr sz="2100" kern="1200">
-                <a:solidFill>
-                  <a:schemeClr val="tx1"/>
-                </a:solidFill>
-                <a:latin typeface="+mn-lt"/>
-                <a:ea typeface="+mn-ea"/>
-                <a:cs typeface="+mn-cs"/>
-              </a:defRPr>
-            </a:lvl2pPr>
-            <a:lvl3pPr marL="1028700" indent="-342900" algn="l" defTabSz="342900" rtl="0" eaLnBrk="1" latinLnBrk="0" hangingPunct="1">
-              <a:spcBef>
-                <a:spcPct val="20000"/>
-              </a:spcBef>
-              <a:buFont typeface="Arial"/>
-              <a:buChar char="•"/>
-              <a:defRPr sz="1800" kern="1200">
-                <a:solidFill>
-                  <a:schemeClr val="tx1"/>
-                </a:solidFill>
-                <a:latin typeface="+mn-lt"/>
-                <a:ea typeface="+mn-ea"/>
-                <a:cs typeface="+mn-cs"/>
-              </a:defRPr>
-            </a:lvl3pPr>
-            <a:lvl4pPr marL="1371600" indent="-342900" algn="l" defTabSz="342900" rtl="0" eaLnBrk="1" latinLnBrk="0" hangingPunct="1">
-              <a:spcBef>
-                <a:spcPct val="20000"/>
-              </a:spcBef>
-              <a:buFont typeface="Arial"/>
-              <a:buChar char="–"/>
-              <a:defRPr sz="1500" kern="1200">
-                <a:solidFill>
-                  <a:schemeClr val="tx1"/>
-                </a:solidFill>
-                <a:latin typeface="+mn-lt"/>
-                <a:ea typeface="+mn-ea"/>
-                <a:cs typeface="+mn-cs"/>
-              </a:defRPr>
-            </a:lvl4pPr>
-            <a:lvl5pPr marL="1714500" indent="-342900" algn="l" defTabSz="342900" rtl="0" eaLnBrk="1" latinLnBrk="0" hangingPunct="1">
-              <a:spcBef>
-                <a:spcPct val="20000"/>
-              </a:spcBef>
-              <a:buFont typeface="Arial"/>
-              <a:buChar char="»"/>
-              <a:defRPr sz="1500" kern="1200">
-                <a:solidFill>
-                  <a:schemeClr val="tx1"/>
-                </a:solidFill>
-                <a:latin typeface="+mn-lt"/>
-                <a:ea typeface="+mn-ea"/>
-                <a:cs typeface="+mn-cs"/>
-              </a:defRPr>
-            </a:lvl5pPr>
-            <a:lvl6pPr marL="2057400" indent="-342900" algn="l" defTabSz="342900" rtl="0" eaLnBrk="1" latinLnBrk="0" hangingPunct="1">
-              <a:spcBef>
-                <a:spcPct val="20000"/>
-              </a:spcBef>
-              <a:buFont typeface="Arial"/>
-              <a:buChar char="•"/>
-              <a:defRPr sz="1500" kern="1200">
-                <a:solidFill>
-                  <a:schemeClr val="tx1"/>
-                </a:solidFill>
-                <a:latin typeface="+mn-lt"/>
-                <a:ea typeface="+mn-ea"/>
-                <a:cs typeface="+mn-cs"/>
-              </a:defRPr>
-            </a:lvl6pPr>
-            <a:lvl7pPr marL="2400300" indent="-342900" algn="l" defTabSz="342900" rtl="0" eaLnBrk="1" latinLnBrk="0" hangingPunct="1">
-              <a:spcBef>
-                <a:spcPct val="20000"/>
-              </a:spcBef>
-              <a:buFont typeface="Arial"/>
-              <a:buChar char="•"/>
-              <a:defRPr sz="1500" kern="1200">
-                <a:solidFill>
-                  <a:schemeClr val="tx1"/>
-                </a:solidFill>
-                <a:latin typeface="+mn-lt"/>
-                <a:ea typeface="+mn-ea"/>
-                <a:cs typeface="+mn-cs"/>
-              </a:defRPr>
-            </a:lvl7pPr>
-            <a:lvl8pPr marL="2743200" indent="-342900" algn="l" defTabSz="342900" rtl="0" eaLnBrk="1" latinLnBrk="0" hangingPunct="1">
-              <a:spcBef>
-                <a:spcPct val="20000"/>
-              </a:spcBef>
-              <a:buFont typeface="Arial"/>
-              <a:buChar char="•"/>
-              <a:defRPr sz="1500" kern="1200">
-                <a:solidFill>
-                  <a:schemeClr val="tx1"/>
-                </a:solidFill>
-                <a:latin typeface="+mn-lt"/>
-                <a:ea typeface="+mn-ea"/>
-                <a:cs typeface="+mn-cs"/>
-              </a:defRPr>
-            </a:lvl8pPr>
-            <a:lvl9pPr marL="3086100" indent="-342900" algn="l" defTabSz="342900" rtl="0" eaLnBrk="1" latinLnBrk="0" hangingPunct="1">
-              <a:spcBef>
-                <a:spcPct val="20000"/>
-              </a:spcBef>
-              <a:buFont typeface="Arial"/>
-              <a:buChar char="•"/>
-              <a:defRPr sz="1500" kern="1200">
-                <a:solidFill>
-                  <a:schemeClr val="tx1"/>
-                </a:solidFill>
-                <a:latin typeface="+mn-lt"/>
-                <a:ea typeface="+mn-ea"/>
-                <a:cs typeface="+mn-cs"/>
-              </a:defRPr>
-            </a:lvl9pPr>
-          </a:lstStyle>
-          <a:p>
-            <a:pPr>
-              <a:buFont typeface="Arial" panose="020B0604020202020204" pitchFamily="34" charset="0"/>
-              <a:buChar char="•"/>
-            </a:pPr>
-            <a:r>
-              <a:rPr lang="en-US" sz="2000" dirty="0"/>
-              <a:t>The posterior predictive mean is close to the observed   </a:t>
-            </a:r>
-          </a:p>
-          <a:p>
-            <a:pPr>
-              <a:buFont typeface="Arial" panose="020B0604020202020204" pitchFamily="34" charset="0"/>
-              <a:buChar char="•"/>
-            </a:pPr>
-            <a:r>
-              <a:rPr lang="en-US" sz="2000" dirty="0"/>
-              <a:t>The Bayesian p-value shows a skew compared to the ideal distribution  </a:t>
-            </a:r>
-          </a:p>
-          <a:p>
-            <a:pPr>
-              <a:buFont typeface="Arial" panose="020B0604020202020204" pitchFamily="34" charset="0"/>
-              <a:buChar char="•"/>
-            </a:pPr>
-            <a:r>
-              <a:rPr lang="en-US" sz="2000" dirty="0"/>
-              <a:t>The Bayesian u-value is well outside the desired credible interval!  </a:t>
-            </a:r>
-          </a:p>
-        </p:txBody>
-      </p:sp>
-      <p:pic>
-        <p:nvPicPr>
-          <p:cNvPr id="7" name="Picture 6">
-            <a:extLst>
-              <a:ext uri="{FF2B5EF4-FFF2-40B4-BE49-F238E27FC236}">
-                <a16:creationId xmlns:a16="http://schemas.microsoft.com/office/drawing/2014/main" id="{63801E8E-0EB7-3F9D-B4F8-EC7596F35ACD}"/>
+                <a16:creationId xmlns:a16="http://schemas.microsoft.com/office/drawing/2014/main" id="{F2D514C1-77B5-9ABE-FED9-A669E5A1A0E3}"/>
               </a:ext>
             </a:extLst>
           </p:cNvPr>
@@ -14900,15 +15819,15 @@
           <p:nvPr/>
         </p:nvPicPr>
         <p:blipFill>
-          <a:blip r:embed="rId2"/>
+          <a:blip r:embed="rId3"/>
           <a:stretch>
             <a:fillRect/>
           </a:stretch>
         </p:blipFill>
         <p:spPr>
           <a:xfrm>
-            <a:off x="5246370" y="980957"/>
-            <a:ext cx="3680459" cy="4129207"/>
+            <a:off x="5215346" y="831018"/>
+            <a:ext cx="3900580" cy="4194172"/>
           </a:xfrm>
           <a:prstGeom prst="rect">
             <a:avLst/>
@@ -14925,6 +15844,183 @@
   <p:clrMapOvr>
     <a:masterClrMapping/>
   </p:clrMapOvr>
+  <p:timing>
+    <p:tnLst>
+      <p:par>
+        <p:cTn id="1" dur="indefinite" restart="never" nodeType="tmRoot">
+          <p:childTnLst>
+            <p:seq concurrent="1" nextAc="seek">
+              <p:cTn id="2" dur="indefinite" nodeType="mainSeq">
+                <p:childTnLst>
+                  <p:par>
+                    <p:cTn id="3" fill="hold">
+                      <p:stCondLst>
+                        <p:cond delay="indefinite"/>
+                      </p:stCondLst>
+                      <p:childTnLst>
+                        <p:par>
+                          <p:cTn id="4" fill="hold">
+                            <p:stCondLst>
+                              <p:cond delay="0"/>
+                            </p:stCondLst>
+                            <p:childTnLst>
+                              <p:par>
+                                <p:cTn id="5" presetID="1" presetClass="entr" presetSubtype="0" fill="hold" nodeType="clickEffect">
+                                  <p:stCondLst>
+                                    <p:cond delay="0"/>
+                                  </p:stCondLst>
+                                  <p:childTnLst>
+                                    <p:set>
+                                      <p:cBhvr>
+                                        <p:cTn id="6" dur="1" fill="hold">
+                                          <p:stCondLst>
+                                            <p:cond delay="0"/>
+                                          </p:stCondLst>
+                                        </p:cTn>
+                                        <p:tgtEl>
+                                          <p:spTgt spid="4">
+                                            <p:txEl>
+                                              <p:pRg st="0" end="0"/>
+                                            </p:txEl>
+                                          </p:spTgt>
+                                        </p:tgtEl>
+                                        <p:attrNameLst>
+                                          <p:attrName>style.visibility</p:attrName>
+                                        </p:attrNameLst>
+                                      </p:cBhvr>
+                                      <p:to>
+                                        <p:strVal val="visible"/>
+                                      </p:to>
+                                    </p:set>
+                                  </p:childTnLst>
+                                </p:cTn>
+                              </p:par>
+                            </p:childTnLst>
+                          </p:cTn>
+                        </p:par>
+                      </p:childTnLst>
+                    </p:cTn>
+                  </p:par>
+                  <p:par>
+                    <p:cTn id="7" fill="hold">
+                      <p:stCondLst>
+                        <p:cond delay="indefinite"/>
+                      </p:stCondLst>
+                      <p:childTnLst>
+                        <p:par>
+                          <p:cTn id="8" fill="hold">
+                            <p:stCondLst>
+                              <p:cond delay="0"/>
+                            </p:stCondLst>
+                            <p:childTnLst>
+                              <p:par>
+                                <p:cTn id="9" presetID="1" presetClass="entr" presetSubtype="0" fill="hold" nodeType="clickEffect">
+                                  <p:stCondLst>
+                                    <p:cond delay="0"/>
+                                  </p:stCondLst>
+                                  <p:childTnLst>
+                                    <p:set>
+                                      <p:cBhvr>
+                                        <p:cTn id="10" dur="1" fill="hold">
+                                          <p:stCondLst>
+                                            <p:cond delay="0"/>
+                                          </p:stCondLst>
+                                        </p:cTn>
+                                        <p:tgtEl>
+                                          <p:spTgt spid="4">
+                                            <p:txEl>
+                                              <p:pRg st="1" end="1"/>
+                                            </p:txEl>
+                                          </p:spTgt>
+                                        </p:tgtEl>
+                                        <p:attrNameLst>
+                                          <p:attrName>style.visibility</p:attrName>
+                                        </p:attrNameLst>
+                                      </p:cBhvr>
+                                      <p:to>
+                                        <p:strVal val="visible"/>
+                                      </p:to>
+                                    </p:set>
+                                  </p:childTnLst>
+                                </p:cTn>
+                              </p:par>
+                            </p:childTnLst>
+                          </p:cTn>
+                        </p:par>
+                      </p:childTnLst>
+                    </p:cTn>
+                  </p:par>
+                  <p:par>
+                    <p:cTn id="11" fill="hold">
+                      <p:stCondLst>
+                        <p:cond delay="indefinite"/>
+                      </p:stCondLst>
+                      <p:childTnLst>
+                        <p:par>
+                          <p:cTn id="12" fill="hold">
+                            <p:stCondLst>
+                              <p:cond delay="0"/>
+                            </p:stCondLst>
+                            <p:childTnLst>
+                              <p:par>
+                                <p:cTn id="13" presetID="1" presetClass="entr" presetSubtype="0" fill="hold" nodeType="clickEffect">
+                                  <p:stCondLst>
+                                    <p:cond delay="0"/>
+                                  </p:stCondLst>
+                                  <p:childTnLst>
+                                    <p:set>
+                                      <p:cBhvr>
+                                        <p:cTn id="14" dur="1" fill="hold">
+                                          <p:stCondLst>
+                                            <p:cond delay="0"/>
+                                          </p:stCondLst>
+                                        </p:cTn>
+                                        <p:tgtEl>
+                                          <p:spTgt spid="4">
+                                            <p:txEl>
+                                              <p:pRg st="2" end="2"/>
+                                            </p:txEl>
+                                          </p:spTgt>
+                                        </p:tgtEl>
+                                        <p:attrNameLst>
+                                          <p:attrName>style.visibility</p:attrName>
+                                        </p:attrNameLst>
+                                      </p:cBhvr>
+                                      <p:to>
+                                        <p:strVal val="visible"/>
+                                      </p:to>
+                                    </p:set>
+                                  </p:childTnLst>
+                                </p:cTn>
+                              </p:par>
+                            </p:childTnLst>
+                          </p:cTn>
+                        </p:par>
+                      </p:childTnLst>
+                    </p:cTn>
+                  </p:par>
+                </p:childTnLst>
+              </p:cTn>
+              <p:prevCondLst>
+                <p:cond evt="onPrev" delay="0">
+                  <p:tgtEl>
+                    <p:sldTgt/>
+                  </p:tgtEl>
+                </p:cond>
+              </p:prevCondLst>
+              <p:nextCondLst>
+                <p:cond evt="onNext" delay="0">
+                  <p:tgtEl>
+                    <p:sldTgt/>
+                  </p:tgtEl>
+                </p:cond>
+              </p:nextCondLst>
+            </p:seq>
+          </p:childTnLst>
+        </p:cTn>
+      </p:par>
+    </p:tnLst>
+  </p:timing>
 </p:sld>
 </file>
 
@@ -15291,39 +16387,26 @@
                                   </p:childTnLst>
                                 </p:cTn>
                               </p:par>
+                            </p:childTnLst>
+                          </p:cTn>
+                        </p:par>
+                      </p:childTnLst>
+                    </p:cTn>
+                  </p:par>
+                  <p:par>
+                    <p:cTn id="7" fill="hold">
+                      <p:stCondLst>
+                        <p:cond delay="indefinite"/>
+                      </p:stCondLst>
+                      <p:childTnLst>
+                        <p:par>
+                          <p:cTn id="8" fill="hold">
+                            <p:stCondLst>
+                              <p:cond delay="0"/>
+                            </p:stCondLst>
+                            <p:childTnLst>
                               <p:par>
-                                <p:cTn id="7" presetID="1" presetClass="entr" presetSubtype="0" fill="hold" nodeType="withEffect">
-                                  <p:stCondLst>
-                                    <p:cond delay="0"/>
-                                  </p:stCondLst>
-                                  <p:childTnLst>
-                                    <p:set>
-                                      <p:cBhvr>
-                                        <p:cTn id="8" dur="1" fill="hold">
-                                          <p:stCondLst>
-                                            <p:cond delay="0"/>
-                                          </p:stCondLst>
-                                        </p:cTn>
-                                        <p:tgtEl>
-                                          <p:spTgt spid="3">
-                                            <p:txEl>
-                                              <p:pRg st="2" end="2"/>
-                                            </p:txEl>
-                                          </p:spTgt>
-                                        </p:tgtEl>
-                                        <p:attrNameLst>
-                                          <p:attrName>style.visibility</p:attrName>
-                                        </p:attrNameLst>
-                                      </p:cBhvr>
-                                      <p:to>
-                                        <p:strVal val="visible"/>
-                                      </p:to>
-                                    </p:set>
-                                  </p:childTnLst>
-                                </p:cTn>
-                              </p:par>
-                              <p:par>
-                                <p:cTn id="9" presetID="1" presetClass="entr" presetSubtype="0" fill="hold" nodeType="withEffect">
+                                <p:cTn id="9" presetID="1" presetClass="entr" presetSubtype="0" fill="hold" nodeType="clickEffect">
                                   <p:stCondLst>
                                     <p:cond delay="0"/>
                                   </p:stCondLst>
@@ -15338,7 +16421,7 @@
                                         <p:tgtEl>
                                           <p:spTgt spid="3">
                                             <p:txEl>
-                                              <p:pRg st="3" end="3"/>
+                                              <p:pRg st="2" end="2"/>
                                             </p:txEl>
                                           </p:spTgt>
                                         </p:tgtEl>
@@ -15369,7 +16452,7 @@
                                         <p:tgtEl>
                                           <p:spTgt spid="3">
                                             <p:txEl>
-                                              <p:pRg st="4" end="4"/>
+                                              <p:pRg st="3" end="3"/>
                                             </p:txEl>
                                           </p:spTgt>
                                         </p:tgtEl>
@@ -15400,6 +16483,37 @@
                                         <p:tgtEl>
                                           <p:spTgt spid="3">
                                             <p:txEl>
+                                              <p:pRg st="4" end="4"/>
+                                            </p:txEl>
+                                          </p:spTgt>
+                                        </p:tgtEl>
+                                        <p:attrNameLst>
+                                          <p:attrName>style.visibility</p:attrName>
+                                        </p:attrNameLst>
+                                      </p:cBhvr>
+                                      <p:to>
+                                        <p:strVal val="visible"/>
+                                      </p:to>
+                                    </p:set>
+                                  </p:childTnLst>
+                                </p:cTn>
+                              </p:par>
+                              <p:par>
+                                <p:cTn id="15" presetID="1" presetClass="entr" presetSubtype="0" fill="hold" nodeType="withEffect">
+                                  <p:stCondLst>
+                                    <p:cond delay="0"/>
+                                  </p:stCondLst>
+                                  <p:childTnLst>
+                                    <p:set>
+                                      <p:cBhvr>
+                                        <p:cTn id="16" dur="1" fill="hold">
+                                          <p:stCondLst>
+                                            <p:cond delay="0"/>
+                                          </p:stCondLst>
+                                        </p:cTn>
+                                        <p:tgtEl>
+                                          <p:spTgt spid="3">
+                                            <p:txEl>
                                               <p:pRg st="5" end="5"/>
                                             </p:txEl>
                                           </p:spTgt>
@@ -15422,26 +16536,26 @@
                     </p:cTn>
                   </p:par>
                   <p:par>
-                    <p:cTn id="15" fill="hold">
+                    <p:cTn id="17" fill="hold">
                       <p:stCondLst>
                         <p:cond delay="indefinite"/>
                       </p:stCondLst>
                       <p:childTnLst>
                         <p:par>
-                          <p:cTn id="16" fill="hold">
+                          <p:cTn id="18" fill="hold">
                             <p:stCondLst>
                               <p:cond delay="0"/>
                             </p:stCondLst>
                             <p:childTnLst>
                               <p:par>
-                                <p:cTn id="17" presetID="1" presetClass="entr" presetSubtype="0" fill="hold" nodeType="clickEffect">
+                                <p:cTn id="19" presetID="1" presetClass="entr" presetSubtype="0" fill="hold" nodeType="clickEffect">
                                   <p:stCondLst>
                                     <p:cond delay="0"/>
                                   </p:stCondLst>
                                   <p:childTnLst>
                                     <p:set>
                                       <p:cBhvr>
-                                        <p:cTn id="18" dur="1" fill="hold">
+                                        <p:cTn id="20" dur="1" fill="hold">
                                           <p:stCondLst>
                                             <p:cond delay="0"/>
                                           </p:stCondLst>
@@ -15471,26 +16585,26 @@
                     </p:cTn>
                   </p:par>
                   <p:par>
-                    <p:cTn id="19" fill="hold">
+                    <p:cTn id="21" fill="hold">
                       <p:stCondLst>
                         <p:cond delay="indefinite"/>
                       </p:stCondLst>
                       <p:childTnLst>
                         <p:par>
-                          <p:cTn id="20" fill="hold">
+                          <p:cTn id="22" fill="hold">
                             <p:stCondLst>
                               <p:cond delay="0"/>
                             </p:stCondLst>
                             <p:childTnLst>
                               <p:par>
-                                <p:cTn id="21" presetID="1" presetClass="entr" presetSubtype="0" fill="hold" nodeType="clickEffect">
+                                <p:cTn id="23" presetID="1" presetClass="entr" presetSubtype="0" fill="hold" nodeType="clickEffect">
                                   <p:stCondLst>
                                     <p:cond delay="0"/>
                                   </p:stCondLst>
                                   <p:childTnLst>
                                     <p:set>
                                       <p:cBhvr>
-                                        <p:cTn id="22" dur="1" fill="hold">
+                                        <p:cTn id="24" dur="1" fill="hold">
                                           <p:stCondLst>
                                             <p:cond delay="0"/>
                                           </p:stCondLst>
@@ -15520,26 +16634,26 @@
                     </p:cTn>
                   </p:par>
                   <p:par>
-                    <p:cTn id="23" fill="hold">
+                    <p:cTn id="25" fill="hold">
                       <p:stCondLst>
                         <p:cond delay="indefinite"/>
                       </p:stCondLst>
                       <p:childTnLst>
                         <p:par>
-                          <p:cTn id="24" fill="hold">
+                          <p:cTn id="26" fill="hold">
                             <p:stCondLst>
                               <p:cond delay="0"/>
                             </p:stCondLst>
                             <p:childTnLst>
                               <p:par>
-                                <p:cTn id="25" presetID="1" presetClass="entr" presetSubtype="0" fill="hold" nodeType="clickEffect">
+                                <p:cTn id="27" presetID="1" presetClass="entr" presetSubtype="0" fill="hold" nodeType="clickEffect">
                                   <p:stCondLst>
                                     <p:cond delay="0"/>
                                   </p:stCondLst>
                                   <p:childTnLst>
                                     <p:set>
                                       <p:cBhvr>
-                                        <p:cTn id="26" dur="1" fill="hold">
+                                        <p:cTn id="28" dur="1" fill="hold">
                                           <p:stCondLst>
                                             <p:cond delay="0"/>
                                           </p:stCondLst>
@@ -15711,14 +16825,11 @@
                 <a:pPr lvl="0"/>
                 <a14:m>
                   <m:oMathPara xmlns:m="http://schemas.openxmlformats.org/officeDocument/2006/math">
-                    <m:oMathParaPr>
-                      <m:jc m:val="centerGroup"/>
-                    </m:oMathParaPr>
-                    <m:oMath xmlns:m="http://schemas.openxmlformats.org/officeDocument/2006/math">
+                    <m:oMath>
                       <m:sSub>
                         <m:sSubPr>
                           <m:ctrlPr>
-                            <a:rPr lang="en-US" sz="2000" i="1" smtClean="0">
+                            <a:rPr lang="en-US" sz="2000" i="1">
                               <a:latin typeface="Cambria Math" panose="02040503050406030204" pitchFamily="18" charset="0"/>
                               <a:ea typeface="Cambria Math" panose="02040503050406030204" pitchFamily="18" charset="0"/>
                             </a:rPr>
@@ -15753,7 +16864,7 @@
                               <a:latin typeface="Cambria Math" panose="02040503050406030204" pitchFamily="18" charset="0"/>
                               <a:ea typeface="Cambria Math" panose="02040503050406030204" pitchFamily="18" charset="0"/>
                             </a:rPr>
-                            <m:t>h</m:t>
+                            <m:t>ℎ</m:t>
                           </m:r>
                         </m:sub>
                       </m:sSub>
@@ -15802,7 +16913,7 @@
                               <a:latin typeface="Cambria Math" panose="02040503050406030204" pitchFamily="18" charset="0"/>
                               <a:ea typeface="Cambria Math" panose="02040503050406030204" pitchFamily="18" charset="0"/>
                             </a:rPr>
-                            <m:t>h</m:t>
+                            <m:t>ℎ</m:t>
                           </m:r>
                         </m:sub>
                       </m:sSub>
@@ -15835,14 +16946,7 @@
                               <a:latin typeface="Cambria Math" panose="02040503050406030204" pitchFamily="18" charset="0"/>
                               <a:ea typeface="Cambria Math" panose="02040503050406030204" pitchFamily="18" charset="0"/>
                             </a:rPr>
-                            <m:t>0</m:t>
-                          </m:r>
-                          <m:r>
-                            <a:rPr lang="en-US" sz="2000" b="0" i="1" smtClean="0">
-                              <a:latin typeface="Cambria Math" panose="02040503050406030204" pitchFamily="18" charset="0"/>
-                              <a:ea typeface="Cambria Math" panose="02040503050406030204" pitchFamily="18" charset="0"/>
-                            </a:rPr>
-                            <m:t>,</m:t>
+                            <m:t>0,</m:t>
                           </m:r>
                           <m:r>
                             <a:rPr lang="en-US" sz="2000" b="0" i="1" smtClean="0">
@@ -15862,10 +16966,7 @@
                 <a:pPr lvl="0"/>
                 <a14:m>
                   <m:oMathPara xmlns:m="http://schemas.openxmlformats.org/officeDocument/2006/math">
-                    <m:oMathParaPr>
-                      <m:jc m:val="centerGroup"/>
-                    </m:oMathParaPr>
-                    <m:oMath xmlns:m="http://schemas.openxmlformats.org/officeDocument/2006/math">
+                    <m:oMath>
                       <m:sSub>
                         <m:sSubPr>
                           <m:ctrlPr>
@@ -15890,7 +16991,7 @@
                               <a:latin typeface="Cambria Math" panose="02040503050406030204" pitchFamily="18" charset="0"/>
                               <a:ea typeface="Cambria Math" panose="02040503050406030204" pitchFamily="18" charset="0"/>
                             </a:rPr>
-                            <m:t>h</m:t>
+                            <m:t>ℎ</m:t>
                           </m:r>
                         </m:sub>
                       </m:sSub>
@@ -15906,28 +17007,13 @@
                           <a:latin typeface="Cambria Math" panose="02040503050406030204" pitchFamily="18" charset="0"/>
                           <a:ea typeface="Cambria Math" panose="02040503050406030204" pitchFamily="18" charset="0"/>
                         </a:rPr>
-                        <m:t>𝐶𝑎𝑢𝑐</m:t>
-                      </m:r>
-                      <m:r>
-                        <a:rPr lang="en-US" sz="2000" b="0" i="1" smtClean="0">
-                          <a:latin typeface="Cambria Math" panose="02040503050406030204" pitchFamily="18" charset="0"/>
-                          <a:ea typeface="Cambria Math" panose="02040503050406030204" pitchFamily="18" charset="0"/>
-                        </a:rPr>
-                        <m:t>h</m:t>
-                      </m:r>
-                      <m:r>
-                        <a:rPr lang="en-US" sz="2000" b="0" i="1" smtClean="0">
-                          <a:latin typeface="Cambria Math" panose="02040503050406030204" pitchFamily="18" charset="0"/>
-                          <a:ea typeface="Cambria Math" panose="02040503050406030204" pitchFamily="18" charset="0"/>
-                        </a:rPr>
-                        <m:t>𝑦</m:t>
+                        <m:t>𝐶𝑎𝑢𝑐ℎ𝑦</m:t>
                       </m:r>
                       <m:d>
                         <m:dPr>
                           <m:ctrlPr>
-                            <a:rPr lang="en-US" sz="2000" b="0" i="1" smtClean="0">
+                            <a:rPr lang="en-US" sz="2000">
                               <a:latin typeface="Cambria Math" panose="02040503050406030204" pitchFamily="18" charset="0"/>
-                              <a:ea typeface="Cambria Math" panose="02040503050406030204" pitchFamily="18" charset="0"/>
                             </a:rPr>
                           </m:ctrlPr>
                         </m:dPr>
@@ -15959,7 +17045,7 @@
                     <m:sSub>
                       <m:sSubPr>
                         <m:ctrlPr>
-                          <a:rPr lang="en-US" sz="2000" i="1" smtClean="0">
+                          <a:rPr lang="en-US" sz="2000" i="1">
                             <a:latin typeface="Cambria Math" panose="02040503050406030204" pitchFamily="18" charset="0"/>
                             <a:ea typeface="Cambria Math" panose="02040503050406030204" pitchFamily="18" charset="0"/>
                           </a:rPr>
@@ -16058,14 +17144,11 @@
                 <a:pPr lvl="0"/>
                 <a14:m>
                   <m:oMathPara xmlns:m="http://schemas.openxmlformats.org/officeDocument/2006/math">
-                    <m:oMathParaPr>
-                      <m:jc m:val="centerGroup"/>
-                    </m:oMathParaPr>
-                    <m:oMath xmlns:m="http://schemas.openxmlformats.org/officeDocument/2006/math">
+                    <m:oMath>
                       <m:sSub>
                         <m:sSubPr>
                           <m:ctrlPr>
-                            <a:rPr lang="en-US" sz="2000" i="1" smtClean="0">
+                            <a:rPr lang="en-US" sz="2000" i="1">
                               <a:latin typeface="Cambria Math" panose="02040503050406030204" pitchFamily="18" charset="0"/>
                               <a:ea typeface="Cambria Math" panose="02040503050406030204" pitchFamily="18" charset="0"/>
                             </a:rPr>
@@ -16170,7 +17253,7 @@
                       <m:d>
                         <m:dPr>
                           <m:ctrlPr>
-                            <a:rPr lang="en-US" sz="2000" b="0" i="1" smtClean="0">
+                            <a:rPr lang="en-US" sz="2000" i="1">
                               <a:latin typeface="Cambria Math" panose="02040503050406030204" pitchFamily="18" charset="0"/>
                               <a:ea typeface="Cambria Math" panose="02040503050406030204" pitchFamily="18" charset="0"/>
                             </a:rPr>
@@ -16201,21 +17284,14 @@
                                   <a:latin typeface="Cambria Math" panose="02040503050406030204" pitchFamily="18" charset="0"/>
                                   <a:ea typeface="Cambria Math" panose="02040503050406030204" pitchFamily="18" charset="0"/>
                                 </a:rPr>
-                                <m:t>0</m:t>
-                              </m:r>
-                              <m:r>
-                                <a:rPr lang="en-US" sz="2000" i="1">
-                                  <a:latin typeface="Cambria Math" panose="02040503050406030204" pitchFamily="18" charset="0"/>
-                                  <a:ea typeface="Cambria Math" panose="02040503050406030204" pitchFamily="18" charset="0"/>
-                                </a:rPr>
-                                <m:t>,</m:t>
+                                <m:t>0,</m:t>
                               </m:r>
                               <m:r>
                                 <a:rPr lang="en-US" sz="2000" b="0" i="1" smtClean="0">
                                   <a:latin typeface="Cambria Math" panose="02040503050406030204" pitchFamily="18" charset="0"/>
                                   <a:ea typeface="Cambria Math" panose="02040503050406030204" pitchFamily="18" charset="0"/>
                                 </a:rPr>
-                                <m:t>h</m:t>
+                                <m:t>ℎ</m:t>
                               </m:r>
                             </m:sub>
                           </m:sSub>
@@ -16250,21 +17326,14 @@
                                   <a:latin typeface="Cambria Math" panose="02040503050406030204" pitchFamily="18" charset="0"/>
                                   <a:ea typeface="Cambria Math" panose="02040503050406030204" pitchFamily="18" charset="0"/>
                                 </a:rPr>
-                                <m:t>1</m:t>
-                              </m:r>
-                              <m:r>
-                                <a:rPr lang="en-US" sz="2000" i="1">
-                                  <a:latin typeface="Cambria Math" panose="02040503050406030204" pitchFamily="18" charset="0"/>
-                                  <a:ea typeface="Cambria Math" panose="02040503050406030204" pitchFamily="18" charset="0"/>
-                                </a:rPr>
-                                <m:t>,</m:t>
+                                <m:t>1,</m:t>
                               </m:r>
                               <m:r>
                                 <a:rPr lang="en-US" sz="2000" b="0" i="1" smtClean="0">
                                   <a:latin typeface="Cambria Math" panose="02040503050406030204" pitchFamily="18" charset="0"/>
                                   <a:ea typeface="Cambria Math" panose="02040503050406030204" pitchFamily="18" charset="0"/>
                                 </a:rPr>
-                                <m:t>h</m:t>
+                                <m:t>ℎ</m:t>
                               </m:r>
                             </m:sub>
                           </m:sSub>
@@ -16299,7 +17368,7 @@
                                   <a:latin typeface="Cambria Math" panose="02040503050406030204" pitchFamily="18" charset="0"/>
                                   <a:ea typeface="Cambria Math" panose="02040503050406030204" pitchFamily="18" charset="0"/>
                                 </a:rPr>
-                                <m:t>h</m:t>
+                                <m:t>ℎ</m:t>
                               </m:r>
                             </m:sub>
                           </m:sSub>
@@ -16517,6 +17586,33 @@
                                   </p:childTnLst>
                                 </p:cTn>
                               </p:par>
+                              <p:par>
+                                <p:cTn id="11" presetID="1" presetClass="entr" presetSubtype="0" fill="hold" nodeType="withEffect">
+                                  <p:stCondLst>
+                                    <p:cond delay="0"/>
+                                  </p:stCondLst>
+                                  <p:childTnLst>
+                                    <p:set>
+                                      <p:cBhvr>
+                                        <p:cTn id="12" dur="1" fill="hold">
+                                          <p:stCondLst>
+                                            <p:cond delay="0"/>
+                                          </p:stCondLst>
+                                        </p:cTn>
+                                        <p:tgtEl>
+                                          <p:spTgt spid="6"/>
+                                        </p:tgtEl>
+                                        <p:attrNameLst>
+                                          <p:attrName>style.visibility</p:attrName>
+                                        </p:attrNameLst>
+                                      </p:cBhvr>
+                                      <p:to>
+                                        <p:strVal val="visible"/>
+                                      </p:to>
+                                    </p:set>
+                                  </p:childTnLst>
+                                </p:cTn>
+                              </p:par>
                             </p:childTnLst>
                           </p:cTn>
                         </p:par>
@@ -16524,26 +17620,26 @@
                     </p:cTn>
                   </p:par>
                   <p:par>
-                    <p:cTn id="11" fill="hold">
+                    <p:cTn id="13" fill="hold">
                       <p:stCondLst>
                         <p:cond delay="indefinite"/>
                       </p:stCondLst>
                       <p:childTnLst>
                         <p:par>
-                          <p:cTn id="12" fill="hold">
+                          <p:cTn id="14" fill="hold">
                             <p:stCondLst>
                               <p:cond delay="0"/>
                             </p:stCondLst>
                             <p:childTnLst>
                               <p:par>
-                                <p:cTn id="13" presetID="1" presetClass="entr" presetSubtype="0" fill="hold" nodeType="clickEffect">
+                                <p:cTn id="15" presetID="1" presetClass="entr" presetSubtype="0" fill="hold" nodeType="clickEffect">
                                   <p:stCondLst>
                                     <p:cond delay="0"/>
                                   </p:stCondLst>
                                   <p:childTnLst>
                                     <p:set>
                                       <p:cBhvr>
-                                        <p:cTn id="14" dur="1" fill="hold">
+                                        <p:cTn id="16" dur="1" fill="hold">
                                           <p:stCondLst>
                                             <p:cond delay="0"/>
                                           </p:stCondLst>
@@ -16567,14 +17663,14 @@
                                 </p:cTn>
                               </p:par>
                               <p:par>
-                                <p:cTn id="15" presetID="1" presetClass="entr" presetSubtype="0" fill="hold" nodeType="withEffect">
+                                <p:cTn id="17" presetID="1" presetClass="entr" presetSubtype="0" fill="hold" nodeType="withEffect">
                                   <p:stCondLst>
                                     <p:cond delay="0"/>
                                   </p:stCondLst>
                                   <p:childTnLst>
                                     <p:set>
                                       <p:cBhvr>
-                                        <p:cTn id="16" dur="1" fill="hold">
+                                        <p:cTn id="18" dur="1" fill="hold">
                                           <p:stCondLst>
                                             <p:cond delay="0"/>
                                           </p:stCondLst>
@@ -16693,8 +17789,8 @@
           </a:p>
         </p:txBody>
       </p:sp>
-      <mc:AlternateContent xmlns:mc="http://schemas.openxmlformats.org/markup-compatibility/2006">
-        <mc:Choice xmlns:a14="http://schemas.microsoft.com/office/drawing/2010/main" Requires="a14">
+      <mc:AlternateContent xmlns:mc="http://schemas.openxmlformats.org/markup-compatibility/2006" xmlns:a14="http://schemas.microsoft.com/office/drawing/2010/main">
+        <mc:Choice Requires="a14">
           <p:sp>
             <p:nvSpPr>
               <p:cNvPr id="4" name="Text Placeholder 3">
@@ -16758,10 +17854,7 @@
                 <a:pPr lvl="0"/>
                 <a14:m>
                   <m:oMathPara xmlns:m="http://schemas.openxmlformats.org/officeDocument/2006/math">
-                    <m:oMathParaPr>
-                      <m:jc m:val="centerGroup"/>
-                    </m:oMathParaPr>
-                    <m:oMath xmlns:m="http://schemas.openxmlformats.org/officeDocument/2006/math">
+                    <m:oMath>
                       <m:r>
                         <a:rPr lang="en-US" sz="2000" i="1">
                           <a:latin typeface="Cambria Math" panose="02040503050406030204" pitchFamily="18" charset="0"/>
@@ -16781,28 +17874,13 @@
                           <a:latin typeface="Cambria Math" panose="02040503050406030204" pitchFamily="18" charset="0"/>
                           <a:ea typeface="Cambria Math" panose="02040503050406030204" pitchFamily="18" charset="0"/>
                         </a:rPr>
-                        <m:t>𝐶𝑎𝑢𝑐</m:t>
-                      </m:r>
-                      <m:r>
-                        <a:rPr lang="en-US" sz="2000" i="1">
-                          <a:latin typeface="Cambria Math" panose="02040503050406030204" pitchFamily="18" charset="0"/>
-                          <a:ea typeface="Cambria Math" panose="02040503050406030204" pitchFamily="18" charset="0"/>
-                        </a:rPr>
-                        <m:t>h</m:t>
-                      </m:r>
-                      <m:r>
-                        <a:rPr lang="en-US" sz="2000" i="1">
-                          <a:latin typeface="Cambria Math" panose="02040503050406030204" pitchFamily="18" charset="0"/>
-                          <a:ea typeface="Cambria Math" panose="02040503050406030204" pitchFamily="18" charset="0"/>
-                        </a:rPr>
-                        <m:t>𝑦</m:t>
+                        <m:t>𝐶𝑎𝑢𝑐ℎ𝑦</m:t>
                       </m:r>
                       <m:d>
                         <m:dPr>
                           <m:ctrlPr>
-                            <a:rPr lang="en-US" sz="2000" i="1">
+                            <a:rPr lang="en-US" sz="2000">
                               <a:latin typeface="Cambria Math" panose="02040503050406030204" pitchFamily="18" charset="0"/>
-                              <a:ea typeface="Cambria Math" panose="02040503050406030204" pitchFamily="18" charset="0"/>
                             </a:rPr>
                           </m:ctrlPr>
                         </m:dPr>
@@ -16840,10 +17918,7 @@
                 <a:pPr lvl="0"/>
                 <a14:m>
                   <m:oMathPara xmlns:m="http://schemas.openxmlformats.org/officeDocument/2006/math">
-                    <m:oMathParaPr>
-                      <m:jc m:val="centerGroup"/>
-                    </m:oMathParaPr>
-                    <m:oMath xmlns:m="http://schemas.openxmlformats.org/officeDocument/2006/math">
+                    <m:oMath>
                       <m:r>
                         <a:rPr lang="en-US" sz="2000" i="1">
                           <a:latin typeface="Cambria Math" panose="02040503050406030204" pitchFamily="18" charset="0"/>
@@ -16944,10 +18019,7 @@
                 <a:pPr/>
                 <a14:m>
                   <m:oMathPara xmlns:m="http://schemas.openxmlformats.org/officeDocument/2006/math">
-                    <m:oMathParaPr>
-                      <m:jc m:val="centerGroup"/>
-                    </m:oMathParaPr>
-                    <m:oMath xmlns:m="http://schemas.openxmlformats.org/officeDocument/2006/math">
+                    <m:oMath>
                       <m:sSub>
                         <m:sSubPr>
                           <m:ctrlPr>
@@ -17007,14 +18079,7 @@
                               <a:latin typeface="Cambria Math" panose="02040503050406030204" pitchFamily="18" charset="0"/>
                               <a:ea typeface="Cambria Math" panose="02040503050406030204" pitchFamily="18" charset="0"/>
                             </a:rPr>
-                            <m:t>0</m:t>
-                          </m:r>
-                          <m:r>
-                            <a:rPr lang="en-US" sz="2000" i="1">
-                              <a:latin typeface="Cambria Math" panose="02040503050406030204" pitchFamily="18" charset="0"/>
-                              <a:ea typeface="Cambria Math" panose="02040503050406030204" pitchFamily="18" charset="0"/>
-                            </a:rPr>
-                            <m:t>,</m:t>
+                            <m:t>0,</m:t>
                           </m:r>
                           <m:r>
                             <a:rPr lang="en-US" sz="2000" i="1">
@@ -17056,14 +18121,7 @@
                               <a:latin typeface="Cambria Math" panose="02040503050406030204" pitchFamily="18" charset="0"/>
                               <a:ea typeface="Cambria Math" panose="02040503050406030204" pitchFamily="18" charset="0"/>
                             </a:rPr>
-                            <m:t>1</m:t>
-                          </m:r>
-                          <m:r>
-                            <a:rPr lang="en-US" sz="2000" i="1">
-                              <a:latin typeface="Cambria Math" panose="02040503050406030204" pitchFamily="18" charset="0"/>
-                              <a:ea typeface="Cambria Math" panose="02040503050406030204" pitchFamily="18" charset="0"/>
-                            </a:rPr>
-                            <m:t>,</m:t>
+                            <m:t>1,</m:t>
                           </m:r>
                           <m:r>
                             <a:rPr lang="en-US" sz="2000" i="1">
@@ -17114,7 +18172,7 @@
             </p:txBody>
           </p:sp>
         </mc:Choice>
-        <mc:Fallback>
+        <mc:Fallback xmlns="">
           <p:sp>
             <p:nvSpPr>
               <p:cNvPr id="4" name="Text Placeholder 3">
@@ -17173,7 +18231,7 @@
           <p:nvPr/>
         </p:nvPicPr>
         <p:blipFill>
-          <a:blip r:embed="rId3"/>
+          <a:blip r:embed="rId2"/>
           <a:stretch>
             <a:fillRect/>
           </a:stretch>
@@ -17198,6 +18256,227 @@
   <p:clrMapOvr>
     <a:masterClrMapping/>
   </p:clrMapOvr>
+  <p:timing>
+    <p:tnLst>
+      <p:par>
+        <p:cTn id="1" dur="indefinite" restart="never" nodeType="tmRoot">
+          <p:childTnLst>
+            <p:seq concurrent="1" nextAc="seek">
+              <p:cTn id="2" dur="indefinite" nodeType="mainSeq">
+                <p:childTnLst>
+                  <p:par>
+                    <p:cTn id="3" fill="hold">
+                      <p:stCondLst>
+                        <p:cond delay="indefinite"/>
+                      </p:stCondLst>
+                      <p:childTnLst>
+                        <p:par>
+                          <p:cTn id="4" fill="hold">
+                            <p:stCondLst>
+                              <p:cond delay="0"/>
+                            </p:stCondLst>
+                            <p:childTnLst>
+                              <p:par>
+                                <p:cTn id="5" presetID="1" presetClass="entr" presetSubtype="0" fill="hold" nodeType="clickEffect">
+                                  <p:stCondLst>
+                                    <p:cond delay="0"/>
+                                  </p:stCondLst>
+                                  <p:childTnLst>
+                                    <p:set>
+                                      <p:cBhvr>
+                                        <p:cTn id="6" dur="1" fill="hold">
+                                          <p:stCondLst>
+                                            <p:cond delay="0"/>
+                                          </p:stCondLst>
+                                        </p:cTn>
+                                        <p:tgtEl>
+                                          <p:spTgt spid="4">
+                                            <p:txEl>
+                                              <p:pRg st="1" end="1"/>
+                                            </p:txEl>
+                                          </p:spTgt>
+                                        </p:tgtEl>
+                                        <p:attrNameLst>
+                                          <p:attrName>style.visibility</p:attrName>
+                                        </p:attrNameLst>
+                                      </p:cBhvr>
+                                      <p:to>
+                                        <p:strVal val="visible"/>
+                                      </p:to>
+                                    </p:set>
+                                  </p:childTnLst>
+                                </p:cTn>
+                              </p:par>
+                              <p:par>
+                                <p:cTn id="7" presetID="1" presetClass="entr" presetSubtype="0" fill="hold" nodeType="withEffect">
+                                  <p:stCondLst>
+                                    <p:cond delay="0"/>
+                                  </p:stCondLst>
+                                  <p:childTnLst>
+                                    <p:set>
+                                      <p:cBhvr>
+                                        <p:cTn id="8" dur="1" fill="hold">
+                                          <p:stCondLst>
+                                            <p:cond delay="0"/>
+                                          </p:stCondLst>
+                                        </p:cTn>
+                                        <p:tgtEl>
+                                          <p:spTgt spid="4">
+                                            <p:txEl>
+                                              <p:pRg st="2" end="2"/>
+                                            </p:txEl>
+                                          </p:spTgt>
+                                        </p:tgtEl>
+                                        <p:attrNameLst>
+                                          <p:attrName>style.visibility</p:attrName>
+                                        </p:attrNameLst>
+                                      </p:cBhvr>
+                                      <p:to>
+                                        <p:strVal val="visible"/>
+                                      </p:to>
+                                    </p:set>
+                                  </p:childTnLst>
+                                </p:cTn>
+                              </p:par>
+                            </p:childTnLst>
+                          </p:cTn>
+                        </p:par>
+                      </p:childTnLst>
+                    </p:cTn>
+                  </p:par>
+                  <p:par>
+                    <p:cTn id="9" fill="hold">
+                      <p:stCondLst>
+                        <p:cond delay="indefinite"/>
+                      </p:stCondLst>
+                      <p:childTnLst>
+                        <p:par>
+                          <p:cTn id="10" fill="hold">
+                            <p:stCondLst>
+                              <p:cond delay="0"/>
+                            </p:stCondLst>
+                            <p:childTnLst>
+                              <p:par>
+                                <p:cTn id="11" presetID="1" presetClass="entr" presetSubtype="0" fill="hold" nodeType="clickEffect">
+                                  <p:stCondLst>
+                                    <p:cond delay="0"/>
+                                  </p:stCondLst>
+                                  <p:childTnLst>
+                                    <p:set>
+                                      <p:cBhvr>
+                                        <p:cTn id="12" dur="1" fill="hold">
+                                          <p:stCondLst>
+                                            <p:cond delay="0"/>
+                                          </p:stCondLst>
+                                        </p:cTn>
+                                        <p:tgtEl>
+                                          <p:spTgt spid="4">
+                                            <p:txEl>
+                                              <p:pRg st="3" end="3"/>
+                                            </p:txEl>
+                                          </p:spTgt>
+                                        </p:tgtEl>
+                                        <p:attrNameLst>
+                                          <p:attrName>style.visibility</p:attrName>
+                                        </p:attrNameLst>
+                                      </p:cBhvr>
+                                      <p:to>
+                                        <p:strVal val="visible"/>
+                                      </p:to>
+                                    </p:set>
+                                  </p:childTnLst>
+                                </p:cTn>
+                              </p:par>
+                              <p:par>
+                                <p:cTn id="13" presetID="1" presetClass="entr" presetSubtype="0" fill="hold" nodeType="withEffect">
+                                  <p:stCondLst>
+                                    <p:cond delay="0"/>
+                                  </p:stCondLst>
+                                  <p:childTnLst>
+                                    <p:set>
+                                      <p:cBhvr>
+                                        <p:cTn id="14" dur="1" fill="hold">
+                                          <p:stCondLst>
+                                            <p:cond delay="0"/>
+                                          </p:stCondLst>
+                                        </p:cTn>
+                                        <p:tgtEl>
+                                          <p:spTgt spid="4">
+                                            <p:txEl>
+                                              <p:pRg st="4" end="4"/>
+                                            </p:txEl>
+                                          </p:spTgt>
+                                        </p:tgtEl>
+                                        <p:attrNameLst>
+                                          <p:attrName>style.visibility</p:attrName>
+                                        </p:attrNameLst>
+                                      </p:cBhvr>
+                                      <p:to>
+                                        <p:strVal val="visible"/>
+                                      </p:to>
+                                    </p:set>
+                                  </p:childTnLst>
+                                </p:cTn>
+                              </p:par>
+                              <p:par>
+                                <p:cTn id="15" presetID="1" presetClass="entr" presetSubtype="0" fill="hold" nodeType="withEffect">
+                                  <p:stCondLst>
+                                    <p:cond delay="0"/>
+                                  </p:stCondLst>
+                                  <p:childTnLst>
+                                    <p:set>
+                                      <p:cBhvr>
+                                        <p:cTn id="16" dur="1" fill="hold">
+                                          <p:stCondLst>
+                                            <p:cond delay="0"/>
+                                          </p:stCondLst>
+                                        </p:cTn>
+                                        <p:tgtEl>
+                                          <p:spTgt spid="4">
+                                            <p:txEl>
+                                              <p:pRg st="5" end="5"/>
+                                            </p:txEl>
+                                          </p:spTgt>
+                                        </p:tgtEl>
+                                        <p:attrNameLst>
+                                          <p:attrName>style.visibility</p:attrName>
+                                        </p:attrNameLst>
+                                      </p:cBhvr>
+                                      <p:to>
+                                        <p:strVal val="visible"/>
+                                      </p:to>
+                                    </p:set>
+                                  </p:childTnLst>
+                                </p:cTn>
+                              </p:par>
+                            </p:childTnLst>
+                          </p:cTn>
+                        </p:par>
+                      </p:childTnLst>
+                    </p:cTn>
+                  </p:par>
+                </p:childTnLst>
+              </p:cTn>
+              <p:prevCondLst>
+                <p:cond evt="onPrev" delay="0">
+                  <p:tgtEl>
+                    <p:sldTgt/>
+                  </p:tgtEl>
+                </p:cond>
+              </p:prevCondLst>
+              <p:nextCondLst>
+                <p:cond evt="onNext" delay="0">
+                  <p:tgtEl>
+                    <p:sldTgt/>
+                  </p:tgtEl>
+                </p:cond>
+              </p:nextCondLst>
+            </p:seq>
+          </p:childTnLst>
+        </p:cTn>
+      </p:par>
+    </p:tnLst>
+  </p:timing>
 </p:sld>
 </file>
 
@@ -18371,10 +19650,7 @@
                 <a:pPr lvl="0"/>
                 <a14:m>
                   <m:oMathPara xmlns:m="http://schemas.openxmlformats.org/officeDocument/2006/math">
-                    <m:oMathParaPr>
-                      <m:jc m:val="centerGroup"/>
-                    </m:oMathParaPr>
-                    <m:oMath xmlns:m="http://schemas.openxmlformats.org/officeDocument/2006/math">
+                    <m:oMath>
                       <m:sSub>
                         <m:sSubPr>
                           <m:ctrlPr>
@@ -18399,7 +19675,7 @@
                               <a:latin typeface="Cambria Math" panose="02040503050406030204" pitchFamily="18" charset="0"/>
                               <a:ea typeface="Cambria Math" panose="02040503050406030204" pitchFamily="18" charset="0"/>
                             </a:rPr>
-                            <m:t>h</m:t>
+                            <m:t>ℎ</m:t>
                           </m:r>
                         </m:sub>
                       </m:sSub>
@@ -18427,7 +19703,7 @@
                       <m:d>
                         <m:dPr>
                           <m:ctrlPr>
-                            <a:rPr lang="en-US" sz="2000" i="1" smtClean="0">
+                            <a:rPr lang="en-US" sz="2000" b="0" i="1" smtClean="0">
                               <a:latin typeface="Cambria Math" panose="02040503050406030204" pitchFamily="18" charset="0"/>
                               <a:ea typeface="Cambria Math" panose="02040503050406030204" pitchFamily="18" charset="0"/>
                             </a:rPr>
@@ -18439,14 +19715,7 @@
                               <a:latin typeface="Cambria Math" panose="02040503050406030204" pitchFamily="18" charset="0"/>
                               <a:ea typeface="Cambria Math" panose="02040503050406030204" pitchFamily="18" charset="0"/>
                             </a:rPr>
-                            <m:t>0</m:t>
-                          </m:r>
-                          <m:r>
-                            <a:rPr lang="en-US" sz="2000" b="0" i="1" smtClean="0">
-                              <a:latin typeface="Cambria Math" panose="02040503050406030204" pitchFamily="18" charset="0"/>
-                              <a:ea typeface="Cambria Math" panose="02040503050406030204" pitchFamily="18" charset="0"/>
-                            </a:rPr>
-                            <m:t>,</m:t>
+                            <m:t>0,</m:t>
                           </m:r>
                           <m:r>
                             <a:rPr lang="en-US" sz="2000">
@@ -18488,7 +19757,7 @@
                     <m:sSub>
                       <m:sSubPr>
                         <m:ctrlPr>
-                          <a:rPr lang="en-US" sz="2000" i="1" smtClean="0">
+                          <a:rPr lang="en-US" sz="2000" i="1">
                             <a:latin typeface="Cambria Math" panose="02040503050406030204" pitchFamily="18" charset="0"/>
                             <a:ea typeface="Cambria Math" panose="02040503050406030204" pitchFamily="18" charset="0"/>
                           </a:rPr>
@@ -18523,7 +19792,7 @@
                             <a:latin typeface="Cambria Math" panose="02040503050406030204" pitchFamily="18" charset="0"/>
                             <a:ea typeface="Cambria Math" panose="02040503050406030204" pitchFamily="18" charset="0"/>
                           </a:rPr>
-                          <m:t>h</m:t>
+                          <m:t>ℎ</m:t>
                         </m:r>
                       </m:sub>
                     </m:sSub>
@@ -18579,7 +19848,7 @@
                             <a:latin typeface="Cambria Math" panose="02040503050406030204" pitchFamily="18" charset="0"/>
                             <a:ea typeface="Cambria Math" panose="02040503050406030204" pitchFamily="18" charset="0"/>
                           </a:rPr>
-                          <m:t>h</m:t>
+                          <m:t>ℎ</m:t>
                         </m:r>
                       </m:sub>
                     </m:sSub>
@@ -18594,14 +19863,11 @@
                 <a:pPr lvl="0"/>
                 <a14:m>
                   <m:oMathPara xmlns:m="http://schemas.openxmlformats.org/officeDocument/2006/math">
-                    <m:oMathParaPr>
-                      <m:jc m:val="centerGroup"/>
-                    </m:oMathParaPr>
-                    <m:oMath xmlns:m="http://schemas.openxmlformats.org/officeDocument/2006/math">
+                    <m:oMath>
                       <m:sSub>
                         <m:sSubPr>
                           <m:ctrlPr>
-                            <a:rPr lang="en-US" sz="2000" i="1" smtClean="0">
+                            <a:rPr lang="en-US" sz="2000" i="1">
                               <a:latin typeface="Cambria Math" panose="02040503050406030204" pitchFamily="18" charset="0"/>
                               <a:ea typeface="Cambria Math" panose="02040503050406030204" pitchFamily="18" charset="0"/>
                             </a:rPr>
@@ -18636,7 +19902,7 @@
                               <a:latin typeface="Cambria Math" panose="02040503050406030204" pitchFamily="18" charset="0"/>
                               <a:ea typeface="Cambria Math" panose="02040503050406030204" pitchFamily="18" charset="0"/>
                             </a:rPr>
-                            <m:t>h</m:t>
+                            <m:t>ℎ</m:t>
                           </m:r>
                         </m:sub>
                       </m:sSub>
@@ -18685,7 +19951,7 @@
                               <a:latin typeface="Cambria Math" panose="02040503050406030204" pitchFamily="18" charset="0"/>
                               <a:ea typeface="Cambria Math" panose="02040503050406030204" pitchFamily="18" charset="0"/>
                             </a:rPr>
-                            <m:t>h</m:t>
+                            <m:t>ℎ</m:t>
                           </m:r>
                         </m:sub>
                       </m:sSub>
@@ -18713,7 +19979,7 @@
                       <m:d>
                         <m:dPr>
                           <m:ctrlPr>
-                            <a:rPr lang="en-US" sz="2000" b="0" i="1" smtClean="0">
+                            <a:rPr lang="en-US" sz="2000" i="1">
                               <a:latin typeface="Cambria Math" panose="02040503050406030204" pitchFamily="18" charset="0"/>
                               <a:ea typeface="Cambria Math" panose="02040503050406030204" pitchFamily="18" charset="0"/>
                             </a:rPr>
@@ -19313,6 +20579,33 @@
                                   </p:childTnLst>
                                 </p:cTn>
                               </p:par>
+                              <p:par>
+                                <p:cTn id="7" presetID="1" presetClass="entr" presetSubtype="0" fill="hold" nodeType="withEffect">
+                                  <p:stCondLst>
+                                    <p:cond delay="0"/>
+                                  </p:stCondLst>
+                                  <p:childTnLst>
+                                    <p:set>
+                                      <p:cBhvr>
+                                        <p:cTn id="8" dur="1" fill="hold">
+                                          <p:stCondLst>
+                                            <p:cond delay="0"/>
+                                          </p:stCondLst>
+                                        </p:cTn>
+                                        <p:tgtEl>
+                                          <p:spTgt spid="5"/>
+                                        </p:tgtEl>
+                                        <p:attrNameLst>
+                                          <p:attrName>style.visibility</p:attrName>
+                                        </p:attrNameLst>
+                                      </p:cBhvr>
+                                      <p:to>
+                                        <p:strVal val="visible"/>
+                                      </p:to>
+                                    </p:set>
+                                  </p:childTnLst>
+                                </p:cTn>
+                              </p:par>
                             </p:childTnLst>
                           </p:cTn>
                         </p:par>
@@ -19320,26 +20613,26 @@
                     </p:cTn>
                   </p:par>
                   <p:par>
-                    <p:cTn id="7" fill="hold">
+                    <p:cTn id="9" fill="hold">
                       <p:stCondLst>
                         <p:cond delay="indefinite"/>
                       </p:stCondLst>
                       <p:childTnLst>
                         <p:par>
-                          <p:cTn id="8" fill="hold">
+                          <p:cTn id="10" fill="hold">
                             <p:stCondLst>
                               <p:cond delay="0"/>
                             </p:stCondLst>
                             <p:childTnLst>
                               <p:par>
-                                <p:cTn id="9" presetID="1" presetClass="entr" presetSubtype="0" fill="hold" nodeType="clickEffect">
+                                <p:cTn id="11" presetID="1" presetClass="entr" presetSubtype="0" fill="hold" nodeType="clickEffect">
                                   <p:stCondLst>
                                     <p:cond delay="0"/>
                                   </p:stCondLst>
                                   <p:childTnLst>
                                     <p:set>
                                       <p:cBhvr>
-                                        <p:cTn id="10" dur="1" fill="hold">
+                                        <p:cTn id="12" dur="1" fill="hold">
                                           <p:stCondLst>
                                             <p:cond delay="0"/>
                                           </p:stCondLst>
@@ -19500,7 +20793,7 @@
             </a:r>
             <a:r>
               <a:rPr lang="en-US" dirty="0"/>
-              <a:t> of observations between cases or strata </a:t>
+              <a:t> of observations between cases</a:t>
             </a:r>
             <a:endParaRPr dirty="0"/>
           </a:p>
@@ -19948,7 +21241,7 @@
                     <m:sSub>
                       <m:sSubPr>
                         <m:ctrlPr>
-                          <a:rPr lang="en-US" sz="2400" i="1" smtClean="0">
+                          <a:rPr lang="en-US" sz="2400" i="1">
                             <a:latin typeface="Cambria Math" panose="02040503050406030204" pitchFamily="18" charset="0"/>
                             <a:ea typeface="Cambria Math" panose="02040503050406030204" pitchFamily="18" charset="0"/>
                           </a:rPr>
@@ -19983,7 +21276,7 @@
                             <a:latin typeface="Cambria Math" panose="02040503050406030204" pitchFamily="18" charset="0"/>
                             <a:ea typeface="Cambria Math" panose="02040503050406030204" pitchFamily="18" charset="0"/>
                           </a:rPr>
-                          <m:t>h</m:t>
+                          <m:t>ℎ</m:t>
                         </m:r>
                       </m:sub>
                     </m:sSub>
@@ -20039,7 +21332,7 @@
                             <a:latin typeface="Cambria Math" panose="02040503050406030204" pitchFamily="18" charset="0"/>
                             <a:ea typeface="Cambria Math" panose="02040503050406030204" pitchFamily="18" charset="0"/>
                           </a:rPr>
-                          <m:t>h</m:t>
+                          <m:t>ℎ</m:t>
                         </m:r>
                       </m:sub>
                     </m:sSub>
@@ -20157,6 +21450,232 @@
   <p:clrMapOvr>
     <a:masterClrMapping/>
   </p:clrMapOvr>
+  <p:timing>
+    <p:tnLst>
+      <p:par>
+        <p:cTn id="1" dur="indefinite" restart="never" nodeType="tmRoot">
+          <p:childTnLst>
+            <p:seq concurrent="1" nextAc="seek">
+              <p:cTn id="2" dur="indefinite" nodeType="mainSeq">
+                <p:childTnLst>
+                  <p:par>
+                    <p:cTn id="3" fill="hold">
+                      <p:stCondLst>
+                        <p:cond delay="indefinite"/>
+                      </p:stCondLst>
+                      <p:childTnLst>
+                        <p:par>
+                          <p:cTn id="4" fill="hold">
+                            <p:stCondLst>
+                              <p:cond delay="0"/>
+                            </p:stCondLst>
+                            <p:childTnLst>
+                              <p:par>
+                                <p:cTn id="5" presetID="1" presetClass="entr" presetSubtype="0" fill="hold" nodeType="clickEffect">
+                                  <p:stCondLst>
+                                    <p:cond delay="0"/>
+                                  </p:stCondLst>
+                                  <p:childTnLst>
+                                    <p:set>
+                                      <p:cBhvr>
+                                        <p:cTn id="6" dur="1" fill="hold">
+                                          <p:stCondLst>
+                                            <p:cond delay="0"/>
+                                          </p:stCondLst>
+                                        </p:cTn>
+                                        <p:tgtEl>
+                                          <p:spTgt spid="3">
+                                            <p:txEl>
+                                              <p:pRg st="1" end="1"/>
+                                            </p:txEl>
+                                          </p:spTgt>
+                                        </p:tgtEl>
+                                        <p:attrNameLst>
+                                          <p:attrName>style.visibility</p:attrName>
+                                        </p:attrNameLst>
+                                      </p:cBhvr>
+                                      <p:to>
+                                        <p:strVal val="visible"/>
+                                      </p:to>
+                                    </p:set>
+                                  </p:childTnLst>
+                                </p:cTn>
+                              </p:par>
+                            </p:childTnLst>
+                          </p:cTn>
+                        </p:par>
+                      </p:childTnLst>
+                    </p:cTn>
+                  </p:par>
+                  <p:par>
+                    <p:cTn id="7" fill="hold">
+                      <p:stCondLst>
+                        <p:cond delay="indefinite"/>
+                      </p:stCondLst>
+                      <p:childTnLst>
+                        <p:par>
+                          <p:cTn id="8" fill="hold">
+                            <p:stCondLst>
+                              <p:cond delay="0"/>
+                            </p:stCondLst>
+                            <p:childTnLst>
+                              <p:par>
+                                <p:cTn id="9" presetID="1" presetClass="entr" presetSubtype="0" fill="hold" nodeType="clickEffect">
+                                  <p:stCondLst>
+                                    <p:cond delay="0"/>
+                                  </p:stCondLst>
+                                  <p:childTnLst>
+                                    <p:set>
+                                      <p:cBhvr>
+                                        <p:cTn id="10" dur="1" fill="hold">
+                                          <p:stCondLst>
+                                            <p:cond delay="0"/>
+                                          </p:stCondLst>
+                                        </p:cTn>
+                                        <p:tgtEl>
+                                          <p:spTgt spid="3">
+                                            <p:txEl>
+                                              <p:pRg st="2" end="2"/>
+                                            </p:txEl>
+                                          </p:spTgt>
+                                        </p:tgtEl>
+                                        <p:attrNameLst>
+                                          <p:attrName>style.visibility</p:attrName>
+                                        </p:attrNameLst>
+                                      </p:cBhvr>
+                                      <p:to>
+                                        <p:strVal val="visible"/>
+                                      </p:to>
+                                    </p:set>
+                                  </p:childTnLst>
+                                </p:cTn>
+                              </p:par>
+                            </p:childTnLst>
+                          </p:cTn>
+                        </p:par>
+                      </p:childTnLst>
+                    </p:cTn>
+                  </p:par>
+                  <p:par>
+                    <p:cTn id="11" fill="hold">
+                      <p:stCondLst>
+                        <p:cond delay="indefinite"/>
+                      </p:stCondLst>
+                      <p:childTnLst>
+                        <p:par>
+                          <p:cTn id="12" fill="hold">
+                            <p:stCondLst>
+                              <p:cond delay="0"/>
+                            </p:stCondLst>
+                            <p:childTnLst>
+                              <p:par>
+                                <p:cTn id="13" presetID="1" presetClass="entr" presetSubtype="0" fill="hold" nodeType="clickEffect">
+                                  <p:stCondLst>
+                                    <p:cond delay="0"/>
+                                  </p:stCondLst>
+                                  <p:childTnLst>
+                                    <p:set>
+                                      <p:cBhvr>
+                                        <p:cTn id="14" dur="1" fill="hold">
+                                          <p:stCondLst>
+                                            <p:cond delay="0"/>
+                                          </p:stCondLst>
+                                        </p:cTn>
+                                        <p:tgtEl>
+                                          <p:spTgt spid="3">
+                                            <p:txEl>
+                                              <p:pRg st="3" end="3"/>
+                                            </p:txEl>
+                                          </p:spTgt>
+                                        </p:tgtEl>
+                                        <p:attrNameLst>
+                                          <p:attrName>style.visibility</p:attrName>
+                                        </p:attrNameLst>
+                                      </p:cBhvr>
+                                      <p:to>
+                                        <p:strVal val="visible"/>
+                                      </p:to>
+                                    </p:set>
+                                  </p:childTnLst>
+                                </p:cTn>
+                              </p:par>
+                            </p:childTnLst>
+                          </p:cTn>
+                        </p:par>
+                      </p:childTnLst>
+                    </p:cTn>
+                  </p:par>
+                  <p:par>
+                    <p:cTn id="15" fill="hold">
+                      <p:stCondLst>
+                        <p:cond delay="indefinite"/>
+                      </p:stCondLst>
+                      <p:childTnLst>
+                        <p:par>
+                          <p:cTn id="16" fill="hold">
+                            <p:stCondLst>
+                              <p:cond delay="0"/>
+                            </p:stCondLst>
+                            <p:childTnLst>
+                              <p:par>
+                                <p:cTn id="17" presetID="1" presetClass="entr" presetSubtype="0" fill="hold" nodeType="clickEffect">
+                                  <p:stCondLst>
+                                    <p:cond delay="0"/>
+                                  </p:stCondLst>
+                                  <p:childTnLst>
+                                    <p:set>
+                                      <p:cBhvr>
+                                        <p:cTn id="18" dur="1" fill="hold">
+                                          <p:stCondLst>
+                                            <p:cond delay="0"/>
+                                          </p:stCondLst>
+                                        </p:cTn>
+                                        <p:tgtEl>
+                                          <p:spTgt spid="3">
+                                            <p:txEl>
+                                              <p:pRg st="4" end="4"/>
+                                            </p:txEl>
+                                          </p:spTgt>
+                                        </p:tgtEl>
+                                        <p:attrNameLst>
+                                          <p:attrName>style.visibility</p:attrName>
+                                        </p:attrNameLst>
+                                      </p:cBhvr>
+                                      <p:to>
+                                        <p:strVal val="visible"/>
+                                      </p:to>
+                                    </p:set>
+                                  </p:childTnLst>
+                                </p:cTn>
+                              </p:par>
+                            </p:childTnLst>
+                          </p:cTn>
+                        </p:par>
+                      </p:childTnLst>
+                    </p:cTn>
+                  </p:par>
+                </p:childTnLst>
+              </p:cTn>
+              <p:prevCondLst>
+                <p:cond evt="onPrev" delay="0">
+                  <p:tgtEl>
+                    <p:sldTgt/>
+                  </p:tgtEl>
+                </p:cond>
+              </p:prevCondLst>
+              <p:nextCondLst>
+                <p:cond evt="onNext" delay="0">
+                  <p:tgtEl>
+                    <p:sldTgt/>
+                  </p:tgtEl>
+                </p:cond>
+              </p:nextCondLst>
+            </p:seq>
+          </p:childTnLst>
+        </p:cTn>
+      </p:par>
+    </p:tnLst>
+  </p:timing>
 </p:sld>
 </file>
 
@@ -20392,86 +21911,151 @@
           </a:p>
         </p:txBody>
       </p:sp>
-      <p:sp>
-        <p:nvSpPr>
-          <p:cNvPr id="3" name="Content Placeholder 2">
+      <mc:AlternateContent xmlns:mc="http://schemas.openxmlformats.org/markup-compatibility/2006">
+        <mc:Choice xmlns:a14="http://schemas.microsoft.com/office/drawing/2010/main" Requires="a14">
+          <p:sp>
+            <p:nvSpPr>
+              <p:cNvPr id="3" name="Content Placeholder 2">
+                <a:extLst>
+                  <a:ext uri="{FF2B5EF4-FFF2-40B4-BE49-F238E27FC236}">
+                    <a16:creationId xmlns:a16="http://schemas.microsoft.com/office/drawing/2014/main" id="{080D003D-4566-1241-67DA-0D0B48EC4CA8}"/>
+                  </a:ext>
+                </a:extLst>
+              </p:cNvPr>
+              <p:cNvSpPr>
+                <a:spLocks noGrp="1"/>
+              </p:cNvSpPr>
+              <p:nvPr>
+                <p:ph idx="1"/>
+              </p:nvPr>
+            </p:nvSpPr>
+            <p:spPr>
+              <a:xfrm>
+                <a:off x="457200" y="948690"/>
+                <a:ext cx="4023360" cy="4091940"/>
+              </a:xfrm>
+            </p:spPr>
+            <p:txBody>
+              <a:bodyPr>
+                <a:normAutofit fontScale="92500" lnSpcReduction="20000"/>
+              </a:bodyPr>
+              <a:lstStyle/>
+              <a:p>
+                <a:pPr marL="0" lvl="0" indent="0">
+                  <a:buNone/>
+                </a:pPr>
+                <a:r>
+                  <a:rPr lang="en-US" dirty="0"/>
+                  <a:t>Posterior predictive checks show the update hieratical model is a good fit</a:t>
+                </a:r>
+              </a:p>
+              <a:p>
+                <a:pPr>
+                  <a:buFont typeface="Arial" panose="020B0604020202020204" pitchFamily="34" charset="0"/>
+                  <a:buChar char="•"/>
+                </a:pPr>
+                <a:r>
+                  <a:rPr lang="en-US" dirty="0"/>
+                  <a:t>Predicted close to the observed response with notable deviations – note the wide distribution as a result of the prior</a:t>
+                </a:r>
+              </a:p>
+              <a:p>
+                <a:pPr>
+                  <a:buFont typeface="Arial" panose="020B0604020202020204" pitchFamily="34" charset="0"/>
+                  <a:buChar char="•"/>
+                </a:pPr>
+                <a:r>
+                  <a:rPr lang="en-US" dirty="0"/>
+                  <a:t>The Bayesian p-value some systematic bias with respect to the ideal distribution </a:t>
+                </a:r>
+              </a:p>
+              <a:p>
+                <a:pPr>
+                  <a:buFont typeface="Arial" panose="020B0604020202020204" pitchFamily="34" charset="0"/>
+                  <a:buChar char="•"/>
+                </a:pPr>
+                <a14:m>
+                  <m:oMath xmlns:m="http://schemas.openxmlformats.org/officeDocument/2006/math">
+                    <m:r>
+                      <a:rPr lang="en-US" i="1">
+                        <a:latin typeface="Cambria Math" panose="02040503050406030204" pitchFamily="18" charset="0"/>
+                        <a:ea typeface="Cambria Math" panose="02040503050406030204" pitchFamily="18" charset="0"/>
+                      </a:rPr>
+                      <m:t>∆−</m:t>
+                    </m:r>
+                    <m:r>
+                      <a:rPr lang="en-US" i="1">
+                        <a:latin typeface="Cambria Math" panose="02040503050406030204" pitchFamily="18" charset="0"/>
+                        <a:ea typeface="Cambria Math" panose="02040503050406030204" pitchFamily="18" charset="0"/>
+                      </a:rPr>
+                      <m:t>𝐸𝐶𝐷𝐹</m:t>
+                    </m:r>
+                  </m:oMath>
+                </a14:m>
+                <a:r>
+                  <a:rPr lang="en-US" dirty="0"/>
+                  <a:t> distribution is skewed with respect to the observed   </a:t>
+                </a:r>
+              </a:p>
+              <a:p>
+                <a:pPr marL="0" lvl="0" indent="0">
+                  <a:buNone/>
+                </a:pPr>
+                <a:endParaRPr dirty="0"/>
+              </a:p>
+            </p:txBody>
+          </p:sp>
+        </mc:Choice>
+        <mc:Fallback>
+          <p:sp>
+            <p:nvSpPr>
+              <p:cNvPr id="3" name="Content Placeholder 2">
+                <a:extLst>
+                  <a:ext uri="{FF2B5EF4-FFF2-40B4-BE49-F238E27FC236}">
+                    <a16:creationId xmlns:a16="http://schemas.microsoft.com/office/drawing/2014/main" id="{080D003D-4566-1241-67DA-0D0B48EC4CA8}"/>
+                  </a:ext>
+                </a:extLst>
+              </p:cNvPr>
+              <p:cNvSpPr>
+                <a:spLocks noGrp="1" noRot="1" noChangeAspect="1" noMove="1" noResize="1" noEditPoints="1" noAdjustHandles="1" noChangeArrowheads="1" noChangeShapeType="1" noTextEdit="1"/>
+              </p:cNvSpPr>
+              <p:nvPr>
+                <p:ph idx="1"/>
+              </p:nvPr>
+            </p:nvSpPr>
+            <p:spPr>
+              <a:xfrm>
+                <a:off x="457200" y="948690"/>
+                <a:ext cx="4023360" cy="4091940"/>
+              </a:xfrm>
+              <a:blipFill>
+                <a:blip r:embed="rId2"/>
+                <a:stretch>
+                  <a:fillRect l="-1970" t="-2534" r="-3182" b="-2086"/>
+                </a:stretch>
+              </a:blipFill>
+            </p:spPr>
+            <p:txBody>
+              <a:bodyPr/>
+              <a:lstStyle/>
+              <a:p>
+                <a:r>
+                  <a:rPr lang="en-US">
+                    <a:noFill/>
+                  </a:rPr>
+                  <a:t> </a:t>
+                </a:r>
+              </a:p>
+            </p:txBody>
+          </p:sp>
+        </mc:Fallback>
+      </mc:AlternateContent>
+      <p:pic>
+        <p:nvPicPr>
+          <p:cNvPr id="5" name="Picture 4">
             <a:extLst>
               <a:ext uri="{FF2B5EF4-FFF2-40B4-BE49-F238E27FC236}">
-                <a16:creationId xmlns:a16="http://schemas.microsoft.com/office/drawing/2014/main" id="{080D003D-4566-1241-67DA-0D0B48EC4CA8}"/>
-              </a:ext>
-            </a:extLst>
-          </p:cNvPr>
-          <p:cNvSpPr>
-            <a:spLocks noGrp="1"/>
-          </p:cNvSpPr>
-          <p:nvPr>
-            <p:ph idx="1"/>
-          </p:nvPr>
-        </p:nvSpPr>
-        <p:spPr>
-          <a:xfrm>
-            <a:off x="457200" y="1188720"/>
-            <a:ext cx="4023360" cy="3851910"/>
-          </a:xfrm>
-        </p:spPr>
-        <p:txBody>
-          <a:bodyPr>
-            <a:normAutofit fontScale="92500" lnSpcReduction="20000"/>
-          </a:bodyPr>
-          <a:lstStyle/>
-          <a:p>
-            <a:pPr marL="0" lvl="0" indent="0">
-              <a:buNone/>
-            </a:pPr>
-            <a:r>
-              <a:rPr lang="en-US" dirty="0"/>
-              <a:t>Posterior predictive checks show the update hieratical model is a good fit</a:t>
-            </a:r>
-          </a:p>
-          <a:p>
-            <a:pPr>
-              <a:buFont typeface="Arial" panose="020B0604020202020204" pitchFamily="34" charset="0"/>
-              <a:buChar char="•"/>
-            </a:pPr>
-            <a:r>
-              <a:rPr lang="en-US" sz="2400" dirty="0"/>
-              <a:t>The posterior predictive mean is closed to the observed   </a:t>
-            </a:r>
-          </a:p>
-          <a:p>
-            <a:pPr>
-              <a:buFont typeface="Arial" panose="020B0604020202020204" pitchFamily="34" charset="0"/>
-              <a:buChar char="•"/>
-            </a:pPr>
-            <a:r>
-              <a:rPr lang="en-US" sz="2400" dirty="0"/>
-              <a:t>The Bayesian p-value has no significant skew with respect to the ideal   </a:t>
-            </a:r>
-          </a:p>
-          <a:p>
-            <a:pPr>
-              <a:buFont typeface="Arial" panose="020B0604020202020204" pitchFamily="34" charset="0"/>
-              <a:buChar char="•"/>
-            </a:pPr>
-            <a:r>
-              <a:rPr lang="en-US" sz="2400" dirty="0"/>
-              <a:t>The Bayesian u-value has a small deviation outside the ideal credible interval around 1.0</a:t>
-            </a:r>
-          </a:p>
-          <a:p>
-            <a:pPr marL="0" lvl="0" indent="0">
-              <a:buNone/>
-            </a:pPr>
-            <a:endParaRPr dirty="0"/>
-          </a:p>
-        </p:txBody>
-      </p:sp>
-      <p:pic>
-        <p:nvPicPr>
-          <p:cNvPr id="6" name="Picture 5">
-            <a:extLst>
-              <a:ext uri="{FF2B5EF4-FFF2-40B4-BE49-F238E27FC236}">
-                <a16:creationId xmlns:a16="http://schemas.microsoft.com/office/drawing/2014/main" id="{652066CF-7023-157E-8CE8-F3456079D5D8}"/>
+                <a16:creationId xmlns:a16="http://schemas.microsoft.com/office/drawing/2014/main" id="{E5B0330E-066C-E945-5DB9-3BFA13198FA1}"/>
               </a:ext>
             </a:extLst>
           </p:cNvPr>
@@ -20481,15 +22065,15 @@
           <p:nvPr/>
         </p:nvPicPr>
         <p:blipFill>
-          <a:blip r:embed="rId2"/>
+          <a:blip r:embed="rId3"/>
           <a:stretch>
             <a:fillRect/>
           </a:stretch>
         </p:blipFill>
         <p:spPr>
           <a:xfrm>
-            <a:off x="5250180" y="813639"/>
-            <a:ext cx="3837744" cy="4329861"/>
+            <a:off x="5213684" y="693153"/>
+            <a:ext cx="3834712" cy="4306017"/>
           </a:xfrm>
           <a:prstGeom prst="rect">
             <a:avLst/>
@@ -20506,6 +22090,183 @@
   <p:clrMapOvr>
     <a:masterClrMapping/>
   </p:clrMapOvr>
+  <p:timing>
+    <p:tnLst>
+      <p:par>
+        <p:cTn id="1" dur="indefinite" restart="never" nodeType="tmRoot">
+          <p:childTnLst>
+            <p:seq concurrent="1" nextAc="seek">
+              <p:cTn id="2" dur="indefinite" nodeType="mainSeq">
+                <p:childTnLst>
+                  <p:par>
+                    <p:cTn id="3" fill="hold">
+                      <p:stCondLst>
+                        <p:cond delay="indefinite"/>
+                      </p:stCondLst>
+                      <p:childTnLst>
+                        <p:par>
+                          <p:cTn id="4" fill="hold">
+                            <p:stCondLst>
+                              <p:cond delay="0"/>
+                            </p:stCondLst>
+                            <p:childTnLst>
+                              <p:par>
+                                <p:cTn id="5" presetID="1" presetClass="entr" presetSubtype="0" fill="hold" nodeType="clickEffect">
+                                  <p:stCondLst>
+                                    <p:cond delay="0"/>
+                                  </p:stCondLst>
+                                  <p:childTnLst>
+                                    <p:set>
+                                      <p:cBhvr>
+                                        <p:cTn id="6" dur="1" fill="hold">
+                                          <p:stCondLst>
+                                            <p:cond delay="0"/>
+                                          </p:stCondLst>
+                                        </p:cTn>
+                                        <p:tgtEl>
+                                          <p:spTgt spid="3">
+                                            <p:txEl>
+                                              <p:pRg st="1" end="1"/>
+                                            </p:txEl>
+                                          </p:spTgt>
+                                        </p:tgtEl>
+                                        <p:attrNameLst>
+                                          <p:attrName>style.visibility</p:attrName>
+                                        </p:attrNameLst>
+                                      </p:cBhvr>
+                                      <p:to>
+                                        <p:strVal val="visible"/>
+                                      </p:to>
+                                    </p:set>
+                                  </p:childTnLst>
+                                </p:cTn>
+                              </p:par>
+                            </p:childTnLst>
+                          </p:cTn>
+                        </p:par>
+                      </p:childTnLst>
+                    </p:cTn>
+                  </p:par>
+                  <p:par>
+                    <p:cTn id="7" fill="hold">
+                      <p:stCondLst>
+                        <p:cond delay="indefinite"/>
+                      </p:stCondLst>
+                      <p:childTnLst>
+                        <p:par>
+                          <p:cTn id="8" fill="hold">
+                            <p:stCondLst>
+                              <p:cond delay="0"/>
+                            </p:stCondLst>
+                            <p:childTnLst>
+                              <p:par>
+                                <p:cTn id="9" presetID="1" presetClass="entr" presetSubtype="0" fill="hold" nodeType="clickEffect">
+                                  <p:stCondLst>
+                                    <p:cond delay="0"/>
+                                  </p:stCondLst>
+                                  <p:childTnLst>
+                                    <p:set>
+                                      <p:cBhvr>
+                                        <p:cTn id="10" dur="1" fill="hold">
+                                          <p:stCondLst>
+                                            <p:cond delay="0"/>
+                                          </p:stCondLst>
+                                        </p:cTn>
+                                        <p:tgtEl>
+                                          <p:spTgt spid="3">
+                                            <p:txEl>
+                                              <p:pRg st="2" end="2"/>
+                                            </p:txEl>
+                                          </p:spTgt>
+                                        </p:tgtEl>
+                                        <p:attrNameLst>
+                                          <p:attrName>style.visibility</p:attrName>
+                                        </p:attrNameLst>
+                                      </p:cBhvr>
+                                      <p:to>
+                                        <p:strVal val="visible"/>
+                                      </p:to>
+                                    </p:set>
+                                  </p:childTnLst>
+                                </p:cTn>
+                              </p:par>
+                            </p:childTnLst>
+                          </p:cTn>
+                        </p:par>
+                      </p:childTnLst>
+                    </p:cTn>
+                  </p:par>
+                  <p:par>
+                    <p:cTn id="11" fill="hold">
+                      <p:stCondLst>
+                        <p:cond delay="indefinite"/>
+                      </p:stCondLst>
+                      <p:childTnLst>
+                        <p:par>
+                          <p:cTn id="12" fill="hold">
+                            <p:stCondLst>
+                              <p:cond delay="0"/>
+                            </p:stCondLst>
+                            <p:childTnLst>
+                              <p:par>
+                                <p:cTn id="13" presetID="1" presetClass="entr" presetSubtype="0" fill="hold" nodeType="clickEffect">
+                                  <p:stCondLst>
+                                    <p:cond delay="0"/>
+                                  </p:stCondLst>
+                                  <p:childTnLst>
+                                    <p:set>
+                                      <p:cBhvr>
+                                        <p:cTn id="14" dur="1" fill="hold">
+                                          <p:stCondLst>
+                                            <p:cond delay="0"/>
+                                          </p:stCondLst>
+                                        </p:cTn>
+                                        <p:tgtEl>
+                                          <p:spTgt spid="3">
+                                            <p:txEl>
+                                              <p:pRg st="3" end="3"/>
+                                            </p:txEl>
+                                          </p:spTgt>
+                                        </p:tgtEl>
+                                        <p:attrNameLst>
+                                          <p:attrName>style.visibility</p:attrName>
+                                        </p:attrNameLst>
+                                      </p:cBhvr>
+                                      <p:to>
+                                        <p:strVal val="visible"/>
+                                      </p:to>
+                                    </p:set>
+                                  </p:childTnLst>
+                                </p:cTn>
+                              </p:par>
+                            </p:childTnLst>
+                          </p:cTn>
+                        </p:par>
+                      </p:childTnLst>
+                    </p:cTn>
+                  </p:par>
+                </p:childTnLst>
+              </p:cTn>
+              <p:prevCondLst>
+                <p:cond evt="onPrev" delay="0">
+                  <p:tgtEl>
+                    <p:sldTgt/>
+                  </p:tgtEl>
+                </p:cond>
+              </p:prevCondLst>
+              <p:nextCondLst>
+                <p:cond evt="onNext" delay="0">
+                  <p:tgtEl>
+                    <p:sldTgt/>
+                  </p:tgtEl>
+                </p:cond>
+              </p:nextCondLst>
+            </p:seq>
+          </p:childTnLst>
+        </p:cTn>
+      </p:par>
+    </p:tnLst>
+  </p:timing>
 </p:sld>
 </file>
 
@@ -20643,7 +22404,7 @@
                     <m:sSub>
                       <m:sSubPr>
                         <m:ctrlPr>
-                          <a:rPr lang="en-US" sz="2000" i="1" smtClean="0">
+                          <a:rPr lang="en-US" sz="2000" i="1">
                             <a:latin typeface="Cambria Math" panose="02040503050406030204" pitchFamily="18" charset="0"/>
                             <a:ea typeface="Cambria Math" panose="02040503050406030204" pitchFamily="18" charset="0"/>
                           </a:rPr>
@@ -20967,6 +22728,7 @@
                         <m:ctrlPr>
                           <a:rPr lang="en-US" sz="2000" i="1" smtClean="0">
                             <a:latin typeface="Cambria Math" panose="02040503050406030204" pitchFamily="18" charset="0"/>
+                            <a:ea typeface="Cambria Math" panose="02040503050406030204" pitchFamily="18" charset="0"/>
                           </a:rPr>
                         </m:ctrlPr>
                       </m:sSubPr>
@@ -21004,6 +22766,7 @@
                         <m:ctrlPr>
                           <a:rPr lang="en-US" sz="2000" i="1" smtClean="0">
                             <a:latin typeface="Cambria Math" panose="02040503050406030204" pitchFamily="18" charset="0"/>
+                            <a:ea typeface="Cambria Math" panose="02040503050406030204" pitchFamily="18" charset="0"/>
                           </a:rPr>
                         </m:ctrlPr>
                       </m:sSubPr>
@@ -21755,10 +23518,7 @@
                 </a:pPr>
                 <a14:m>
                   <m:oMathPara xmlns:m="http://schemas.openxmlformats.org/officeDocument/2006/math">
-                    <m:oMathParaPr>
-                      <m:jc m:val="centerGroup"/>
-                    </m:oMathParaPr>
-                    <m:oMath xmlns:m="http://schemas.openxmlformats.org/officeDocument/2006/math">
+                    <m:oMath>
                       <m:sSub>
                         <m:sSubPr>
                           <m:ctrlPr>
@@ -21849,7 +23609,7 @@
                           <m:func>
                             <m:funcPr>
                               <m:ctrlPr>
-                                <a:rPr lang="en-US" i="1">
+                                <a:rPr lang="en-US">
                                   <a:latin typeface="Cambria Math" panose="02040503050406030204" pitchFamily="18" charset="0"/>
                                 </a:rPr>
                               </m:ctrlPr>
@@ -21991,6 +23751,7 @@
                                   <m:ctrlPr>
                                     <a:rPr lang="en-US" i="1">
                                       <a:latin typeface="Cambria Math" panose="02040503050406030204" pitchFamily="18" charset="0"/>
+                                      <a:ea typeface="Cambria Math" panose="02040503050406030204" pitchFamily="18" charset="0"/>
                                     </a:rPr>
                                   </m:ctrlPr>
                                 </m:dPr>
@@ -22126,7 +23887,7 @@
                     <m:sSub>
                       <m:sSubPr>
                         <m:ctrlPr>
-                          <a:rPr lang="en-US" i="1" smtClean="0">
+                          <a:rPr lang="en-US" b="0" i="1" smtClean="0">
                             <a:latin typeface="Cambria Math" panose="02040503050406030204" pitchFamily="18" charset="0"/>
                           </a:rPr>
                         </m:ctrlPr>
@@ -22184,7 +23945,7 @@
                     <m:sSub>
                       <m:sSubPr>
                         <m:ctrlPr>
-                          <a:rPr lang="en-US" i="1" smtClean="0">
+                          <a:rPr lang="en-US" b="0" i="1" smtClean="0">
                             <a:latin typeface="Cambria Math" panose="02040503050406030204" pitchFamily="18" charset="0"/>
                           </a:rPr>
                         </m:ctrlPr>
@@ -22385,6 +24146,7 @@
                         <m:ctrlPr>
                           <a:rPr lang="en-US" b="0" i="1" smtClean="0">
                             <a:latin typeface="Cambria Math" panose="02040503050406030204" pitchFamily="18" charset="0"/>
+                            <a:ea typeface="Cambria Math" panose="02040503050406030204" pitchFamily="18" charset="0"/>
                           </a:rPr>
                         </m:ctrlPr>
                       </m:dPr>
@@ -23044,10 +24806,7 @@
                 </a:pPr>
                 <a14:m>
                   <m:oMathPara xmlns:m="http://schemas.openxmlformats.org/officeDocument/2006/math">
-                    <m:oMathParaPr>
-                      <m:jc m:val="centerGroup"/>
-                    </m:oMathParaPr>
-                    <m:oMath xmlns:m="http://schemas.openxmlformats.org/officeDocument/2006/math">
+                    <m:oMath>
                       <m:sSub>
                         <m:sSubPr>
                           <m:ctrlPr>
@@ -23138,7 +24897,7 @@
                           <m:func>
                             <m:funcPr>
                               <m:ctrlPr>
-                                <a:rPr lang="en-US" b="0" i="1" smtClean="0">
+                                <a:rPr lang="en-US" b="0" i="0" smtClean="0">
                                   <a:latin typeface="Cambria Math" panose="02040503050406030204" pitchFamily="18" charset="0"/>
                                 </a:rPr>
                               </m:ctrlPr>
@@ -23274,6 +25033,7 @@
                                   <m:ctrlPr>
                                     <a:rPr lang="en-US" b="0" i="1" smtClean="0">
                                       <a:latin typeface="Cambria Math" panose="02040503050406030204" pitchFamily="18" charset="0"/>
+                                      <a:ea typeface="Cambria Math" panose="02040503050406030204" pitchFamily="18" charset="0"/>
                                     </a:rPr>
                                   </m:ctrlPr>
                                 </m:dPr>
@@ -23377,10 +25137,7 @@
                 </a:pPr>
                 <a14:m>
                   <m:oMathPara xmlns:m="http://schemas.openxmlformats.org/officeDocument/2006/math">
-                    <m:oMathParaPr>
-                      <m:jc m:val="centerGroup"/>
-                    </m:oMathParaPr>
-                    <m:oMath xmlns:m="http://schemas.openxmlformats.org/officeDocument/2006/math">
+                    <m:oMath>
                       <m:r>
                         <a:rPr lang="en-US" i="1">
                           <a:latin typeface="Cambria Math" panose="02040503050406030204" pitchFamily="18" charset="0"/>
@@ -23586,6 +25343,7 @@
                           <m:ctrlPr>
                             <a:rPr lang="en-US" b="0" i="1" smtClean="0">
                               <a:latin typeface="Cambria Math" panose="02040503050406030204" pitchFamily="18" charset="0"/>
+                              <a:ea typeface="Cambria Math" panose="02040503050406030204" pitchFamily="18" charset="0"/>
                             </a:rPr>
                           </m:ctrlPr>
                         </m:dPr>
@@ -23683,6 +25441,7 @@
                         <m:ctrlPr>
                           <a:rPr lang="en-US" b="0" i="1" smtClean="0">
                             <a:latin typeface="Cambria Math" panose="02040503050406030204" pitchFamily="18" charset="0"/>
+                            <a:ea typeface="Cambria Math" panose="02040503050406030204" pitchFamily="18" charset="0"/>
                           </a:rPr>
                         </m:ctrlPr>
                       </m:dPr>
@@ -24338,7 +26097,7 @@
                     <m:sSub>
                       <m:sSubPr>
                         <m:ctrlPr>
-                          <a:rPr lang="en-US" sz="2000" i="1" smtClean="0">
+                          <a:rPr lang="en-US" sz="2000" b="0" i="1" smtClean="0">
                             <a:latin typeface="Cambria Math" panose="02040503050406030204" pitchFamily="18" charset="0"/>
                           </a:rPr>
                         </m:ctrlPr>
@@ -24421,7 +26180,7 @@
                     <m:sSub>
                       <m:sSubPr>
                         <m:ctrlPr>
-                          <a:rPr lang="en-US" sz="2000" i="1" smtClean="0">
+                          <a:rPr lang="en-US" sz="2000" b="0" i="1" smtClean="0">
                             <a:latin typeface="Cambria Math" panose="02040503050406030204" pitchFamily="18" charset="0"/>
                           </a:rPr>
                         </m:ctrlPr>
@@ -24494,7 +26253,7 @@
                     <m:sSub>
                       <m:sSubPr>
                         <m:ctrlPr>
-                          <a:rPr lang="en-US" sz="2000" i="1" smtClean="0">
+                          <a:rPr lang="en-US" sz="2000" b="0" i="1" smtClean="0">
                             <a:latin typeface="Cambria Math" panose="02040503050406030204" pitchFamily="18" charset="0"/>
                           </a:rPr>
                         </m:ctrlPr>
@@ -24572,7 +26331,7 @@
                     <m:sSub>
                       <m:sSubPr>
                         <m:ctrlPr>
-                          <a:rPr lang="en-US" sz="2000" i="1" smtClean="0">
+                          <a:rPr lang="en-US" sz="2000" b="0" i="1" smtClean="0">
                             <a:latin typeface="Cambria Math" panose="02040503050406030204" pitchFamily="18" charset="0"/>
                           </a:rPr>
                         </m:ctrlPr>
@@ -24633,7 +26392,7 @@
                     <m:sSub>
                       <m:sSubPr>
                         <m:ctrlPr>
-                          <a:rPr lang="en-US" sz="2000" i="1" smtClean="0">
+                          <a:rPr lang="en-US" sz="2000" b="0" i="1" smtClean="0">
                             <a:latin typeface="Cambria Math" panose="02040503050406030204" pitchFamily="18" charset="0"/>
                           </a:rPr>
                         </m:ctrlPr>
@@ -24833,6 +26592,13 @@
               <a:rPr lang="en-US" dirty="0"/>
               <a:t> of observations within each category</a:t>
             </a:r>
+          </a:p>
+          <a:p>
+            <a:pPr lvl="1"/>
+            <a:r>
+              <a:rPr lang="en-US" dirty="0"/>
+              <a:t>No exchangeability between categories  </a:t>
+            </a:r>
             <a:endParaRPr dirty="0"/>
           </a:p>
           <a:p>
@@ -24958,33 +26724,15 @@
                                   </p:childTnLst>
                                 </p:cTn>
                               </p:par>
-                            </p:childTnLst>
-                          </p:cTn>
-                        </p:par>
-                      </p:childTnLst>
-                    </p:cTn>
-                  </p:par>
-                  <p:par>
-                    <p:cTn id="9" fill="hold">
-                      <p:stCondLst>
-                        <p:cond delay="indefinite"/>
-                      </p:stCondLst>
-                      <p:childTnLst>
-                        <p:par>
-                          <p:cTn id="10" fill="hold">
-                            <p:stCondLst>
-                              <p:cond delay="0"/>
-                            </p:stCondLst>
-                            <p:childTnLst>
                               <p:par>
-                                <p:cTn id="11" presetID="1" presetClass="entr" presetSubtype="0" fill="hold" nodeType="clickEffect">
+                                <p:cTn id="9" presetID="1" presetClass="entr" presetSubtype="0" fill="hold" nodeType="withEffect">
                                   <p:stCondLst>
                                     <p:cond delay="0"/>
                                   </p:stCondLst>
                                   <p:childTnLst>
                                     <p:set>
                                       <p:cBhvr>
-                                        <p:cTn id="12" dur="1" fill="hold">
+                                        <p:cTn id="10" dur="1" fill="hold">
                                           <p:stCondLst>
                                             <p:cond delay="0"/>
                                           </p:stCondLst>
@@ -25014,26 +26762,26 @@
                     </p:cTn>
                   </p:par>
                   <p:par>
-                    <p:cTn id="13" fill="hold">
+                    <p:cTn id="11" fill="hold">
                       <p:stCondLst>
                         <p:cond delay="indefinite"/>
                       </p:stCondLst>
                       <p:childTnLst>
                         <p:par>
-                          <p:cTn id="14" fill="hold">
+                          <p:cTn id="12" fill="hold">
                             <p:stCondLst>
                               <p:cond delay="0"/>
                             </p:stCondLst>
                             <p:childTnLst>
                               <p:par>
-                                <p:cTn id="15" presetID="1" presetClass="entr" presetSubtype="0" fill="hold" nodeType="clickEffect">
+                                <p:cTn id="13" presetID="1" presetClass="entr" presetSubtype="0" fill="hold" nodeType="clickEffect">
                                   <p:stCondLst>
                                     <p:cond delay="0"/>
                                   </p:stCondLst>
                                   <p:childTnLst>
                                     <p:set>
                                       <p:cBhvr>
-                                        <p:cTn id="16" dur="1" fill="hold">
+                                        <p:cTn id="14" dur="1" fill="hold">
                                           <p:stCondLst>
                                             <p:cond delay="0"/>
                                           </p:stCondLst>
@@ -25063,26 +26811,26 @@
                     </p:cTn>
                   </p:par>
                   <p:par>
-                    <p:cTn id="17" fill="hold">
+                    <p:cTn id="15" fill="hold">
                       <p:stCondLst>
                         <p:cond delay="indefinite"/>
                       </p:stCondLst>
                       <p:childTnLst>
                         <p:par>
-                          <p:cTn id="18" fill="hold">
+                          <p:cTn id="16" fill="hold">
                             <p:stCondLst>
                               <p:cond delay="0"/>
                             </p:stCondLst>
                             <p:childTnLst>
                               <p:par>
-                                <p:cTn id="19" presetID="1" presetClass="entr" presetSubtype="0" fill="hold" nodeType="clickEffect">
+                                <p:cTn id="17" presetID="1" presetClass="entr" presetSubtype="0" fill="hold" nodeType="clickEffect">
                                   <p:stCondLst>
                                     <p:cond delay="0"/>
                                   </p:stCondLst>
                                   <p:childTnLst>
                                     <p:set>
                                       <p:cBhvr>
-                                        <p:cTn id="20" dur="1" fill="hold">
+                                        <p:cTn id="18" dur="1" fill="hold">
                                           <p:stCondLst>
                                             <p:cond delay="0"/>
                                           </p:stCondLst>
@@ -25091,6 +26839,55 @@
                                           <p:spTgt spid="3">
                                             <p:txEl>
                                               <p:pRg st="5" end="5"/>
+                                            </p:txEl>
+                                          </p:spTgt>
+                                        </p:tgtEl>
+                                        <p:attrNameLst>
+                                          <p:attrName>style.visibility</p:attrName>
+                                        </p:attrNameLst>
+                                      </p:cBhvr>
+                                      <p:to>
+                                        <p:strVal val="visible"/>
+                                      </p:to>
+                                    </p:set>
+                                  </p:childTnLst>
+                                </p:cTn>
+                              </p:par>
+                            </p:childTnLst>
+                          </p:cTn>
+                        </p:par>
+                      </p:childTnLst>
+                    </p:cTn>
+                  </p:par>
+                  <p:par>
+                    <p:cTn id="19" fill="hold">
+                      <p:stCondLst>
+                        <p:cond delay="indefinite"/>
+                      </p:stCondLst>
+                      <p:childTnLst>
+                        <p:par>
+                          <p:cTn id="20" fill="hold">
+                            <p:stCondLst>
+                              <p:cond delay="0"/>
+                            </p:stCondLst>
+                            <p:childTnLst>
+                              <p:par>
+                                <p:cTn id="21" presetID="1" presetClass="entr" presetSubtype="0" fill="hold" nodeType="clickEffect">
+                                  <p:stCondLst>
+                                    <p:cond delay="0"/>
+                                  </p:stCondLst>
+                                  <p:childTnLst>
+                                    <p:set>
+                                      <p:cBhvr>
+                                        <p:cTn id="22" dur="1" fill="hold">
+                                          <p:stCondLst>
+                                            <p:cond delay="0"/>
+                                          </p:stCondLst>
+                                        </p:cTn>
+                                        <p:tgtEl>
+                                          <p:spTgt spid="3">
+                                            <p:txEl>
+                                              <p:pRg st="6" end="6"/>
                                             </p:txEl>
                                           </p:spTgt>
                                         </p:tgtEl>
@@ -25803,27 +27600,12 @@
                 </a:pPr>
                 <a14:m>
                   <m:oMathPara xmlns:m="http://schemas.openxmlformats.org/officeDocument/2006/math">
-                    <m:oMathParaPr>
-                      <m:jc m:val="centerGroup"/>
-                    </m:oMathParaPr>
-                    <m:oMath xmlns:m="http://schemas.openxmlformats.org/officeDocument/2006/math">
+                    <m:oMath>
                       <m:r>
                         <a:rPr lang="en-US" sz="2000" b="0" i="1" smtClean="0">
                           <a:latin typeface="Cambria Math" panose="02040503050406030204" pitchFamily="18" charset="0"/>
                         </a:rPr>
-                        <m:t>𝑊𝑒𝑖𝑔</m:t>
-                      </m:r>
-                      <m:r>
-                        <a:rPr lang="en-US" sz="2000" b="0" i="1" smtClean="0">
-                          <a:latin typeface="Cambria Math" panose="02040503050406030204" pitchFamily="18" charset="0"/>
-                        </a:rPr>
-                        <m:t>h</m:t>
-                      </m:r>
-                      <m:r>
-                        <a:rPr lang="en-US" sz="2000" b="0" i="1" smtClean="0">
-                          <a:latin typeface="Cambria Math" panose="02040503050406030204" pitchFamily="18" charset="0"/>
-                        </a:rPr>
-                        <m:t>𝑡𝑒𝑑</m:t>
+                        <m:t>𝑊𝑒𝑖𝑔ℎ𝑡𝑒𝑑</m:t>
                       </m:r>
                       <m:r>
                         <a:rPr lang="en-US" sz="2000" b="0" i="1" smtClean="0">
@@ -25841,61 +27623,19 @@
                         <a:rPr lang="en-US" sz="2000" b="0" i="1" smtClean="0">
                           <a:latin typeface="Cambria Math" panose="02040503050406030204" pitchFamily="18" charset="0"/>
                         </a:rPr>
-                        <m:t>= .</m:t>
+                        <m:t>= .89 ∗</m:t>
                       </m:r>
                       <m:r>
                         <a:rPr lang="en-US" sz="2000" b="0" i="1" smtClean="0">
                           <a:latin typeface="Cambria Math" panose="02040503050406030204" pitchFamily="18" charset="0"/>
                         </a:rPr>
-                        <m:t>89</m:t>
+                        <m:t>ℎ𝑖𝑒𝑟𝑎𝑟𝑐ℎ𝑖𝑐𝑎𝑙</m:t>
                       </m:r>
                       <m:r>
                         <a:rPr lang="en-US" sz="2000" b="0" i="1" smtClean="0">
                           <a:latin typeface="Cambria Math" panose="02040503050406030204" pitchFamily="18" charset="0"/>
                         </a:rPr>
-                        <m:t> ∗</m:t>
-                      </m:r>
-                      <m:r>
-                        <a:rPr lang="en-US" sz="2000" b="0" i="1" smtClean="0">
-                          <a:latin typeface="Cambria Math" panose="02040503050406030204" pitchFamily="18" charset="0"/>
-                        </a:rPr>
-                        <m:t>h</m:t>
-                      </m:r>
-                      <m:r>
-                        <a:rPr lang="en-US" sz="2000" b="0" i="1" smtClean="0">
-                          <a:latin typeface="Cambria Math" panose="02040503050406030204" pitchFamily="18" charset="0"/>
-                        </a:rPr>
-                        <m:t>𝑖𝑒𝑟𝑎𝑟𝑐</m:t>
-                      </m:r>
-                      <m:r>
-                        <a:rPr lang="en-US" sz="2000" b="0" i="1" smtClean="0">
-                          <a:latin typeface="Cambria Math" panose="02040503050406030204" pitchFamily="18" charset="0"/>
-                        </a:rPr>
-                        <m:t>h</m:t>
-                      </m:r>
-                      <m:r>
-                        <a:rPr lang="en-US" sz="2000" b="0" i="1" smtClean="0">
-                          <a:latin typeface="Cambria Math" panose="02040503050406030204" pitchFamily="18" charset="0"/>
-                        </a:rPr>
-                        <m:t>𝑖𝑐𝑎𝑙</m:t>
-                      </m:r>
-                      <m:r>
-                        <a:rPr lang="en-US" sz="2000" b="0" i="1" smtClean="0">
-                          <a:latin typeface="Cambria Math" panose="02040503050406030204" pitchFamily="18" charset="0"/>
-                        </a:rPr>
-                        <m:t>+ .</m:t>
-                      </m:r>
-                      <m:r>
-                        <a:rPr lang="en-US" sz="2000" b="0" i="1" smtClean="0">
-                          <a:latin typeface="Cambria Math" panose="02040503050406030204" pitchFamily="18" charset="0"/>
-                        </a:rPr>
-                        <m:t>11</m:t>
-                      </m:r>
-                      <m:r>
-                        <a:rPr lang="en-US" sz="2000" b="0" i="1" smtClean="0">
-                          <a:latin typeface="Cambria Math" panose="02040503050406030204" pitchFamily="18" charset="0"/>
-                        </a:rPr>
-                        <m:t>∗</m:t>
+                        <m:t>+ .11∗</m:t>
                       </m:r>
                       <m:r>
                         <a:rPr lang="en-US" sz="2000" b="0" i="1" smtClean="0">
@@ -26406,10 +28146,10 @@
           <a:p>
             <a:pPr lvl="1"/>
             <a:r>
-              <a:rPr lang="en-US" dirty="0"/>
+              <a:rPr lang="en-US" b="1" dirty="0"/>
               <a:t>Shrinkage prevents overfitting in Bayesian model  </a:t>
             </a:r>
-            <a:endParaRPr dirty="0"/>
+            <a:endParaRPr b="1" dirty="0"/>
           </a:p>
         </p:txBody>
       </p:sp>
@@ -28850,8 +30590,8 @@
           </a:p>
         </p:txBody>
       </p:sp>
-      <mc:AlternateContent xmlns:mc="http://schemas.openxmlformats.org/markup-compatibility/2006">
-        <mc:Choice xmlns:a14="http://schemas.microsoft.com/office/drawing/2010/main" Requires="a14">
+      <mc:AlternateContent xmlns:mc="http://schemas.openxmlformats.org/markup-compatibility/2006" xmlns:a14="http://schemas.microsoft.com/office/drawing/2010/main">
+        <mc:Choice Requires="a14">
           <p:sp>
             <p:nvSpPr>
               <p:cNvPr id="3" name="Content Placeholder 2"/>
@@ -28888,7 +30628,7 @@
                     <m:sSub>
                       <m:sSubPr>
                         <m:ctrlPr>
-                          <a:rPr lang="ar-AE" i="1">
+                          <a:rPr lang="ar-AE">
                             <a:latin typeface="Cambria Math" panose="02040503050406030204" pitchFamily="18" charset="0"/>
                           </a:rPr>
                         </m:ctrlPr>
@@ -28939,7 +30679,7 @@
             </p:txBody>
           </p:sp>
         </mc:Choice>
-        <mc:Fallback>
+        <mc:Fallback xmlns="">
           <p:sp>
             <p:nvSpPr>
               <p:cNvPr id="3" name="Content Placeholder 2"/>
@@ -29563,7 +31303,7 @@
                     <m:sSub>
                       <m:sSubPr>
                         <m:ctrlPr>
-                          <a:rPr i="1">
+                          <a:rPr>
                             <a:latin typeface="Cambria Math" panose="02040503050406030204" pitchFamily="18" charset="0"/>
                           </a:rPr>
                         </m:ctrlPr>
@@ -29618,7 +31358,7 @@
                     <m:sSub>
                       <m:sSubPr>
                         <m:ctrlPr>
-                          <a:rPr i="1">
+                          <a:rPr>
                             <a:latin typeface="Cambria Math" panose="02040503050406030204" pitchFamily="18" charset="0"/>
                           </a:rPr>
                         </m:ctrlPr>
@@ -29672,7 +31412,7 @@
                     <m:sSub>
                       <m:sSubPr>
                         <m:ctrlPr>
-                          <a:rPr i="1">
+                          <a:rPr>
                             <a:latin typeface="Cambria Math" panose="02040503050406030204" pitchFamily="18" charset="0"/>
                           </a:rPr>
                         </m:ctrlPr>

--- a/LectureSlides/14_HierarchicalBayesModels.pptx
+++ b/LectureSlides/14_HierarchicalBayesModels.pptx
@@ -359,7 +359,7 @@
           <a:p>
             <a:fld id="{241EB5C9-1307-BA42-ABA2-0BC069CD8E7F}" type="datetimeFigureOut">
               <a:rPr lang="en-US" smtClean="0"/>
-              <a:t>10/28/2026</a:t>
+              <a:t>10/29/2026</a:t>
             </a:fld>
             <a:endParaRPr lang="en-US"/>
           </a:p>
@@ -527,7 +527,7 @@
           <a:p>
             <a:fld id="{241EB5C9-1307-BA42-ABA2-0BC069CD8E7F}" type="datetimeFigureOut">
               <a:rPr lang="en-US" smtClean="0"/>
-              <a:t>10/28/2026</a:t>
+              <a:t>10/29/2026</a:t>
             </a:fld>
             <a:endParaRPr lang="en-US"/>
           </a:p>
@@ -705,7 +705,7 @@
           <a:p>
             <a:fld id="{241EB5C9-1307-BA42-ABA2-0BC069CD8E7F}" type="datetimeFigureOut">
               <a:rPr lang="en-US" smtClean="0"/>
-              <a:t>10/28/2026</a:t>
+              <a:t>10/29/2026</a:t>
             </a:fld>
             <a:endParaRPr lang="en-US"/>
           </a:p>
@@ -873,7 +873,7 @@
           <a:p>
             <a:fld id="{241EB5C9-1307-BA42-ABA2-0BC069CD8E7F}" type="datetimeFigureOut">
               <a:rPr lang="en-US" smtClean="0"/>
-              <a:t>10/28/2026</a:t>
+              <a:t>10/29/2026</a:t>
             </a:fld>
             <a:endParaRPr lang="en-US"/>
           </a:p>
@@ -1118,7 +1118,7 @@
           <a:p>
             <a:fld id="{241EB5C9-1307-BA42-ABA2-0BC069CD8E7F}" type="datetimeFigureOut">
               <a:rPr lang="en-US" smtClean="0"/>
-              <a:t>10/28/2026</a:t>
+              <a:t>10/29/2026</a:t>
             </a:fld>
             <a:endParaRPr lang="en-US"/>
           </a:p>
@@ -1403,7 +1403,7 @@
           <a:p>
             <a:fld id="{241EB5C9-1307-BA42-ABA2-0BC069CD8E7F}" type="datetimeFigureOut">
               <a:rPr lang="en-US" smtClean="0"/>
-              <a:t>10/28/2026</a:t>
+              <a:t>10/29/2026</a:t>
             </a:fld>
             <a:endParaRPr lang="en-US"/>
           </a:p>
@@ -1822,7 +1822,7 @@
           <a:p>
             <a:fld id="{241EB5C9-1307-BA42-ABA2-0BC069CD8E7F}" type="datetimeFigureOut">
               <a:rPr lang="en-US" smtClean="0"/>
-              <a:t>10/28/2026</a:t>
+              <a:t>10/29/2026</a:t>
             </a:fld>
             <a:endParaRPr lang="en-US"/>
           </a:p>
@@ -1939,7 +1939,7 @@
           <a:p>
             <a:fld id="{241EB5C9-1307-BA42-ABA2-0BC069CD8E7F}" type="datetimeFigureOut">
               <a:rPr lang="en-US" smtClean="0"/>
-              <a:t>10/28/2026</a:t>
+              <a:t>10/29/2026</a:t>
             </a:fld>
             <a:endParaRPr lang="en-US"/>
           </a:p>
@@ -2034,7 +2034,7 @@
           <a:p>
             <a:fld id="{241EB5C9-1307-BA42-ABA2-0BC069CD8E7F}" type="datetimeFigureOut">
               <a:rPr lang="en-US" smtClean="0"/>
-              <a:t>10/28/2026</a:t>
+              <a:t>10/29/2026</a:t>
             </a:fld>
             <a:endParaRPr lang="en-US"/>
           </a:p>
@@ -2309,7 +2309,7 @@
           <a:p>
             <a:fld id="{241EB5C9-1307-BA42-ABA2-0BC069CD8E7F}" type="datetimeFigureOut">
               <a:rPr lang="en-US" smtClean="0"/>
-              <a:t>10/28/2026</a:t>
+              <a:t>10/29/2026</a:t>
             </a:fld>
             <a:endParaRPr lang="en-US"/>
           </a:p>
@@ -2561,7 +2561,7 @@
           <a:p>
             <a:fld id="{241EB5C9-1307-BA42-ABA2-0BC069CD8E7F}" type="datetimeFigureOut">
               <a:rPr lang="en-US" smtClean="0"/>
-              <a:t>10/28/2026</a:t>
+              <a:t>10/29/2026</a:t>
             </a:fld>
             <a:endParaRPr lang="en-US"/>
           </a:p>
@@ -2772,7 +2772,7 @@
           <a:p>
             <a:fld id="{241EB5C9-1307-BA42-ABA2-0BC069CD8E7F}" type="datetimeFigureOut">
               <a:rPr lang="en-US" smtClean="0"/>
-              <a:t>10/28/2026</a:t>
+              <a:t>10/29/2026</a:t>
             </a:fld>
             <a:endParaRPr lang="en-US"/>
           </a:p>
@@ -3216,30 +3216,6 @@
           </a:p>
         </p:txBody>
       </p:sp>
-      <p:sp>
-        <p:nvSpPr>
-          <p:cNvPr id="4" name="Date Placeholder 3"/>
-          <p:cNvSpPr>
-            <a:spLocks noGrp="1"/>
-          </p:cNvSpPr>
-          <p:nvPr>
-            <p:ph type="dt" sz="half" idx="10"/>
-          </p:nvPr>
-        </p:nvSpPr>
-        <p:spPr/>
-        <p:txBody>
-          <a:bodyPr/>
-          <a:lstStyle/>
-          <a:p>
-            <a:pPr marL="0" lvl="0" indent="0">
-              <a:buNone/>
-            </a:pPr>
-            <a:r>
-              <a:t>09/04/2023</a:t>
-            </a:r>
-          </a:p>
-        </p:txBody>
-      </p:sp>
       <p:pic>
         <p:nvPicPr>
           <p:cNvPr id="5" name="Picture 2" descr="Image result for harvard extension school logo">
@@ -3318,7 +3294,7 @@
             <a:pPr algn="ctr"/>
             <a:r>
               <a:rPr lang="en-US" sz="1100" dirty="0"/>
-              <a:t>Copyright, 2023 2024, 2025, Stephen F Elston. All rights reserved</a:t>
+              <a:t>Copyright, 2023 2024, 2025, 2026, Stephen F Elston. All rights reserved</a:t>
             </a:r>
             <a:r>
               <a:rPr lang="en-US" dirty="0"/>
@@ -7212,8 +7188,8 @@
           </a:p>
         </p:txBody>
       </p:sp>
-      <mc:AlternateContent xmlns:mc="http://schemas.openxmlformats.org/markup-compatibility/2006">
-        <mc:Choice xmlns:a14="http://schemas.microsoft.com/office/drawing/2010/main" Requires="a14">
+      <mc:AlternateContent xmlns:mc="http://schemas.openxmlformats.org/markup-compatibility/2006" xmlns:a14="http://schemas.microsoft.com/office/drawing/2010/main">
+        <mc:Choice Requires="a14">
           <p:sp>
             <p:nvSpPr>
               <p:cNvPr id="4" name="Text Placeholder 3"/>
@@ -7726,7 +7702,7 @@
             </p:txBody>
           </p:sp>
         </mc:Choice>
-        <mc:Fallback>
+        <mc:Fallback xmlns="">
           <p:sp>
             <p:nvSpPr>
               <p:cNvPr id="4" name="Text Placeholder 3"/>
@@ -9472,7 +9448,7 @@
                 </a:pPr>
                 <a:r>
                   <a:rPr lang="en-US" sz="2000" dirty="0"/>
-                  <a:t>Posterior predictive checks show good fit</a:t>
+                  <a:t>Posterior predictive checks show generally good fit</a:t>
                 </a:r>
               </a:p>
               <a:p>
@@ -9484,10 +9460,8 @@
               <a:p>
                 <a:r>
                   <a:rPr lang="en-US" sz="2000" dirty="0"/>
-                  <a:t>The Bayesian p-value shows significant deviations respect to the ideal distribution </a:t>
+                  <a:t>The </a:t>
                 </a:r>
-              </a:p>
-              <a:p>
                 <a14:m>
                   <m:oMath xmlns:m="http://schemas.openxmlformats.org/officeDocument/2006/math">
                     <m:r>
@@ -9508,7 +9482,13 @@
                 </a14:m>
                 <a:r>
                   <a:rPr lang="en-US" sz="2000" dirty="0"/>
-                  <a:t> distribution is skewed with respect to the observed   </a:t>
+                  <a:t> shows significant deviations respect to the ideal distribution </a:t>
+                </a:r>
+              </a:p>
+              <a:p>
+                <a:r>
+                  <a:rPr lang="en-US" sz="2000" dirty="0"/>
+                  <a:t>Sampled mean distribution is skewed with respect to the observed   </a:t>
                 </a:r>
               </a:p>
             </p:txBody>
@@ -9539,7 +9519,7 @@
               <a:blipFill>
                 <a:blip r:embed="rId2"/>
                 <a:stretch>
-                  <a:fillRect l="-1567" t="-940" r="-855"/>
+                  <a:fillRect l="-1567" t="-940"/>
                 </a:stretch>
               </a:blipFill>
             </p:spPr>
@@ -9644,6 +9624,33 @@
                                   </p:childTnLst>
                                 </p:cTn>
                               </p:par>
+                              <p:par>
+                                <p:cTn id="7" presetID="1" presetClass="entr" presetSubtype="0" fill="hold" nodeType="withEffect">
+                                  <p:stCondLst>
+                                    <p:cond delay="0"/>
+                                  </p:stCondLst>
+                                  <p:childTnLst>
+                                    <p:set>
+                                      <p:cBhvr>
+                                        <p:cTn id="8" dur="1" fill="hold">
+                                          <p:stCondLst>
+                                            <p:cond delay="0"/>
+                                          </p:stCondLst>
+                                        </p:cTn>
+                                        <p:tgtEl>
+                                          <p:spTgt spid="6"/>
+                                        </p:tgtEl>
+                                        <p:attrNameLst>
+                                          <p:attrName>style.visibility</p:attrName>
+                                        </p:attrNameLst>
+                                      </p:cBhvr>
+                                      <p:to>
+                                        <p:strVal val="visible"/>
+                                      </p:to>
+                                    </p:set>
+                                  </p:childTnLst>
+                                </p:cTn>
+                              </p:par>
                             </p:childTnLst>
                           </p:cTn>
                         </p:par>
@@ -9651,26 +9658,26 @@
                     </p:cTn>
                   </p:par>
                   <p:par>
-                    <p:cTn id="7" fill="hold">
+                    <p:cTn id="9" fill="hold">
                       <p:stCondLst>
                         <p:cond delay="indefinite"/>
                       </p:stCondLst>
                       <p:childTnLst>
                         <p:par>
-                          <p:cTn id="8" fill="hold">
+                          <p:cTn id="10" fill="hold">
                             <p:stCondLst>
                               <p:cond delay="0"/>
                             </p:stCondLst>
                             <p:childTnLst>
                               <p:par>
-                                <p:cTn id="9" presetID="1" presetClass="entr" presetSubtype="0" fill="hold" nodeType="clickEffect">
+                                <p:cTn id="11" presetID="1" presetClass="entr" presetSubtype="0" fill="hold" nodeType="clickEffect">
                                   <p:stCondLst>
                                     <p:cond delay="0"/>
                                   </p:stCondLst>
                                   <p:childTnLst>
                                     <p:set>
                                       <p:cBhvr>
-                                        <p:cTn id="10" dur="1" fill="hold">
+                                        <p:cTn id="12" dur="1" fill="hold">
                                           <p:stCondLst>
                                             <p:cond delay="0"/>
                                           </p:stCondLst>
@@ -9700,26 +9707,26 @@
                     </p:cTn>
                   </p:par>
                   <p:par>
-                    <p:cTn id="11" fill="hold">
+                    <p:cTn id="13" fill="hold">
                       <p:stCondLst>
                         <p:cond delay="indefinite"/>
                       </p:stCondLst>
                       <p:childTnLst>
                         <p:par>
-                          <p:cTn id="12" fill="hold">
+                          <p:cTn id="14" fill="hold">
                             <p:stCondLst>
                               <p:cond delay="0"/>
                             </p:stCondLst>
                             <p:childTnLst>
                               <p:par>
-                                <p:cTn id="13" presetID="1" presetClass="entr" presetSubtype="0" fill="hold" nodeType="clickEffect">
+                                <p:cTn id="15" presetID="1" presetClass="entr" presetSubtype="0" fill="hold" nodeType="clickEffect">
                                   <p:stCondLst>
                                     <p:cond delay="0"/>
                                   </p:stCondLst>
                                   <p:childTnLst>
                                     <p:set>
                                       <p:cBhvr>
-                                        <p:cTn id="14" dur="1" fill="hold">
+                                        <p:cTn id="16" dur="1" fill="hold">
                                           <p:stCondLst>
                                             <p:cond delay="0"/>
                                           </p:stCondLst>
@@ -11395,7 +11402,7 @@
                       <m:d>
                         <m:dPr>
                           <m:ctrlPr>
-                            <a:rPr lang="en-US" i="1">
+                            <a:rPr lang="en-US" b="0" i="1" smtClean="0">
                               <a:latin typeface="Cambria Math" panose="02040503050406030204" pitchFamily="18" charset="0"/>
                               <a:ea typeface="Cambria Math" panose="02040503050406030204" pitchFamily="18" charset="0"/>
                             </a:rPr>
@@ -15725,14 +15732,8 @@
                 </a:pPr>
                 <a:r>
                   <a:rPr lang="en-US" sz="2000" dirty="0"/>
-                  <a:t>The Bayesian p-value shows large bias with respect to the ideal distribution </a:t>
+                  <a:t>The </a:t>
                 </a:r>
-              </a:p>
-              <a:p>
-                <a:pPr>
-                  <a:buFont typeface="Arial" panose="020B0604020202020204" pitchFamily="34" charset="0"/>
-                  <a:buChar char="•"/>
-                </a:pPr>
                 <a14:m>
                   <m:oMath xmlns:m="http://schemas.openxmlformats.org/officeDocument/2006/math">
                     <m:r>
@@ -15753,7 +15754,17 @@
                 </a14:m>
                 <a:r>
                   <a:rPr lang="en-US" sz="2000" dirty="0"/>
-                  <a:t> distribution shows minimal with respect to the observed   </a:t>
+                  <a:t> shows large bias with respect to the ideal distribution </a:t>
+                </a:r>
+              </a:p>
+              <a:p>
+                <a:pPr>
+                  <a:buFont typeface="Arial" panose="020B0604020202020204" pitchFamily="34" charset="0"/>
+                  <a:buChar char="•"/>
+                </a:pPr>
+                <a:r>
+                  <a:rPr lang="en-US" sz="2000" dirty="0"/>
+                  <a:t>Sampled mean distribution shows minimal with respect to the observed   </a:t>
                 </a:r>
               </a:p>
             </p:txBody>
@@ -15785,7 +15796,7 @@
               <a:blipFill>
                 <a:blip r:embed="rId2"/>
                 <a:stretch>
-                  <a:fillRect l="-1220" t="-982" r="-2168"/>
+                  <a:fillRect l="-1220" t="-982" r="-2846"/>
                 </a:stretch>
               </a:blipFill>
             </p:spPr>
@@ -15895,6 +15906,33 @@
                                   </p:childTnLst>
                                 </p:cTn>
                               </p:par>
+                              <p:par>
+                                <p:cTn id="7" presetID="1" presetClass="entr" presetSubtype="0" fill="hold" nodeType="withEffect">
+                                  <p:stCondLst>
+                                    <p:cond delay="0"/>
+                                  </p:stCondLst>
+                                  <p:childTnLst>
+                                    <p:set>
+                                      <p:cBhvr>
+                                        <p:cTn id="8" dur="1" fill="hold">
+                                          <p:stCondLst>
+                                            <p:cond delay="0"/>
+                                          </p:stCondLst>
+                                        </p:cTn>
+                                        <p:tgtEl>
+                                          <p:spTgt spid="6"/>
+                                        </p:tgtEl>
+                                        <p:attrNameLst>
+                                          <p:attrName>style.visibility</p:attrName>
+                                        </p:attrNameLst>
+                                      </p:cBhvr>
+                                      <p:to>
+                                        <p:strVal val="visible"/>
+                                      </p:to>
+                                    </p:set>
+                                  </p:childTnLst>
+                                </p:cTn>
+                              </p:par>
                             </p:childTnLst>
                           </p:cTn>
                         </p:par>
@@ -15902,26 +15940,26 @@
                     </p:cTn>
                   </p:par>
                   <p:par>
-                    <p:cTn id="7" fill="hold">
+                    <p:cTn id="9" fill="hold">
                       <p:stCondLst>
                         <p:cond delay="indefinite"/>
                       </p:stCondLst>
                       <p:childTnLst>
                         <p:par>
-                          <p:cTn id="8" fill="hold">
+                          <p:cTn id="10" fill="hold">
                             <p:stCondLst>
                               <p:cond delay="0"/>
                             </p:stCondLst>
                             <p:childTnLst>
                               <p:par>
-                                <p:cTn id="9" presetID="1" presetClass="entr" presetSubtype="0" fill="hold" nodeType="clickEffect">
+                                <p:cTn id="11" presetID="1" presetClass="entr" presetSubtype="0" fill="hold" nodeType="clickEffect">
                                   <p:stCondLst>
                                     <p:cond delay="0"/>
                                   </p:stCondLst>
                                   <p:childTnLst>
                                     <p:set>
                                       <p:cBhvr>
-                                        <p:cTn id="10" dur="1" fill="hold">
+                                        <p:cTn id="12" dur="1" fill="hold">
                                           <p:stCondLst>
                                             <p:cond delay="0"/>
                                           </p:stCondLst>
@@ -15951,26 +15989,26 @@
                     </p:cTn>
                   </p:par>
                   <p:par>
-                    <p:cTn id="11" fill="hold">
+                    <p:cTn id="13" fill="hold">
                       <p:stCondLst>
                         <p:cond delay="indefinite"/>
                       </p:stCondLst>
                       <p:childTnLst>
                         <p:par>
-                          <p:cTn id="12" fill="hold">
+                          <p:cTn id="14" fill="hold">
                             <p:stCondLst>
                               <p:cond delay="0"/>
                             </p:stCondLst>
                             <p:childTnLst>
                               <p:par>
-                                <p:cTn id="13" presetID="1" presetClass="entr" presetSubtype="0" fill="hold" nodeType="clickEffect">
+                                <p:cTn id="15" presetID="1" presetClass="entr" presetSubtype="0" fill="hold" nodeType="clickEffect">
                                   <p:stCondLst>
                                     <p:cond delay="0"/>
                                   </p:stCondLst>
                                   <p:childTnLst>
                                     <p:set>
                                       <p:cBhvr>
-                                        <p:cTn id="14" dur="1" fill="hold">
+                                        <p:cTn id="16" dur="1" fill="hold">
                                           <p:stCondLst>
                                             <p:cond delay="0"/>
                                           </p:stCondLst>
@@ -16180,7 +16218,7 @@
         </p:spPr>
         <p:txBody>
           <a:bodyPr>
-            <a:normAutofit fontScale="92500" lnSpcReduction="20000"/>
+            <a:normAutofit fontScale="92500" lnSpcReduction="10000"/>
           </a:bodyPr>
           <a:lstStyle/>
           <a:p>
@@ -16273,21 +16311,6 @@
             <a:pPr lvl="0"/>
             <a:r>
               <a:rPr lang="en-US" dirty="0"/>
-              <a:t>Observations are </a:t>
-            </a:r>
-            <a:r>
-              <a:rPr lang="en-US" dirty="0" err="1"/>
-              <a:t>iid</a:t>
-            </a:r>
-            <a:r>
-              <a:rPr lang="en-US" dirty="0"/>
-              <a:t> within each county </a:t>
-            </a:r>
-          </a:p>
-          <a:p>
-            <a:pPr lvl="0"/>
-            <a:r>
-              <a:rPr lang="en-US" dirty="0"/>
               <a:t>We assume the observations </a:t>
             </a:r>
             <a:r>
@@ -16316,6 +16339,22 @@
               <a:rPr lang="en-US" b="1" dirty="0"/>
               <a:t>not between counties</a:t>
             </a:r>
+          </a:p>
+          <a:p>
+            <a:pPr lvl="1"/>
+            <a:r>
+              <a:rPr lang="en-US" dirty="0"/>
+              <a:t>Assumes observations are </a:t>
+            </a:r>
+            <a:r>
+              <a:rPr lang="en-US" dirty="0" err="1"/>
+              <a:t>iid</a:t>
+            </a:r>
+            <a:r>
+              <a:rPr lang="en-US" dirty="0"/>
+              <a:t> within each county </a:t>
+            </a:r>
+            <a:endParaRPr lang="en-US" b="1" dirty="0"/>
           </a:p>
           <a:p>
             <a:pPr lvl="0"/>
@@ -16578,33 +16617,15 @@
                                   </p:childTnLst>
                                 </p:cTn>
                               </p:par>
-                            </p:childTnLst>
-                          </p:cTn>
-                        </p:par>
-                      </p:childTnLst>
-                    </p:cTn>
-                  </p:par>
-                  <p:par>
-                    <p:cTn id="21" fill="hold">
-                      <p:stCondLst>
-                        <p:cond delay="indefinite"/>
-                      </p:stCondLst>
-                      <p:childTnLst>
-                        <p:par>
-                          <p:cTn id="22" fill="hold">
-                            <p:stCondLst>
-                              <p:cond delay="0"/>
-                            </p:stCondLst>
-                            <p:childTnLst>
                               <p:par>
-                                <p:cTn id="23" presetID="1" presetClass="entr" presetSubtype="0" fill="hold" nodeType="clickEffect">
+                                <p:cTn id="21" presetID="1" presetClass="entr" presetSubtype="0" fill="hold" nodeType="withEffect">
                                   <p:stCondLst>
                                     <p:cond delay="0"/>
                                   </p:stCondLst>
                                   <p:childTnLst>
                                     <p:set>
                                       <p:cBhvr>
-                                        <p:cTn id="24" dur="1" fill="hold">
+                                        <p:cTn id="22" dur="1" fill="hold">
                                           <p:stCondLst>
                                             <p:cond delay="0"/>
                                           </p:stCondLst>
@@ -16634,26 +16655,26 @@
                     </p:cTn>
                   </p:par>
                   <p:par>
-                    <p:cTn id="25" fill="hold">
+                    <p:cTn id="23" fill="hold">
                       <p:stCondLst>
                         <p:cond delay="indefinite"/>
                       </p:stCondLst>
                       <p:childTnLst>
                         <p:par>
-                          <p:cTn id="26" fill="hold">
+                          <p:cTn id="24" fill="hold">
                             <p:stCondLst>
                               <p:cond delay="0"/>
                             </p:stCondLst>
                             <p:childTnLst>
                               <p:par>
-                                <p:cTn id="27" presetID="1" presetClass="entr" presetSubtype="0" fill="hold" nodeType="clickEffect">
+                                <p:cTn id="25" presetID="1" presetClass="entr" presetSubtype="0" fill="hold" nodeType="clickEffect">
                                   <p:stCondLst>
                                     <p:cond delay="0"/>
                                   </p:stCondLst>
                                   <p:childTnLst>
                                     <p:set>
                                       <p:cBhvr>
-                                        <p:cTn id="28" dur="1" fill="hold">
+                                        <p:cTn id="26" dur="1" fill="hold">
                                           <p:stCondLst>
                                             <p:cond delay="0"/>
                                           </p:stCondLst>
@@ -16772,8 +16793,8 @@
           </a:p>
         </p:txBody>
       </p:sp>
-      <mc:AlternateContent xmlns:mc="http://schemas.openxmlformats.org/markup-compatibility/2006" xmlns:a14="http://schemas.microsoft.com/office/drawing/2010/main">
-        <mc:Choice Requires="a14">
+      <mc:AlternateContent xmlns:mc="http://schemas.openxmlformats.org/markup-compatibility/2006">
+        <mc:Choice xmlns:a14="http://schemas.microsoft.com/office/drawing/2010/main" Requires="a14">
           <p:sp>
             <p:nvSpPr>
               <p:cNvPr id="4" name="Text Placeholder 3">
@@ -16817,8 +16838,12 @@
                   <a:buChar char="•"/>
                 </a:pPr>
                 <a:r>
+                  <a:rPr lang="en-US" sz="2000" b="1" dirty="0"/>
+                  <a:t>Pooled hyperparameters </a:t>
+                </a:r>
+                <a:r>
                   <a:rPr lang="en-US" sz="2000" dirty="0"/>
-                  <a:t>Pooled hyperparameters at top level </a:t>
+                  <a:t>at top level </a:t>
                 </a:r>
               </a:p>
               <a:p>
@@ -17037,8 +17062,12 @@
                   <a:buChar char="•"/>
                 </a:pPr>
                 <a:r>
+                  <a:rPr lang="en-US" sz="2000" b="1" dirty="0"/>
+                  <a:t>County specific priors </a:t>
+                </a:r>
+                <a:r>
                   <a:rPr lang="en-US" sz="2000" dirty="0"/>
-                  <a:t>County specific priors for </a:t>
+                  <a:t>for </a:t>
                 </a:r>
                 <a14:m>
                   <m:oMath xmlns:m="http://schemas.openxmlformats.org/officeDocument/2006/math">
@@ -17389,7 +17418,7 @@
             </p:txBody>
           </p:sp>
         </mc:Choice>
-        <mc:Fallback xmlns="">
+        <mc:Fallback>
           <p:sp>
             <p:nvSpPr>
               <p:cNvPr id="4" name="Text Placeholder 3">
@@ -17414,7 +17443,7 @@
               <a:blipFill>
                 <a:blip r:embed="rId2"/>
                 <a:stretch>
-                  <a:fillRect l="-1757" t="-734"/>
+                  <a:fillRect l="-1757" t="-734" r="-1230"/>
                 </a:stretch>
               </a:blipFill>
             </p:spPr>
@@ -18218,10 +18247,10 @@
       </mc:AlternateContent>
       <p:pic>
         <p:nvPicPr>
-          <p:cNvPr id="3" name="Picture 2">
+          <p:cNvPr id="5" name="Picture 4">
             <a:extLst>
               <a:ext uri="{FF2B5EF4-FFF2-40B4-BE49-F238E27FC236}">
-                <a16:creationId xmlns:a16="http://schemas.microsoft.com/office/drawing/2014/main" id="{644BA63D-5A13-5BC5-50EA-7563FB9C67EB}"/>
+                <a16:creationId xmlns:a16="http://schemas.microsoft.com/office/drawing/2014/main" id="{92EE56D9-69AF-F16B-0F3D-5BC76D2F4DA2}"/>
               </a:ext>
             </a:extLst>
           </p:cNvPr>
@@ -18231,7 +18260,7 @@
           <p:nvPr/>
         </p:nvPicPr>
         <p:blipFill>
-          <a:blip r:embed="rId2"/>
+          <a:blip r:embed="rId3"/>
           <a:stretch>
             <a:fillRect/>
           </a:stretch>
@@ -19520,6 +19549,214 @@
   <p:clrMapOvr>
     <a:masterClrMapping/>
   </p:clrMapOvr>
+  <p:timing>
+    <p:tnLst>
+      <p:par>
+        <p:cTn id="1" dur="indefinite" restart="never" nodeType="tmRoot">
+          <p:childTnLst>
+            <p:seq concurrent="1" nextAc="seek">
+              <p:cTn id="2" dur="indefinite" nodeType="mainSeq">
+                <p:childTnLst>
+                  <p:par>
+                    <p:cTn id="3" fill="hold">
+                      <p:stCondLst>
+                        <p:cond delay="indefinite"/>
+                      </p:stCondLst>
+                      <p:childTnLst>
+                        <p:par>
+                          <p:cTn id="4" fill="hold">
+                            <p:stCondLst>
+                              <p:cond delay="0"/>
+                            </p:stCondLst>
+                            <p:childTnLst>
+                              <p:par>
+                                <p:cTn id="5" presetID="1" presetClass="entr" presetSubtype="0" fill="hold" nodeType="clickEffect">
+                                  <p:stCondLst>
+                                    <p:cond delay="0"/>
+                                  </p:stCondLst>
+                                  <p:childTnLst>
+                                    <p:set>
+                                      <p:cBhvr>
+                                        <p:cTn id="6" dur="1" fill="hold">
+                                          <p:stCondLst>
+                                            <p:cond delay="0"/>
+                                          </p:stCondLst>
+                                        </p:cTn>
+                                        <p:tgtEl>
+                                          <p:spTgt spid="6">
+                                            <p:txEl>
+                                              <p:pRg st="0" end="0"/>
+                                            </p:txEl>
+                                          </p:spTgt>
+                                        </p:tgtEl>
+                                        <p:attrNameLst>
+                                          <p:attrName>style.visibility</p:attrName>
+                                        </p:attrNameLst>
+                                      </p:cBhvr>
+                                      <p:to>
+                                        <p:strVal val="visible"/>
+                                      </p:to>
+                                    </p:set>
+                                  </p:childTnLst>
+                                </p:cTn>
+                              </p:par>
+                              <p:par>
+                                <p:cTn id="7" presetID="1" presetClass="entr" presetSubtype="0" fill="hold" nodeType="withEffect">
+                                  <p:stCondLst>
+                                    <p:cond delay="0"/>
+                                  </p:stCondLst>
+                                  <p:childTnLst>
+                                    <p:set>
+                                      <p:cBhvr>
+                                        <p:cTn id="8" dur="1" fill="hold">
+                                          <p:stCondLst>
+                                            <p:cond delay="0"/>
+                                          </p:stCondLst>
+                                        </p:cTn>
+                                        <p:tgtEl>
+                                          <p:spTgt spid="6">
+                                            <p:txEl>
+                                              <p:pRg st="1" end="1"/>
+                                            </p:txEl>
+                                          </p:spTgt>
+                                        </p:tgtEl>
+                                        <p:attrNameLst>
+                                          <p:attrName>style.visibility</p:attrName>
+                                        </p:attrNameLst>
+                                      </p:cBhvr>
+                                      <p:to>
+                                        <p:strVal val="visible"/>
+                                      </p:to>
+                                    </p:set>
+                                  </p:childTnLst>
+                                </p:cTn>
+                              </p:par>
+                            </p:childTnLst>
+                          </p:cTn>
+                        </p:par>
+                      </p:childTnLst>
+                    </p:cTn>
+                  </p:par>
+                  <p:par>
+                    <p:cTn id="9" fill="hold">
+                      <p:stCondLst>
+                        <p:cond delay="indefinite"/>
+                      </p:stCondLst>
+                      <p:childTnLst>
+                        <p:par>
+                          <p:cTn id="10" fill="hold">
+                            <p:stCondLst>
+                              <p:cond delay="0"/>
+                            </p:stCondLst>
+                            <p:childTnLst>
+                              <p:par>
+                                <p:cTn id="11" presetID="1" presetClass="entr" presetSubtype="0" fill="hold" nodeType="clickEffect">
+                                  <p:stCondLst>
+                                    <p:cond delay="0"/>
+                                  </p:stCondLst>
+                                  <p:childTnLst>
+                                    <p:set>
+                                      <p:cBhvr>
+                                        <p:cTn id="12" dur="1" fill="hold">
+                                          <p:stCondLst>
+                                            <p:cond delay="0"/>
+                                          </p:stCondLst>
+                                        </p:cTn>
+                                        <p:tgtEl>
+                                          <p:spTgt spid="6">
+                                            <p:txEl>
+                                              <p:pRg st="2" end="2"/>
+                                            </p:txEl>
+                                          </p:spTgt>
+                                        </p:tgtEl>
+                                        <p:attrNameLst>
+                                          <p:attrName>style.visibility</p:attrName>
+                                        </p:attrNameLst>
+                                      </p:cBhvr>
+                                      <p:to>
+                                        <p:strVal val="visible"/>
+                                      </p:to>
+                                    </p:set>
+                                  </p:childTnLst>
+                                </p:cTn>
+                              </p:par>
+                            </p:childTnLst>
+                          </p:cTn>
+                        </p:par>
+                      </p:childTnLst>
+                    </p:cTn>
+                  </p:par>
+                  <p:par>
+                    <p:cTn id="13" fill="hold">
+                      <p:stCondLst>
+                        <p:cond delay="indefinite"/>
+                      </p:stCondLst>
+                      <p:childTnLst>
+                        <p:par>
+                          <p:cTn id="14" fill="hold">
+                            <p:stCondLst>
+                              <p:cond delay="0"/>
+                            </p:stCondLst>
+                            <p:childTnLst>
+                              <p:par>
+                                <p:cTn id="15" presetID="1" presetClass="entr" presetSubtype="0" fill="hold" nodeType="clickEffect">
+                                  <p:stCondLst>
+                                    <p:cond delay="0"/>
+                                  </p:stCondLst>
+                                  <p:childTnLst>
+                                    <p:set>
+                                      <p:cBhvr>
+                                        <p:cTn id="16" dur="1" fill="hold">
+                                          <p:stCondLst>
+                                            <p:cond delay="0"/>
+                                          </p:stCondLst>
+                                        </p:cTn>
+                                        <p:tgtEl>
+                                          <p:spTgt spid="6">
+                                            <p:txEl>
+                                              <p:pRg st="3" end="3"/>
+                                            </p:txEl>
+                                          </p:spTgt>
+                                        </p:tgtEl>
+                                        <p:attrNameLst>
+                                          <p:attrName>style.visibility</p:attrName>
+                                        </p:attrNameLst>
+                                      </p:cBhvr>
+                                      <p:to>
+                                        <p:strVal val="visible"/>
+                                      </p:to>
+                                    </p:set>
+                                  </p:childTnLst>
+                                </p:cTn>
+                              </p:par>
+                            </p:childTnLst>
+                          </p:cTn>
+                        </p:par>
+                      </p:childTnLst>
+                    </p:cTn>
+                  </p:par>
+                </p:childTnLst>
+              </p:cTn>
+              <p:prevCondLst>
+                <p:cond evt="onPrev" delay="0">
+                  <p:tgtEl>
+                    <p:sldTgt/>
+                  </p:tgtEl>
+                </p:cond>
+              </p:prevCondLst>
+              <p:nextCondLst>
+                <p:cond evt="onNext" delay="0">
+                  <p:tgtEl>
+                    <p:sldTgt/>
+                  </p:tgtEl>
+                </p:cond>
+              </p:nextCondLst>
+            </p:seq>
+          </p:childTnLst>
+        </p:cTn>
+      </p:par>
+    </p:tnLst>
+  </p:timing>
 </p:sld>
 </file>
 
@@ -20737,9 +20974,16 @@
             <p:ph idx="1"/>
           </p:nvPr>
         </p:nvSpPr>
-        <p:spPr/>
+        <p:spPr>
+          <a:xfrm>
+            <a:off x="457200" y="1200151"/>
+            <a:ext cx="8229600" cy="3737370"/>
+          </a:xfrm>
+        </p:spPr>
         <p:txBody>
-          <a:bodyPr/>
+          <a:bodyPr>
+            <a:normAutofit fontScale="92500"/>
+          </a:bodyPr>
           <a:lstStyle/>
           <a:p>
             <a:pPr marL="0" lvl="0" indent="0">
@@ -20763,21 +21007,18 @@
             <a:pPr lvl="0"/>
             <a:r>
               <a:rPr dirty="0"/>
-              <a:t>Pooled model has a flat structure</a:t>
+              <a:t>Pooled model has a </a:t>
+            </a:r>
+            <a:r>
+              <a:rPr b="1" dirty="0"/>
+              <a:t>flat structure</a:t>
             </a:r>
           </a:p>
           <a:p>
-            <a:pPr lvl="0"/>
+            <a:pPr lvl="1"/>
             <a:r>
               <a:rPr dirty="0"/>
               <a:t>Model coefficients are at the same level</a:t>
-            </a:r>
-          </a:p>
-          <a:p>
-            <a:pPr lvl="0"/>
-            <a:r>
-              <a:rPr dirty="0"/>
-              <a:t>Pooling maximizes statistical power using all available data to fit a model</a:t>
             </a:r>
             <a:endParaRPr lang="en-US" dirty="0"/>
           </a:p>
@@ -20785,6 +21026,21 @@
             <a:pPr lvl="1"/>
             <a:r>
               <a:rPr lang="en-US" dirty="0"/>
+              <a:t>The OLS and GLM models we have worked with are frequentist flat models</a:t>
+            </a:r>
+            <a:endParaRPr dirty="0"/>
+          </a:p>
+          <a:p>
+            <a:pPr lvl="0"/>
+            <a:r>
+              <a:rPr dirty="0"/>
+              <a:t>Pooling maximizes statistical power using all available data to fit a model</a:t>
+            </a:r>
+            <a:endParaRPr lang="en-US" dirty="0"/>
+          </a:p>
+          <a:p>
+            <a:r>
+              <a:rPr lang="en-US" dirty="0"/>
               <a:t>Assumes </a:t>
             </a:r>
             <a:r>
@@ -20795,7 +21051,22 @@
               <a:rPr lang="en-US" dirty="0"/>
               <a:t> of observations between cases</a:t>
             </a:r>
-            <a:endParaRPr dirty="0"/>
+          </a:p>
+          <a:p>
+            <a:pPr lvl="1"/>
+            <a:r>
+              <a:rPr lang="en-US" dirty="0"/>
+              <a:t>Exchangeability assumes </a:t>
+            </a:r>
+            <a:r>
+              <a:rPr lang="en-US" b="1" dirty="0"/>
+              <a:t>variables are all </a:t>
+            </a:r>
+            <a:r>
+              <a:rPr lang="en-US" b="1" dirty="0" err="1"/>
+              <a:t>iid</a:t>
+            </a:r>
+            <a:endParaRPr b="1" dirty="0"/>
           </a:p>
           <a:p>
             <a:pPr lvl="0"/>
@@ -20862,26 +21133,39 @@
                                   </p:childTnLst>
                                 </p:cTn>
                               </p:par>
-                            </p:childTnLst>
-                          </p:cTn>
-                        </p:par>
-                      </p:childTnLst>
-                    </p:cTn>
-                  </p:par>
-                  <p:par>
-                    <p:cTn id="7" fill="hold">
-                      <p:stCondLst>
-                        <p:cond delay="indefinite"/>
-                      </p:stCondLst>
-                      <p:childTnLst>
-                        <p:par>
-                          <p:cTn id="8" fill="hold">
-                            <p:stCondLst>
-                              <p:cond delay="0"/>
-                            </p:stCondLst>
-                            <p:childTnLst>
                               <p:par>
-                                <p:cTn id="9" presetID="1" presetClass="entr" presetSubtype="0" fill="hold" nodeType="clickEffect">
+                                <p:cTn id="7" presetID="1" presetClass="entr" presetSubtype="0" fill="hold" nodeType="withEffect">
+                                  <p:stCondLst>
+                                    <p:cond delay="0"/>
+                                  </p:stCondLst>
+                                  <p:childTnLst>
+                                    <p:set>
+                                      <p:cBhvr>
+                                        <p:cTn id="8" dur="1" fill="hold">
+                                          <p:stCondLst>
+                                            <p:cond delay="0"/>
+                                          </p:stCondLst>
+                                        </p:cTn>
+                                        <p:tgtEl>
+                                          <p:spTgt spid="3">
+                                            <p:txEl>
+                                              <p:pRg st="2" end="2"/>
+                                            </p:txEl>
+                                          </p:spTgt>
+                                        </p:tgtEl>
+                                        <p:attrNameLst>
+                                          <p:attrName>style.visibility</p:attrName>
+                                        </p:attrNameLst>
+                                      </p:cBhvr>
+                                      <p:to>
+                                        <p:strVal val="visible"/>
+                                      </p:to>
+                                    </p:set>
+                                  </p:childTnLst>
+                                </p:cTn>
+                              </p:par>
+                              <p:par>
+                                <p:cTn id="9" presetID="1" presetClass="entr" presetSubtype="0" fill="hold" nodeType="withEffect">
                                   <p:stCondLst>
                                     <p:cond delay="0"/>
                                   </p:stCondLst>
@@ -20896,7 +21180,7 @@
                                         <p:tgtEl>
                                           <p:spTgt spid="3">
                                             <p:txEl>
-                                              <p:pRg st="2" end="2"/>
+                                              <p:pRg st="3" end="3"/>
                                             </p:txEl>
                                           </p:spTgt>
                                         </p:tgtEl>
@@ -20945,37 +21229,6 @@
                                         <p:tgtEl>
                                           <p:spTgt spid="3">
                                             <p:txEl>
-                                              <p:pRg st="3" end="3"/>
-                                            </p:txEl>
-                                          </p:spTgt>
-                                        </p:tgtEl>
-                                        <p:attrNameLst>
-                                          <p:attrName>style.visibility</p:attrName>
-                                        </p:attrNameLst>
-                                      </p:cBhvr>
-                                      <p:to>
-                                        <p:strVal val="visible"/>
-                                      </p:to>
-                                    </p:set>
-                                  </p:childTnLst>
-                                </p:cTn>
-                              </p:par>
-                              <p:par>
-                                <p:cTn id="15" presetID="1" presetClass="entr" presetSubtype="0" fill="hold" nodeType="withEffect">
-                                  <p:stCondLst>
-                                    <p:cond delay="0"/>
-                                  </p:stCondLst>
-                                  <p:childTnLst>
-                                    <p:set>
-                                      <p:cBhvr>
-                                        <p:cTn id="16" dur="1" fill="hold">
-                                          <p:stCondLst>
-                                            <p:cond delay="0"/>
-                                          </p:stCondLst>
-                                        </p:cTn>
-                                        <p:tgtEl>
-                                          <p:spTgt spid="3">
-                                            <p:txEl>
                                               <p:pRg st="4" end="4"/>
                                             </p:txEl>
                                           </p:spTgt>
@@ -20998,26 +21251,26 @@
                     </p:cTn>
                   </p:par>
                   <p:par>
-                    <p:cTn id="17" fill="hold">
+                    <p:cTn id="15" fill="hold">
                       <p:stCondLst>
                         <p:cond delay="indefinite"/>
                       </p:stCondLst>
                       <p:childTnLst>
                         <p:par>
-                          <p:cTn id="18" fill="hold">
+                          <p:cTn id="16" fill="hold">
                             <p:stCondLst>
                               <p:cond delay="0"/>
                             </p:stCondLst>
                             <p:childTnLst>
                               <p:par>
-                                <p:cTn id="19" presetID="1" presetClass="entr" presetSubtype="0" fill="hold" nodeType="clickEffect">
+                                <p:cTn id="17" presetID="1" presetClass="entr" presetSubtype="0" fill="hold" nodeType="clickEffect">
                                   <p:stCondLst>
                                     <p:cond delay="0"/>
                                   </p:stCondLst>
                                   <p:childTnLst>
                                     <p:set>
                                       <p:cBhvr>
-                                        <p:cTn id="20" dur="1" fill="hold">
+                                        <p:cTn id="18" dur="1" fill="hold">
                                           <p:stCondLst>
                                             <p:cond delay="0"/>
                                           </p:stCondLst>
@@ -21026,6 +21279,104 @@
                                           <p:spTgt spid="3">
                                             <p:txEl>
                                               <p:pRg st="5" end="5"/>
+                                            </p:txEl>
+                                          </p:spTgt>
+                                        </p:tgtEl>
+                                        <p:attrNameLst>
+                                          <p:attrName>style.visibility</p:attrName>
+                                        </p:attrNameLst>
+                                      </p:cBhvr>
+                                      <p:to>
+                                        <p:strVal val="visible"/>
+                                      </p:to>
+                                    </p:set>
+                                  </p:childTnLst>
+                                </p:cTn>
+                              </p:par>
+                            </p:childTnLst>
+                          </p:cTn>
+                        </p:par>
+                      </p:childTnLst>
+                    </p:cTn>
+                  </p:par>
+                  <p:par>
+                    <p:cTn id="19" fill="hold">
+                      <p:stCondLst>
+                        <p:cond delay="indefinite"/>
+                      </p:stCondLst>
+                      <p:childTnLst>
+                        <p:par>
+                          <p:cTn id="20" fill="hold">
+                            <p:stCondLst>
+                              <p:cond delay="0"/>
+                            </p:stCondLst>
+                            <p:childTnLst>
+                              <p:par>
+                                <p:cTn id="21" presetID="1" presetClass="entr" presetSubtype="0" fill="hold" nodeType="clickEffect">
+                                  <p:stCondLst>
+                                    <p:cond delay="0"/>
+                                  </p:stCondLst>
+                                  <p:childTnLst>
+                                    <p:set>
+                                      <p:cBhvr>
+                                        <p:cTn id="22" dur="1" fill="hold">
+                                          <p:stCondLst>
+                                            <p:cond delay="0"/>
+                                          </p:stCondLst>
+                                        </p:cTn>
+                                        <p:tgtEl>
+                                          <p:spTgt spid="3">
+                                            <p:txEl>
+                                              <p:pRg st="6" end="6"/>
+                                            </p:txEl>
+                                          </p:spTgt>
+                                        </p:tgtEl>
+                                        <p:attrNameLst>
+                                          <p:attrName>style.visibility</p:attrName>
+                                        </p:attrNameLst>
+                                      </p:cBhvr>
+                                      <p:to>
+                                        <p:strVal val="visible"/>
+                                      </p:to>
+                                    </p:set>
+                                  </p:childTnLst>
+                                </p:cTn>
+                              </p:par>
+                            </p:childTnLst>
+                          </p:cTn>
+                        </p:par>
+                      </p:childTnLst>
+                    </p:cTn>
+                  </p:par>
+                  <p:par>
+                    <p:cTn id="23" fill="hold">
+                      <p:stCondLst>
+                        <p:cond delay="indefinite"/>
+                      </p:stCondLst>
+                      <p:childTnLst>
+                        <p:par>
+                          <p:cTn id="24" fill="hold">
+                            <p:stCondLst>
+                              <p:cond delay="0"/>
+                            </p:stCondLst>
+                            <p:childTnLst>
+                              <p:par>
+                                <p:cTn id="25" presetID="1" presetClass="entr" presetSubtype="0" fill="hold" nodeType="clickEffect">
+                                  <p:stCondLst>
+                                    <p:cond delay="0"/>
+                                  </p:stCondLst>
+                                  <p:childTnLst>
+                                    <p:set>
+                                      <p:cBhvr>
+                                        <p:cTn id="26" dur="1" fill="hold">
+                                          <p:stCondLst>
+                                            <p:cond delay="0"/>
+                                          </p:stCondLst>
+                                        </p:cTn>
+                                        <p:tgtEl>
+                                          <p:spTgt spid="3">
+                                            <p:txEl>
+                                              <p:pRg st="7" end="7"/>
                                             </p:txEl>
                                           </p:spTgt>
                                         </p:tgtEl>
@@ -21946,7 +22297,7 @@
                 </a:pPr>
                 <a:r>
                   <a:rPr lang="en-US" dirty="0"/>
-                  <a:t>Posterior predictive checks show the update hieratical model is a good fit</a:t>
+                  <a:t>Posterior predictive checks show the update hieratical model is a generally good fit</a:t>
                 </a:r>
               </a:p>
               <a:p>
@@ -21966,14 +22317,8 @@
                 </a:pPr>
                 <a:r>
                   <a:rPr lang="en-US" dirty="0"/>
-                  <a:t>The Bayesian p-value some systematic bias with respect to the ideal distribution </a:t>
+                  <a:t>The </a:t>
                 </a:r>
-              </a:p>
-              <a:p>
-                <a:pPr>
-                  <a:buFont typeface="Arial" panose="020B0604020202020204" pitchFamily="34" charset="0"/>
-                  <a:buChar char="•"/>
-                </a:pPr>
                 <a14:m>
                   <m:oMath xmlns:m="http://schemas.openxmlformats.org/officeDocument/2006/math">
                     <m:r>
@@ -21994,7 +22339,17 @@
                 </a14:m>
                 <a:r>
                   <a:rPr lang="en-US" dirty="0"/>
-                  <a:t> distribution is skewed with respect to the observed   </a:t>
+                  <a:t> some systematic bias with respect to the ideal distribution </a:t>
+                </a:r>
+              </a:p>
+              <a:p>
+                <a:pPr>
+                  <a:buFont typeface="Arial" panose="020B0604020202020204" pitchFamily="34" charset="0"/>
+                  <a:buChar char="•"/>
+                </a:pPr>
+                <a:r>
+                  <a:rPr lang="en-US" dirty="0"/>
+                  <a:t>Sampled mean distribution is skewed with respect to the observed   </a:t>
                 </a:r>
               </a:p>
               <a:p>
@@ -22141,6 +22496,33 @@
                                   </p:childTnLst>
                                 </p:cTn>
                               </p:par>
+                              <p:par>
+                                <p:cTn id="7" presetID="1" presetClass="entr" presetSubtype="0" fill="hold" nodeType="withEffect">
+                                  <p:stCondLst>
+                                    <p:cond delay="0"/>
+                                  </p:stCondLst>
+                                  <p:childTnLst>
+                                    <p:set>
+                                      <p:cBhvr>
+                                        <p:cTn id="8" dur="1" fill="hold">
+                                          <p:stCondLst>
+                                            <p:cond delay="0"/>
+                                          </p:stCondLst>
+                                        </p:cTn>
+                                        <p:tgtEl>
+                                          <p:spTgt spid="5"/>
+                                        </p:tgtEl>
+                                        <p:attrNameLst>
+                                          <p:attrName>style.visibility</p:attrName>
+                                        </p:attrNameLst>
+                                      </p:cBhvr>
+                                      <p:to>
+                                        <p:strVal val="visible"/>
+                                      </p:to>
+                                    </p:set>
+                                  </p:childTnLst>
+                                </p:cTn>
+                              </p:par>
                             </p:childTnLst>
                           </p:cTn>
                         </p:par>
@@ -22148,26 +22530,26 @@
                     </p:cTn>
                   </p:par>
                   <p:par>
-                    <p:cTn id="7" fill="hold">
+                    <p:cTn id="9" fill="hold">
                       <p:stCondLst>
                         <p:cond delay="indefinite"/>
                       </p:stCondLst>
                       <p:childTnLst>
                         <p:par>
-                          <p:cTn id="8" fill="hold">
+                          <p:cTn id="10" fill="hold">
                             <p:stCondLst>
                               <p:cond delay="0"/>
                             </p:stCondLst>
                             <p:childTnLst>
                               <p:par>
-                                <p:cTn id="9" presetID="1" presetClass="entr" presetSubtype="0" fill="hold" nodeType="clickEffect">
+                                <p:cTn id="11" presetID="1" presetClass="entr" presetSubtype="0" fill="hold" nodeType="clickEffect">
                                   <p:stCondLst>
                                     <p:cond delay="0"/>
                                   </p:stCondLst>
                                   <p:childTnLst>
                                     <p:set>
                                       <p:cBhvr>
-                                        <p:cTn id="10" dur="1" fill="hold">
+                                        <p:cTn id="12" dur="1" fill="hold">
                                           <p:stCondLst>
                                             <p:cond delay="0"/>
                                           </p:stCondLst>
@@ -22197,26 +22579,26 @@
                     </p:cTn>
                   </p:par>
                   <p:par>
-                    <p:cTn id="11" fill="hold">
+                    <p:cTn id="13" fill="hold">
                       <p:stCondLst>
                         <p:cond delay="indefinite"/>
                       </p:stCondLst>
                       <p:childTnLst>
                         <p:par>
-                          <p:cTn id="12" fill="hold">
+                          <p:cTn id="14" fill="hold">
                             <p:stCondLst>
                               <p:cond delay="0"/>
                             </p:stCondLst>
                             <p:childTnLst>
                               <p:par>
-                                <p:cTn id="13" presetID="1" presetClass="entr" presetSubtype="0" fill="hold" nodeType="clickEffect">
+                                <p:cTn id="15" presetID="1" presetClass="entr" presetSubtype="0" fill="hold" nodeType="clickEffect">
                                   <p:stCondLst>
                                     <p:cond delay="0"/>
                                   </p:stCondLst>
                                   <p:childTnLst>
                                     <p:set>
                                       <p:cBhvr>
-                                        <p:cTn id="14" dur="1" fill="hold">
+                                        <p:cTn id="16" dur="1" fill="hold">
                                           <p:stCondLst>
                                             <p:cond delay="0"/>
                                           </p:stCondLst>
@@ -22595,6 +22977,183 @@
   <p:clrMapOvr>
     <a:masterClrMapping/>
   </p:clrMapOvr>
+  <p:timing>
+    <p:tnLst>
+      <p:par>
+        <p:cTn id="1" dur="indefinite" restart="never" nodeType="tmRoot">
+          <p:childTnLst>
+            <p:seq concurrent="1" nextAc="seek">
+              <p:cTn id="2" dur="indefinite" nodeType="mainSeq">
+                <p:childTnLst>
+                  <p:par>
+                    <p:cTn id="3" fill="hold">
+                      <p:stCondLst>
+                        <p:cond delay="indefinite"/>
+                      </p:stCondLst>
+                      <p:childTnLst>
+                        <p:par>
+                          <p:cTn id="4" fill="hold">
+                            <p:stCondLst>
+                              <p:cond delay="0"/>
+                            </p:stCondLst>
+                            <p:childTnLst>
+                              <p:par>
+                                <p:cTn id="5" presetID="1" presetClass="entr" presetSubtype="0" fill="hold" nodeType="clickEffect">
+                                  <p:stCondLst>
+                                    <p:cond delay="0"/>
+                                  </p:stCondLst>
+                                  <p:childTnLst>
+                                    <p:set>
+                                      <p:cBhvr>
+                                        <p:cTn id="6" dur="1" fill="hold">
+                                          <p:stCondLst>
+                                            <p:cond delay="0"/>
+                                          </p:stCondLst>
+                                        </p:cTn>
+                                        <p:tgtEl>
+                                          <p:spTgt spid="5">
+                                            <p:txEl>
+                                              <p:pRg st="1" end="1"/>
+                                            </p:txEl>
+                                          </p:spTgt>
+                                        </p:tgtEl>
+                                        <p:attrNameLst>
+                                          <p:attrName>style.visibility</p:attrName>
+                                        </p:attrNameLst>
+                                      </p:cBhvr>
+                                      <p:to>
+                                        <p:strVal val="visible"/>
+                                      </p:to>
+                                    </p:set>
+                                  </p:childTnLst>
+                                </p:cTn>
+                              </p:par>
+                            </p:childTnLst>
+                          </p:cTn>
+                        </p:par>
+                      </p:childTnLst>
+                    </p:cTn>
+                  </p:par>
+                  <p:par>
+                    <p:cTn id="7" fill="hold">
+                      <p:stCondLst>
+                        <p:cond delay="indefinite"/>
+                      </p:stCondLst>
+                      <p:childTnLst>
+                        <p:par>
+                          <p:cTn id="8" fill="hold">
+                            <p:stCondLst>
+                              <p:cond delay="0"/>
+                            </p:stCondLst>
+                            <p:childTnLst>
+                              <p:par>
+                                <p:cTn id="9" presetID="1" presetClass="entr" presetSubtype="0" fill="hold" nodeType="clickEffect">
+                                  <p:stCondLst>
+                                    <p:cond delay="0"/>
+                                  </p:stCondLst>
+                                  <p:childTnLst>
+                                    <p:set>
+                                      <p:cBhvr>
+                                        <p:cTn id="10" dur="1" fill="hold">
+                                          <p:stCondLst>
+                                            <p:cond delay="0"/>
+                                          </p:stCondLst>
+                                        </p:cTn>
+                                        <p:tgtEl>
+                                          <p:spTgt spid="5">
+                                            <p:txEl>
+                                              <p:pRg st="2" end="2"/>
+                                            </p:txEl>
+                                          </p:spTgt>
+                                        </p:tgtEl>
+                                        <p:attrNameLst>
+                                          <p:attrName>style.visibility</p:attrName>
+                                        </p:attrNameLst>
+                                      </p:cBhvr>
+                                      <p:to>
+                                        <p:strVal val="visible"/>
+                                      </p:to>
+                                    </p:set>
+                                  </p:childTnLst>
+                                </p:cTn>
+                              </p:par>
+                            </p:childTnLst>
+                          </p:cTn>
+                        </p:par>
+                      </p:childTnLst>
+                    </p:cTn>
+                  </p:par>
+                  <p:par>
+                    <p:cTn id="11" fill="hold">
+                      <p:stCondLst>
+                        <p:cond delay="indefinite"/>
+                      </p:stCondLst>
+                      <p:childTnLst>
+                        <p:par>
+                          <p:cTn id="12" fill="hold">
+                            <p:stCondLst>
+                              <p:cond delay="0"/>
+                            </p:stCondLst>
+                            <p:childTnLst>
+                              <p:par>
+                                <p:cTn id="13" presetID="1" presetClass="entr" presetSubtype="0" fill="hold" nodeType="clickEffect">
+                                  <p:stCondLst>
+                                    <p:cond delay="0"/>
+                                  </p:stCondLst>
+                                  <p:childTnLst>
+                                    <p:set>
+                                      <p:cBhvr>
+                                        <p:cTn id="14" dur="1" fill="hold">
+                                          <p:stCondLst>
+                                            <p:cond delay="0"/>
+                                          </p:stCondLst>
+                                        </p:cTn>
+                                        <p:tgtEl>
+                                          <p:spTgt spid="5">
+                                            <p:txEl>
+                                              <p:pRg st="3" end="3"/>
+                                            </p:txEl>
+                                          </p:spTgt>
+                                        </p:tgtEl>
+                                        <p:attrNameLst>
+                                          <p:attrName>style.visibility</p:attrName>
+                                        </p:attrNameLst>
+                                      </p:cBhvr>
+                                      <p:to>
+                                        <p:strVal val="visible"/>
+                                      </p:to>
+                                    </p:set>
+                                  </p:childTnLst>
+                                </p:cTn>
+                              </p:par>
+                            </p:childTnLst>
+                          </p:cTn>
+                        </p:par>
+                      </p:childTnLst>
+                    </p:cTn>
+                  </p:par>
+                </p:childTnLst>
+              </p:cTn>
+              <p:prevCondLst>
+                <p:cond evt="onPrev" delay="0">
+                  <p:tgtEl>
+                    <p:sldTgt/>
+                  </p:tgtEl>
+                </p:cond>
+              </p:prevCondLst>
+              <p:nextCondLst>
+                <p:cond evt="onNext" delay="0">
+                  <p:tgtEl>
+                    <p:sldTgt/>
+                  </p:tgtEl>
+                </p:cond>
+              </p:nextCondLst>
+            </p:seq>
+          </p:childTnLst>
+        </p:cTn>
+      </p:par>
+    </p:tnLst>
+  </p:timing>
 </p:sld>
 </file>
 
@@ -22879,6 +23438,134 @@
   <p:clrMapOvr>
     <a:masterClrMapping/>
   </p:clrMapOvr>
+  <p:timing>
+    <p:tnLst>
+      <p:par>
+        <p:cTn id="1" dur="indefinite" restart="never" nodeType="tmRoot">
+          <p:childTnLst>
+            <p:seq concurrent="1" nextAc="seek">
+              <p:cTn id="2" dur="indefinite" nodeType="mainSeq">
+                <p:childTnLst>
+                  <p:par>
+                    <p:cTn id="3" fill="hold">
+                      <p:stCondLst>
+                        <p:cond delay="indefinite"/>
+                      </p:stCondLst>
+                      <p:childTnLst>
+                        <p:par>
+                          <p:cTn id="4" fill="hold">
+                            <p:stCondLst>
+                              <p:cond delay="0"/>
+                            </p:stCondLst>
+                            <p:childTnLst>
+                              <p:par>
+                                <p:cTn id="5" presetID="1" presetClass="entr" presetSubtype="0" fill="hold" nodeType="clickEffect">
+                                  <p:stCondLst>
+                                    <p:cond delay="0"/>
+                                  </p:stCondLst>
+                                  <p:childTnLst>
+                                    <p:set>
+                                      <p:cBhvr>
+                                        <p:cTn id="6" dur="1" fill="hold">
+                                          <p:stCondLst>
+                                            <p:cond delay="0"/>
+                                          </p:stCondLst>
+                                        </p:cTn>
+                                        <p:tgtEl>
+                                          <p:spTgt spid="5">
+                                            <p:txEl>
+                                              <p:pRg st="1" end="1"/>
+                                            </p:txEl>
+                                          </p:spTgt>
+                                        </p:tgtEl>
+                                        <p:attrNameLst>
+                                          <p:attrName>style.visibility</p:attrName>
+                                        </p:attrNameLst>
+                                      </p:cBhvr>
+                                      <p:to>
+                                        <p:strVal val="visible"/>
+                                      </p:to>
+                                    </p:set>
+                                  </p:childTnLst>
+                                </p:cTn>
+                              </p:par>
+                            </p:childTnLst>
+                          </p:cTn>
+                        </p:par>
+                      </p:childTnLst>
+                    </p:cTn>
+                  </p:par>
+                  <p:par>
+                    <p:cTn id="7" fill="hold">
+                      <p:stCondLst>
+                        <p:cond delay="indefinite"/>
+                      </p:stCondLst>
+                      <p:childTnLst>
+                        <p:par>
+                          <p:cTn id="8" fill="hold">
+                            <p:stCondLst>
+                              <p:cond delay="0"/>
+                            </p:stCondLst>
+                            <p:childTnLst>
+                              <p:par>
+                                <p:cTn id="9" presetID="1" presetClass="entr" presetSubtype="0" fill="hold" nodeType="clickEffect">
+                                  <p:stCondLst>
+                                    <p:cond delay="0"/>
+                                  </p:stCondLst>
+                                  <p:childTnLst>
+                                    <p:set>
+                                      <p:cBhvr>
+                                        <p:cTn id="10" dur="1" fill="hold">
+                                          <p:stCondLst>
+                                            <p:cond delay="0"/>
+                                          </p:stCondLst>
+                                        </p:cTn>
+                                        <p:tgtEl>
+                                          <p:spTgt spid="5">
+                                            <p:txEl>
+                                              <p:pRg st="2" end="2"/>
+                                            </p:txEl>
+                                          </p:spTgt>
+                                        </p:tgtEl>
+                                        <p:attrNameLst>
+                                          <p:attrName>style.visibility</p:attrName>
+                                        </p:attrNameLst>
+                                      </p:cBhvr>
+                                      <p:to>
+                                        <p:strVal val="visible"/>
+                                      </p:to>
+                                    </p:set>
+                                  </p:childTnLst>
+                                </p:cTn>
+                              </p:par>
+                            </p:childTnLst>
+                          </p:cTn>
+                        </p:par>
+                      </p:childTnLst>
+                    </p:cTn>
+                  </p:par>
+                </p:childTnLst>
+              </p:cTn>
+              <p:prevCondLst>
+                <p:cond evt="onPrev" delay="0">
+                  <p:tgtEl>
+                    <p:sldTgt/>
+                  </p:tgtEl>
+                </p:cond>
+              </p:prevCondLst>
+              <p:nextCondLst>
+                <p:cond evt="onNext" delay="0">
+                  <p:tgtEl>
+                    <p:sldTgt/>
+                  </p:tgtEl>
+                </p:cond>
+              </p:nextCondLst>
+            </p:seq>
+          </p:childTnLst>
+        </p:cTn>
+      </p:par>
+    </p:tnLst>
+  </p:timing>
 </p:sld>
 </file>
 
@@ -23416,8 +24103,8 @@
           </a:p>
         </p:txBody>
       </p:sp>
-      <mc:AlternateContent xmlns:mc="http://schemas.openxmlformats.org/markup-compatibility/2006" xmlns:a14="http://schemas.microsoft.com/office/drawing/2010/main">
-        <mc:Choice Requires="a14">
+      <mc:AlternateContent xmlns:mc="http://schemas.openxmlformats.org/markup-compatibility/2006">
+        <mc:Choice xmlns:a14="http://schemas.microsoft.com/office/drawing/2010/main" Requires="a14">
           <p:sp>
             <p:nvSpPr>
               <p:cNvPr id="3" name="Content Placeholder 2">
@@ -23442,7 +24129,7 @@
             </p:spPr>
             <p:txBody>
               <a:bodyPr>
-                <a:normAutofit fontScale="77500" lnSpcReduction="20000"/>
+                <a:normAutofit fontScale="85000" lnSpcReduction="20000"/>
               </a:bodyPr>
               <a:lstStyle/>
               <a:p>
@@ -24001,6 +24688,96 @@
                 <a14:m>
                   <m:oMath xmlns:m="http://schemas.openxmlformats.org/officeDocument/2006/math">
                     <m:r>
+                      <a:rPr lang="en-US" i="1">
+                        <a:latin typeface="Cambria Math" panose="02040503050406030204" pitchFamily="18" charset="0"/>
+                      </a:rPr>
+                      <m:t>𝑝</m:t>
+                    </m:r>
+                    <m:d>
+                      <m:dPr>
+                        <m:ctrlPr>
+                          <a:rPr lang="en-US" i="1">
+                            <a:latin typeface="Cambria Math" panose="02040503050406030204" pitchFamily="18" charset="0"/>
+                            <a:ea typeface="Cambria Math" panose="02040503050406030204" pitchFamily="18" charset="0"/>
+                          </a:rPr>
+                        </m:ctrlPr>
+                      </m:dPr>
+                      <m:e>
+                        <m:r>
+                          <a:rPr lang="en-US" i="1">
+                            <a:latin typeface="Cambria Math" panose="02040503050406030204" pitchFamily="18" charset="0"/>
+                            <a:ea typeface="Cambria Math" panose="02040503050406030204" pitchFamily="18" charset="0"/>
+                          </a:rPr>
+                          <m:t>𝜃</m:t>
+                        </m:r>
+                        <m:r>
+                          <a:rPr lang="en-US" i="1">
+                            <a:latin typeface="Cambria Math" panose="02040503050406030204" pitchFamily="18" charset="0"/>
+                            <a:ea typeface="Cambria Math" panose="02040503050406030204" pitchFamily="18" charset="0"/>
+                          </a:rPr>
+                          <m:t> | </m:t>
+                        </m:r>
+                        <m:sSub>
+                          <m:sSubPr>
+                            <m:ctrlPr>
+                              <a:rPr lang="en-US" i="1">
+                                <a:latin typeface="Cambria Math" panose="02040503050406030204" pitchFamily="18" charset="0"/>
+                                <a:ea typeface="Cambria Math" panose="02040503050406030204" pitchFamily="18" charset="0"/>
+                              </a:rPr>
+                            </m:ctrlPr>
+                          </m:sSubPr>
+                          <m:e>
+                            <m:r>
+                              <a:rPr lang="en-US" i="1">
+                                <a:latin typeface="Cambria Math" panose="02040503050406030204" pitchFamily="18" charset="0"/>
+                                <a:ea typeface="Cambria Math" panose="02040503050406030204" pitchFamily="18" charset="0"/>
+                              </a:rPr>
+                              <m:t>𝑦</m:t>
+                            </m:r>
+                          </m:e>
+                          <m:sub>
+                            <m:r>
+                              <a:rPr lang="en-US" i="1">
+                                <a:latin typeface="Cambria Math" panose="02040503050406030204" pitchFamily="18" charset="0"/>
+                                <a:ea typeface="Cambria Math" panose="02040503050406030204" pitchFamily="18" charset="0"/>
+                              </a:rPr>
+                              <m:t>−</m:t>
+                            </m:r>
+                            <m:r>
+                              <a:rPr lang="en-US" i="1">
+                                <a:latin typeface="Cambria Math" panose="02040503050406030204" pitchFamily="18" charset="0"/>
+                                <a:ea typeface="Cambria Math" panose="02040503050406030204" pitchFamily="18" charset="0"/>
+                              </a:rPr>
+                              <m:t>𝑖</m:t>
+                            </m:r>
+                          </m:sub>
+                        </m:sSub>
+                      </m:e>
+                    </m:d>
+                    <m:r>
+                      <a:rPr lang="en-US" i="1">
+                        <a:latin typeface="Cambria Math" panose="02040503050406030204" pitchFamily="18" charset="0"/>
+                        <a:ea typeface="Cambria Math" panose="02040503050406030204" pitchFamily="18" charset="0"/>
+                      </a:rPr>
+                      <m:t>=</m:t>
+                    </m:r>
+                  </m:oMath>
+                </a14:m>
+                <a:r>
+                  <a:rPr lang="en-US" dirty="0"/>
+                  <a:t> LOO posterior density computed without the </a:t>
+                </a:r>
+                <a:r>
+                  <a:rPr lang="en-US" i="1" dirty="0" err="1"/>
+                  <a:t>ith</a:t>
+                </a:r>
+                <a:r>
+                  <a:rPr lang="en-US" dirty="0"/>
+                  <a:t> observation </a:t>
+                </a:r>
+                <a14:m>
+                  <m:oMath xmlns:m="http://schemas.openxmlformats.org/officeDocument/2006/math">
+                    <m:r>
                       <a:rPr lang="en-US" b="0" i="1" smtClean="0">
                         <a:latin typeface="Cambria Math" panose="02040503050406030204" pitchFamily="18" charset="0"/>
                       </a:rPr>
@@ -24126,102 +24903,7 @@
                 </a14:m>
                 <a:r>
                   <a:rPr lang="en-US" dirty="0"/>
-                  <a:t> </a:t>
-                </a:r>
-              </a:p>
-              <a:p>
-                <a:pPr marL="342900" lvl="1" indent="0">
-                  <a:buNone/>
-                </a:pPr>
-                <a14:m>
-                  <m:oMath xmlns:m="http://schemas.openxmlformats.org/officeDocument/2006/math">
-                    <m:r>
-                      <a:rPr lang="en-US" b="0" i="1" smtClean="0">
-                        <a:latin typeface="Cambria Math" panose="02040503050406030204" pitchFamily="18" charset="0"/>
-                      </a:rPr>
-                      <m:t>𝑝</m:t>
-                    </m:r>
-                    <m:d>
-                      <m:dPr>
-                        <m:ctrlPr>
-                          <a:rPr lang="en-US" b="0" i="1" smtClean="0">
-                            <a:latin typeface="Cambria Math" panose="02040503050406030204" pitchFamily="18" charset="0"/>
-                            <a:ea typeface="Cambria Math" panose="02040503050406030204" pitchFamily="18" charset="0"/>
-                          </a:rPr>
-                        </m:ctrlPr>
-                      </m:dPr>
-                      <m:e>
-                        <m:r>
-                          <a:rPr lang="en-US" b="0" i="1" smtClean="0">
-                            <a:latin typeface="Cambria Math" panose="02040503050406030204" pitchFamily="18" charset="0"/>
-                            <a:ea typeface="Cambria Math" panose="02040503050406030204" pitchFamily="18" charset="0"/>
-                          </a:rPr>
-                          <m:t>𝜃</m:t>
-                        </m:r>
-                        <m:r>
-                          <a:rPr lang="en-US" b="0" i="1" smtClean="0">
-                            <a:latin typeface="Cambria Math" panose="02040503050406030204" pitchFamily="18" charset="0"/>
-                            <a:ea typeface="Cambria Math" panose="02040503050406030204" pitchFamily="18" charset="0"/>
-                          </a:rPr>
-                          <m:t> | </m:t>
-                        </m:r>
-                        <m:sSub>
-                          <m:sSubPr>
-                            <m:ctrlPr>
-                              <a:rPr lang="en-US" b="0" i="1" smtClean="0">
-                                <a:latin typeface="Cambria Math" panose="02040503050406030204" pitchFamily="18" charset="0"/>
-                                <a:ea typeface="Cambria Math" panose="02040503050406030204" pitchFamily="18" charset="0"/>
-                              </a:rPr>
-                            </m:ctrlPr>
-                          </m:sSubPr>
-                          <m:e>
-                            <m:r>
-                              <a:rPr lang="en-US" b="0" i="1" smtClean="0">
-                                <a:latin typeface="Cambria Math" panose="02040503050406030204" pitchFamily="18" charset="0"/>
-                                <a:ea typeface="Cambria Math" panose="02040503050406030204" pitchFamily="18" charset="0"/>
-                              </a:rPr>
-                              <m:t>𝑦</m:t>
-                            </m:r>
-                          </m:e>
-                          <m:sub>
-                            <m:r>
-                              <a:rPr lang="en-US" b="0" i="1" smtClean="0">
-                                <a:latin typeface="Cambria Math" panose="02040503050406030204" pitchFamily="18" charset="0"/>
-                                <a:ea typeface="Cambria Math" panose="02040503050406030204" pitchFamily="18" charset="0"/>
-                              </a:rPr>
-                              <m:t>−</m:t>
-                            </m:r>
-                            <m:r>
-                              <a:rPr lang="en-US" b="0" i="1" smtClean="0">
-                                <a:latin typeface="Cambria Math" panose="02040503050406030204" pitchFamily="18" charset="0"/>
-                                <a:ea typeface="Cambria Math" panose="02040503050406030204" pitchFamily="18" charset="0"/>
-                              </a:rPr>
-                              <m:t>𝑖</m:t>
-                            </m:r>
-                          </m:sub>
-                        </m:sSub>
-                      </m:e>
-                    </m:d>
-                    <m:r>
-                      <a:rPr lang="en-US" b="0" i="1" smtClean="0">
-                        <a:latin typeface="Cambria Math" panose="02040503050406030204" pitchFamily="18" charset="0"/>
-                        <a:ea typeface="Cambria Math" panose="02040503050406030204" pitchFamily="18" charset="0"/>
-                      </a:rPr>
-                      <m:t>=</m:t>
-                    </m:r>
-                  </m:oMath>
-                </a14:m>
-                <a:r>
-                  <a:rPr lang="en-US" dirty="0"/>
-                  <a:t> LOO posterior density computed without the </a:t>
-                </a:r>
-                <a:r>
-                  <a:rPr lang="en-US" i="1" dirty="0" err="1"/>
-                  <a:t>ith</a:t>
-                </a:r>
-                <a:r>
-                  <a:rPr lang="en-US" dirty="0"/>
-                  <a:t> observation </a:t>
+                  <a:t>  </a:t>
                 </a:r>
               </a:p>
               <a:p>
@@ -24239,7 +24921,7 @@
             </p:txBody>
           </p:sp>
         </mc:Choice>
-        <mc:Fallback xmlns="">
+        <mc:Fallback>
           <p:sp>
             <p:nvSpPr>
               <p:cNvPr id="3" name="Content Placeholder 2">
@@ -24264,7 +24946,7 @@
               <a:blipFill>
                 <a:blip r:embed="rId2"/>
                 <a:stretch>
-                  <a:fillRect l="-667" t="-2124"/>
+                  <a:fillRect l="-741" t="-2288" b="-1961"/>
                 </a:stretch>
               </a:blipFill>
             </p:spPr>
@@ -24614,37 +25296,6 @@
                                           <p:spTgt spid="3">
                                             <p:txEl>
                                               <p:pRg st="9" end="9"/>
-                                            </p:txEl>
-                                          </p:spTgt>
-                                        </p:tgtEl>
-                                        <p:attrNameLst>
-                                          <p:attrName>style.visibility</p:attrName>
-                                        </p:attrNameLst>
-                                      </p:cBhvr>
-                                      <p:to>
-                                        <p:strVal val="visible"/>
-                                      </p:to>
-                                    </p:set>
-                                  </p:childTnLst>
-                                </p:cTn>
-                              </p:par>
-                              <p:par>
-                                <p:cTn id="27" presetID="1" presetClass="entr" presetSubtype="0" fill="hold" nodeType="withEffect">
-                                  <p:stCondLst>
-                                    <p:cond delay="0"/>
-                                  </p:stCondLst>
-                                  <p:childTnLst>
-                                    <p:set>
-                                      <p:cBhvr>
-                                        <p:cTn id="28" dur="1" fill="hold">
-                                          <p:stCondLst>
-                                            <p:cond delay="0"/>
-                                          </p:stCondLst>
-                                        </p:cTn>
-                                        <p:tgtEl>
-                                          <p:spTgt spid="3">
-                                            <p:txEl>
-                                              <p:pRg st="10" end="10"/>
                                             </p:txEl>
                                           </p:spTgt>
                                         </p:tgtEl>
@@ -25779,6 +26430,356 @@
   <p:clrMapOvr>
     <a:masterClrMapping/>
   </p:clrMapOvr>
+  <p:timing>
+    <p:tnLst>
+      <p:par>
+        <p:cTn id="1" dur="indefinite" restart="never" nodeType="tmRoot">
+          <p:childTnLst>
+            <p:seq concurrent="1" nextAc="seek">
+              <p:cTn id="2" dur="indefinite" nodeType="mainSeq">
+                <p:childTnLst>
+                  <p:par>
+                    <p:cTn id="3" fill="hold">
+                      <p:stCondLst>
+                        <p:cond delay="indefinite"/>
+                      </p:stCondLst>
+                      <p:childTnLst>
+                        <p:par>
+                          <p:cTn id="4" fill="hold">
+                            <p:stCondLst>
+                              <p:cond delay="0"/>
+                            </p:stCondLst>
+                            <p:childTnLst>
+                              <p:par>
+                                <p:cTn id="5" presetID="1" presetClass="entr" presetSubtype="0" fill="hold" nodeType="clickEffect">
+                                  <p:stCondLst>
+                                    <p:cond delay="0"/>
+                                  </p:stCondLst>
+                                  <p:childTnLst>
+                                    <p:set>
+                                      <p:cBhvr>
+                                        <p:cTn id="6" dur="1" fill="hold">
+                                          <p:stCondLst>
+                                            <p:cond delay="0"/>
+                                          </p:stCondLst>
+                                        </p:cTn>
+                                        <p:tgtEl>
+                                          <p:spTgt spid="3">
+                                            <p:txEl>
+                                              <p:pRg st="1" end="1"/>
+                                            </p:txEl>
+                                          </p:spTgt>
+                                        </p:tgtEl>
+                                        <p:attrNameLst>
+                                          <p:attrName>style.visibility</p:attrName>
+                                        </p:attrNameLst>
+                                      </p:cBhvr>
+                                      <p:to>
+                                        <p:strVal val="visible"/>
+                                      </p:to>
+                                    </p:set>
+                                  </p:childTnLst>
+                                </p:cTn>
+                              </p:par>
+                              <p:par>
+                                <p:cTn id="7" presetID="1" presetClass="entr" presetSubtype="0" fill="hold" nodeType="withEffect">
+                                  <p:stCondLst>
+                                    <p:cond delay="0"/>
+                                  </p:stCondLst>
+                                  <p:childTnLst>
+                                    <p:set>
+                                      <p:cBhvr>
+                                        <p:cTn id="8" dur="1" fill="hold">
+                                          <p:stCondLst>
+                                            <p:cond delay="0"/>
+                                          </p:stCondLst>
+                                        </p:cTn>
+                                        <p:tgtEl>
+                                          <p:spTgt spid="3">
+                                            <p:txEl>
+                                              <p:pRg st="2" end="2"/>
+                                            </p:txEl>
+                                          </p:spTgt>
+                                        </p:tgtEl>
+                                        <p:attrNameLst>
+                                          <p:attrName>style.visibility</p:attrName>
+                                        </p:attrNameLst>
+                                      </p:cBhvr>
+                                      <p:to>
+                                        <p:strVal val="visible"/>
+                                      </p:to>
+                                    </p:set>
+                                  </p:childTnLst>
+                                </p:cTn>
+                              </p:par>
+                            </p:childTnLst>
+                          </p:cTn>
+                        </p:par>
+                      </p:childTnLst>
+                    </p:cTn>
+                  </p:par>
+                  <p:par>
+                    <p:cTn id="9" fill="hold">
+                      <p:stCondLst>
+                        <p:cond delay="indefinite"/>
+                      </p:stCondLst>
+                      <p:childTnLst>
+                        <p:par>
+                          <p:cTn id="10" fill="hold">
+                            <p:stCondLst>
+                              <p:cond delay="0"/>
+                            </p:stCondLst>
+                            <p:childTnLst>
+                              <p:par>
+                                <p:cTn id="11" presetID="1" presetClass="entr" presetSubtype="0" fill="hold" nodeType="clickEffect">
+                                  <p:stCondLst>
+                                    <p:cond delay="0"/>
+                                  </p:stCondLst>
+                                  <p:childTnLst>
+                                    <p:set>
+                                      <p:cBhvr>
+                                        <p:cTn id="12" dur="1" fill="hold">
+                                          <p:stCondLst>
+                                            <p:cond delay="0"/>
+                                          </p:stCondLst>
+                                        </p:cTn>
+                                        <p:tgtEl>
+                                          <p:spTgt spid="3">
+                                            <p:txEl>
+                                              <p:pRg st="3" end="3"/>
+                                            </p:txEl>
+                                          </p:spTgt>
+                                        </p:tgtEl>
+                                        <p:attrNameLst>
+                                          <p:attrName>style.visibility</p:attrName>
+                                        </p:attrNameLst>
+                                      </p:cBhvr>
+                                      <p:to>
+                                        <p:strVal val="visible"/>
+                                      </p:to>
+                                    </p:set>
+                                  </p:childTnLst>
+                                </p:cTn>
+                              </p:par>
+                              <p:par>
+                                <p:cTn id="13" presetID="1" presetClass="entr" presetSubtype="0" fill="hold" nodeType="withEffect">
+                                  <p:stCondLst>
+                                    <p:cond delay="0"/>
+                                  </p:stCondLst>
+                                  <p:childTnLst>
+                                    <p:set>
+                                      <p:cBhvr>
+                                        <p:cTn id="14" dur="1" fill="hold">
+                                          <p:stCondLst>
+                                            <p:cond delay="0"/>
+                                          </p:stCondLst>
+                                        </p:cTn>
+                                        <p:tgtEl>
+                                          <p:spTgt spid="3">
+                                            <p:txEl>
+                                              <p:pRg st="4" end="4"/>
+                                            </p:txEl>
+                                          </p:spTgt>
+                                        </p:tgtEl>
+                                        <p:attrNameLst>
+                                          <p:attrName>style.visibility</p:attrName>
+                                        </p:attrNameLst>
+                                      </p:cBhvr>
+                                      <p:to>
+                                        <p:strVal val="visible"/>
+                                      </p:to>
+                                    </p:set>
+                                  </p:childTnLst>
+                                </p:cTn>
+                              </p:par>
+                            </p:childTnLst>
+                          </p:cTn>
+                        </p:par>
+                      </p:childTnLst>
+                    </p:cTn>
+                  </p:par>
+                  <p:par>
+                    <p:cTn id="15" fill="hold">
+                      <p:stCondLst>
+                        <p:cond delay="indefinite"/>
+                      </p:stCondLst>
+                      <p:childTnLst>
+                        <p:par>
+                          <p:cTn id="16" fill="hold">
+                            <p:stCondLst>
+                              <p:cond delay="0"/>
+                            </p:stCondLst>
+                            <p:childTnLst>
+                              <p:par>
+                                <p:cTn id="17" presetID="1" presetClass="entr" presetSubtype="0" fill="hold" nodeType="clickEffect">
+                                  <p:stCondLst>
+                                    <p:cond delay="0"/>
+                                  </p:stCondLst>
+                                  <p:childTnLst>
+                                    <p:set>
+                                      <p:cBhvr>
+                                        <p:cTn id="18" dur="1" fill="hold">
+                                          <p:stCondLst>
+                                            <p:cond delay="0"/>
+                                          </p:stCondLst>
+                                        </p:cTn>
+                                        <p:tgtEl>
+                                          <p:spTgt spid="3">
+                                            <p:txEl>
+                                              <p:pRg st="5" end="5"/>
+                                            </p:txEl>
+                                          </p:spTgt>
+                                        </p:tgtEl>
+                                        <p:attrNameLst>
+                                          <p:attrName>style.visibility</p:attrName>
+                                        </p:attrNameLst>
+                                      </p:cBhvr>
+                                      <p:to>
+                                        <p:strVal val="visible"/>
+                                      </p:to>
+                                    </p:set>
+                                  </p:childTnLst>
+                                </p:cTn>
+                              </p:par>
+                            </p:childTnLst>
+                          </p:cTn>
+                        </p:par>
+                      </p:childTnLst>
+                    </p:cTn>
+                  </p:par>
+                  <p:par>
+                    <p:cTn id="19" fill="hold">
+                      <p:stCondLst>
+                        <p:cond delay="indefinite"/>
+                      </p:stCondLst>
+                      <p:childTnLst>
+                        <p:par>
+                          <p:cTn id="20" fill="hold">
+                            <p:stCondLst>
+                              <p:cond delay="0"/>
+                            </p:stCondLst>
+                            <p:childTnLst>
+                              <p:par>
+                                <p:cTn id="21" presetID="1" presetClass="entr" presetSubtype="0" fill="hold" nodeType="clickEffect">
+                                  <p:stCondLst>
+                                    <p:cond delay="0"/>
+                                  </p:stCondLst>
+                                  <p:childTnLst>
+                                    <p:set>
+                                      <p:cBhvr>
+                                        <p:cTn id="22" dur="1" fill="hold">
+                                          <p:stCondLst>
+                                            <p:cond delay="0"/>
+                                          </p:stCondLst>
+                                        </p:cTn>
+                                        <p:tgtEl>
+                                          <p:spTgt spid="3">
+                                            <p:txEl>
+                                              <p:pRg st="6" end="6"/>
+                                            </p:txEl>
+                                          </p:spTgt>
+                                        </p:tgtEl>
+                                        <p:attrNameLst>
+                                          <p:attrName>style.visibility</p:attrName>
+                                        </p:attrNameLst>
+                                      </p:cBhvr>
+                                      <p:to>
+                                        <p:strVal val="visible"/>
+                                      </p:to>
+                                    </p:set>
+                                  </p:childTnLst>
+                                </p:cTn>
+                              </p:par>
+                              <p:par>
+                                <p:cTn id="23" presetID="1" presetClass="entr" presetSubtype="0" fill="hold" nodeType="withEffect">
+                                  <p:stCondLst>
+                                    <p:cond delay="0"/>
+                                  </p:stCondLst>
+                                  <p:childTnLst>
+                                    <p:set>
+                                      <p:cBhvr>
+                                        <p:cTn id="24" dur="1" fill="hold">
+                                          <p:stCondLst>
+                                            <p:cond delay="0"/>
+                                          </p:stCondLst>
+                                        </p:cTn>
+                                        <p:tgtEl>
+                                          <p:spTgt spid="3">
+                                            <p:txEl>
+                                              <p:pRg st="7" end="7"/>
+                                            </p:txEl>
+                                          </p:spTgt>
+                                        </p:tgtEl>
+                                        <p:attrNameLst>
+                                          <p:attrName>style.visibility</p:attrName>
+                                        </p:attrNameLst>
+                                      </p:cBhvr>
+                                      <p:to>
+                                        <p:strVal val="visible"/>
+                                      </p:to>
+                                    </p:set>
+                                  </p:childTnLst>
+                                </p:cTn>
+                              </p:par>
+                              <p:par>
+                                <p:cTn id="25" presetID="1" presetClass="entr" presetSubtype="0" fill="hold" nodeType="withEffect">
+                                  <p:stCondLst>
+                                    <p:cond delay="0"/>
+                                  </p:stCondLst>
+                                  <p:childTnLst>
+                                    <p:set>
+                                      <p:cBhvr>
+                                        <p:cTn id="26" dur="1" fill="hold">
+                                          <p:stCondLst>
+                                            <p:cond delay="0"/>
+                                          </p:stCondLst>
+                                        </p:cTn>
+                                        <p:tgtEl>
+                                          <p:spTgt spid="3">
+                                            <p:txEl>
+                                              <p:pRg st="8" end="8"/>
+                                            </p:txEl>
+                                          </p:spTgt>
+                                        </p:tgtEl>
+                                        <p:attrNameLst>
+                                          <p:attrName>style.visibility</p:attrName>
+                                        </p:attrNameLst>
+                                      </p:cBhvr>
+                                      <p:to>
+                                        <p:strVal val="visible"/>
+                                      </p:to>
+                                    </p:set>
+                                  </p:childTnLst>
+                                </p:cTn>
+                              </p:par>
+                            </p:childTnLst>
+                          </p:cTn>
+                        </p:par>
+                      </p:childTnLst>
+                    </p:cTn>
+                  </p:par>
+                </p:childTnLst>
+              </p:cTn>
+              <p:prevCondLst>
+                <p:cond evt="onPrev" delay="0">
+                  <p:tgtEl>
+                    <p:sldTgt/>
+                  </p:tgtEl>
+                </p:cond>
+              </p:prevCondLst>
+              <p:nextCondLst>
+                <p:cond evt="onNext" delay="0">
+                  <p:tgtEl>
+                    <p:sldTgt/>
+                  </p:tgtEl>
+                </p:cond>
+              </p:nextCondLst>
+            </p:seq>
+          </p:childTnLst>
+        </p:cTn>
+      </p:par>
+    </p:tnLst>
+  </p:timing>
 </p:sld>
 </file>
 
@@ -26488,6 +27489,428 @@
   <p:clrMapOvr>
     <a:masterClrMapping/>
   </p:clrMapOvr>
+  <p:timing>
+    <p:tnLst>
+      <p:par>
+        <p:cTn id="1" dur="indefinite" restart="never" nodeType="tmRoot">
+          <p:childTnLst>
+            <p:seq concurrent="1" nextAc="seek">
+              <p:cTn id="2" dur="indefinite" nodeType="mainSeq">
+                <p:childTnLst>
+                  <p:par>
+                    <p:cTn id="3" fill="hold">
+                      <p:stCondLst>
+                        <p:cond delay="indefinite"/>
+                      </p:stCondLst>
+                      <p:childTnLst>
+                        <p:par>
+                          <p:cTn id="4" fill="hold">
+                            <p:stCondLst>
+                              <p:cond delay="0"/>
+                            </p:stCondLst>
+                            <p:childTnLst>
+                              <p:par>
+                                <p:cTn id="5" presetID="1" presetClass="entr" presetSubtype="0" fill="hold" nodeType="clickEffect">
+                                  <p:stCondLst>
+                                    <p:cond delay="0"/>
+                                  </p:stCondLst>
+                                  <p:childTnLst>
+                                    <p:set>
+                                      <p:cBhvr>
+                                        <p:cTn id="6" dur="1" fill="hold">
+                                          <p:stCondLst>
+                                            <p:cond delay="0"/>
+                                          </p:stCondLst>
+                                        </p:cTn>
+                                        <p:tgtEl>
+                                          <p:spTgt spid="6">
+                                            <p:txEl>
+                                              <p:pRg st="0" end="0"/>
+                                            </p:txEl>
+                                          </p:spTgt>
+                                        </p:tgtEl>
+                                        <p:attrNameLst>
+                                          <p:attrName>style.visibility</p:attrName>
+                                        </p:attrNameLst>
+                                      </p:cBhvr>
+                                      <p:to>
+                                        <p:strVal val="visible"/>
+                                      </p:to>
+                                    </p:set>
+                                  </p:childTnLst>
+                                </p:cTn>
+                              </p:par>
+                            </p:childTnLst>
+                          </p:cTn>
+                        </p:par>
+                      </p:childTnLst>
+                    </p:cTn>
+                  </p:par>
+                  <p:par>
+                    <p:cTn id="7" fill="hold">
+                      <p:stCondLst>
+                        <p:cond delay="indefinite"/>
+                      </p:stCondLst>
+                      <p:childTnLst>
+                        <p:par>
+                          <p:cTn id="8" fill="hold">
+                            <p:stCondLst>
+                              <p:cond delay="0"/>
+                            </p:stCondLst>
+                            <p:childTnLst>
+                              <p:par>
+                                <p:cTn id="9" presetID="1" presetClass="entr" presetSubtype="0" fill="hold" nodeType="clickEffect">
+                                  <p:stCondLst>
+                                    <p:cond delay="0"/>
+                                  </p:stCondLst>
+                                  <p:childTnLst>
+                                    <p:set>
+                                      <p:cBhvr>
+                                        <p:cTn id="10" dur="1" fill="hold">
+                                          <p:stCondLst>
+                                            <p:cond delay="0"/>
+                                          </p:stCondLst>
+                                        </p:cTn>
+                                        <p:tgtEl>
+                                          <p:spTgt spid="6">
+                                            <p:txEl>
+                                              <p:pRg st="1" end="1"/>
+                                            </p:txEl>
+                                          </p:spTgt>
+                                        </p:tgtEl>
+                                        <p:attrNameLst>
+                                          <p:attrName>style.visibility</p:attrName>
+                                        </p:attrNameLst>
+                                      </p:cBhvr>
+                                      <p:to>
+                                        <p:strVal val="visible"/>
+                                      </p:to>
+                                    </p:set>
+                                  </p:childTnLst>
+                                </p:cTn>
+                              </p:par>
+                            </p:childTnLst>
+                          </p:cTn>
+                        </p:par>
+                      </p:childTnLst>
+                    </p:cTn>
+                  </p:par>
+                  <p:par>
+                    <p:cTn id="11" fill="hold">
+                      <p:stCondLst>
+                        <p:cond delay="indefinite"/>
+                      </p:stCondLst>
+                      <p:childTnLst>
+                        <p:par>
+                          <p:cTn id="12" fill="hold">
+                            <p:stCondLst>
+                              <p:cond delay="0"/>
+                            </p:stCondLst>
+                            <p:childTnLst>
+                              <p:par>
+                                <p:cTn id="13" presetID="1" presetClass="entr" presetSubtype="0" fill="hold" nodeType="clickEffect">
+                                  <p:stCondLst>
+                                    <p:cond delay="0"/>
+                                  </p:stCondLst>
+                                  <p:childTnLst>
+                                    <p:set>
+                                      <p:cBhvr>
+                                        <p:cTn id="14" dur="1" fill="hold">
+                                          <p:stCondLst>
+                                            <p:cond delay="0"/>
+                                          </p:stCondLst>
+                                        </p:cTn>
+                                        <p:tgtEl>
+                                          <p:spTgt spid="6">
+                                            <p:txEl>
+                                              <p:pRg st="2" end="2"/>
+                                            </p:txEl>
+                                          </p:spTgt>
+                                        </p:tgtEl>
+                                        <p:attrNameLst>
+                                          <p:attrName>style.visibility</p:attrName>
+                                        </p:attrNameLst>
+                                      </p:cBhvr>
+                                      <p:to>
+                                        <p:strVal val="visible"/>
+                                      </p:to>
+                                    </p:set>
+                                  </p:childTnLst>
+                                </p:cTn>
+                              </p:par>
+                            </p:childTnLst>
+                          </p:cTn>
+                        </p:par>
+                      </p:childTnLst>
+                    </p:cTn>
+                  </p:par>
+                  <p:par>
+                    <p:cTn id="15" fill="hold">
+                      <p:stCondLst>
+                        <p:cond delay="indefinite"/>
+                      </p:stCondLst>
+                      <p:childTnLst>
+                        <p:par>
+                          <p:cTn id="16" fill="hold">
+                            <p:stCondLst>
+                              <p:cond delay="0"/>
+                            </p:stCondLst>
+                            <p:childTnLst>
+                              <p:par>
+                                <p:cTn id="17" presetID="1" presetClass="entr" presetSubtype="0" fill="hold" nodeType="clickEffect">
+                                  <p:stCondLst>
+                                    <p:cond delay="0"/>
+                                  </p:stCondLst>
+                                  <p:childTnLst>
+                                    <p:set>
+                                      <p:cBhvr>
+                                        <p:cTn id="18" dur="1" fill="hold">
+                                          <p:stCondLst>
+                                            <p:cond delay="0"/>
+                                          </p:stCondLst>
+                                        </p:cTn>
+                                        <p:tgtEl>
+                                          <p:spTgt spid="6">
+                                            <p:txEl>
+                                              <p:pRg st="3" end="3"/>
+                                            </p:txEl>
+                                          </p:spTgt>
+                                        </p:tgtEl>
+                                        <p:attrNameLst>
+                                          <p:attrName>style.visibility</p:attrName>
+                                        </p:attrNameLst>
+                                      </p:cBhvr>
+                                      <p:to>
+                                        <p:strVal val="visible"/>
+                                      </p:to>
+                                    </p:set>
+                                  </p:childTnLst>
+                                </p:cTn>
+                              </p:par>
+                            </p:childTnLst>
+                          </p:cTn>
+                        </p:par>
+                      </p:childTnLst>
+                    </p:cTn>
+                  </p:par>
+                  <p:par>
+                    <p:cTn id="19" fill="hold">
+                      <p:stCondLst>
+                        <p:cond delay="indefinite"/>
+                      </p:stCondLst>
+                      <p:childTnLst>
+                        <p:par>
+                          <p:cTn id="20" fill="hold">
+                            <p:stCondLst>
+                              <p:cond delay="0"/>
+                            </p:stCondLst>
+                            <p:childTnLst>
+                              <p:par>
+                                <p:cTn id="21" presetID="1" presetClass="entr" presetSubtype="0" fill="hold" nodeType="clickEffect">
+                                  <p:stCondLst>
+                                    <p:cond delay="0"/>
+                                  </p:stCondLst>
+                                  <p:childTnLst>
+                                    <p:set>
+                                      <p:cBhvr>
+                                        <p:cTn id="22" dur="1" fill="hold">
+                                          <p:stCondLst>
+                                            <p:cond delay="0"/>
+                                          </p:stCondLst>
+                                        </p:cTn>
+                                        <p:tgtEl>
+                                          <p:spTgt spid="6">
+                                            <p:txEl>
+                                              <p:pRg st="4" end="4"/>
+                                            </p:txEl>
+                                          </p:spTgt>
+                                        </p:tgtEl>
+                                        <p:attrNameLst>
+                                          <p:attrName>style.visibility</p:attrName>
+                                        </p:attrNameLst>
+                                      </p:cBhvr>
+                                      <p:to>
+                                        <p:strVal val="visible"/>
+                                      </p:to>
+                                    </p:set>
+                                  </p:childTnLst>
+                                </p:cTn>
+                              </p:par>
+                            </p:childTnLst>
+                          </p:cTn>
+                        </p:par>
+                      </p:childTnLst>
+                    </p:cTn>
+                  </p:par>
+                  <p:par>
+                    <p:cTn id="23" fill="hold">
+                      <p:stCondLst>
+                        <p:cond delay="indefinite"/>
+                      </p:stCondLst>
+                      <p:childTnLst>
+                        <p:par>
+                          <p:cTn id="24" fill="hold">
+                            <p:stCondLst>
+                              <p:cond delay="0"/>
+                            </p:stCondLst>
+                            <p:childTnLst>
+                              <p:par>
+                                <p:cTn id="25" presetID="1" presetClass="entr" presetSubtype="0" fill="hold" nodeType="clickEffect">
+                                  <p:stCondLst>
+                                    <p:cond delay="0"/>
+                                  </p:stCondLst>
+                                  <p:childTnLst>
+                                    <p:set>
+                                      <p:cBhvr>
+                                        <p:cTn id="26" dur="1" fill="hold">
+                                          <p:stCondLst>
+                                            <p:cond delay="0"/>
+                                          </p:stCondLst>
+                                        </p:cTn>
+                                        <p:tgtEl>
+                                          <p:spTgt spid="6">
+                                            <p:txEl>
+                                              <p:pRg st="5" end="5"/>
+                                            </p:txEl>
+                                          </p:spTgt>
+                                        </p:tgtEl>
+                                        <p:attrNameLst>
+                                          <p:attrName>style.visibility</p:attrName>
+                                        </p:attrNameLst>
+                                      </p:cBhvr>
+                                      <p:to>
+                                        <p:strVal val="visible"/>
+                                      </p:to>
+                                    </p:set>
+                                  </p:childTnLst>
+                                </p:cTn>
+                              </p:par>
+                            </p:childTnLst>
+                          </p:cTn>
+                        </p:par>
+                      </p:childTnLst>
+                    </p:cTn>
+                  </p:par>
+                  <p:par>
+                    <p:cTn id="27" fill="hold">
+                      <p:stCondLst>
+                        <p:cond delay="indefinite"/>
+                      </p:stCondLst>
+                      <p:childTnLst>
+                        <p:par>
+                          <p:cTn id="28" fill="hold">
+                            <p:stCondLst>
+                              <p:cond delay="0"/>
+                            </p:stCondLst>
+                            <p:childTnLst>
+                              <p:par>
+                                <p:cTn id="29" presetID="1" presetClass="entr" presetSubtype="0" fill="hold" nodeType="clickEffect">
+                                  <p:stCondLst>
+                                    <p:cond delay="0"/>
+                                  </p:stCondLst>
+                                  <p:childTnLst>
+                                    <p:set>
+                                      <p:cBhvr>
+                                        <p:cTn id="30" dur="1" fill="hold">
+                                          <p:stCondLst>
+                                            <p:cond delay="0"/>
+                                          </p:stCondLst>
+                                        </p:cTn>
+                                        <p:tgtEl>
+                                          <p:spTgt spid="6">
+                                            <p:txEl>
+                                              <p:pRg st="6" end="6"/>
+                                            </p:txEl>
+                                          </p:spTgt>
+                                        </p:tgtEl>
+                                        <p:attrNameLst>
+                                          <p:attrName>style.visibility</p:attrName>
+                                        </p:attrNameLst>
+                                      </p:cBhvr>
+                                      <p:to>
+                                        <p:strVal val="visible"/>
+                                      </p:to>
+                                    </p:set>
+                                  </p:childTnLst>
+                                </p:cTn>
+                              </p:par>
+                            </p:childTnLst>
+                          </p:cTn>
+                        </p:par>
+                      </p:childTnLst>
+                    </p:cTn>
+                  </p:par>
+                  <p:par>
+                    <p:cTn id="31" fill="hold">
+                      <p:stCondLst>
+                        <p:cond delay="indefinite"/>
+                      </p:stCondLst>
+                      <p:childTnLst>
+                        <p:par>
+                          <p:cTn id="32" fill="hold">
+                            <p:stCondLst>
+                              <p:cond delay="0"/>
+                            </p:stCondLst>
+                            <p:childTnLst>
+                              <p:par>
+                                <p:cTn id="33" presetID="1" presetClass="entr" presetSubtype="0" fill="hold" nodeType="clickEffect">
+                                  <p:stCondLst>
+                                    <p:cond delay="0"/>
+                                  </p:stCondLst>
+                                  <p:childTnLst>
+                                    <p:set>
+                                      <p:cBhvr>
+                                        <p:cTn id="34" dur="1" fill="hold">
+                                          <p:stCondLst>
+                                            <p:cond delay="0"/>
+                                          </p:stCondLst>
+                                        </p:cTn>
+                                        <p:tgtEl>
+                                          <p:spTgt spid="6">
+                                            <p:txEl>
+                                              <p:pRg st="7" end="7"/>
+                                            </p:txEl>
+                                          </p:spTgt>
+                                        </p:tgtEl>
+                                        <p:attrNameLst>
+                                          <p:attrName>style.visibility</p:attrName>
+                                        </p:attrNameLst>
+                                      </p:cBhvr>
+                                      <p:to>
+                                        <p:strVal val="visible"/>
+                                      </p:to>
+                                    </p:set>
+                                  </p:childTnLst>
+                                </p:cTn>
+                              </p:par>
+                            </p:childTnLst>
+                          </p:cTn>
+                        </p:par>
+                      </p:childTnLst>
+                    </p:cTn>
+                  </p:par>
+                </p:childTnLst>
+              </p:cTn>
+              <p:prevCondLst>
+                <p:cond evt="onPrev" delay="0">
+                  <p:tgtEl>
+                    <p:sldTgt/>
+                  </p:tgtEl>
+                </p:cond>
+              </p:prevCondLst>
+              <p:nextCondLst>
+                <p:cond evt="onNext" delay="0">
+                  <p:tgtEl>
+                    <p:sldTgt/>
+                  </p:tgtEl>
+                </p:cond>
+              </p:nextCondLst>
+            </p:seq>
+          </p:childTnLst>
+        </p:cTn>
+      </p:par>
+    </p:tnLst>
+  </p:timing>
 </p:sld>
 </file>
 
@@ -26544,7 +27967,9 @@
         </p:nvSpPr>
         <p:spPr/>
         <p:txBody>
-          <a:bodyPr/>
+          <a:bodyPr>
+            <a:normAutofit fontScale="85000" lnSpcReduction="20000"/>
+          </a:bodyPr>
           <a:lstStyle/>
           <a:p>
             <a:pPr marL="0" lvl="0" indent="0">
@@ -26575,7 +28000,7 @@
             </a:r>
             <a:r>
               <a:rPr lang="en-US" dirty="0"/>
-              <a:t> using independent prior for each category</a:t>
+              <a:t> using independent prior for each category or strata</a:t>
             </a:r>
           </a:p>
           <a:p>
@@ -26590,14 +28015,14 @@
             </a:r>
             <a:r>
               <a:rPr lang="en-US" dirty="0"/>
-              <a:t> of observations within each category</a:t>
+              <a:t> of observations within each strata</a:t>
             </a:r>
           </a:p>
           <a:p>
             <a:pPr lvl="1"/>
             <a:r>
               <a:rPr lang="en-US" dirty="0"/>
-              <a:t>No exchangeability between categories  </a:t>
+              <a:t>No exchangeability between strata </a:t>
             </a:r>
             <a:endParaRPr dirty="0"/>
           </a:p>
@@ -26614,6 +28039,20 @@
               <a:rPr lang="en-US" dirty="0"/>
               <a:t>Leads to posterior distributions with wide dispersion </a:t>
             </a:r>
+          </a:p>
+          <a:p>
+            <a:pPr lvl="1"/>
+            <a:r>
+              <a:rPr lang="en-US" dirty="0"/>
+              <a:t>Large number of parameters</a:t>
+            </a:r>
+          </a:p>
+          <a:p>
+            <a:pPr lvl="1"/>
+            <a:r>
+              <a:rPr lang="en-US" dirty="0"/>
+              <a:t>Data per parameter is limited</a:t>
+            </a:r>
             <a:endParaRPr dirty="0"/>
           </a:p>
           <a:p>
@@ -26624,16 +28063,28 @@
             </a:r>
             <a:r>
               <a:rPr dirty="0"/>
-              <a:t> models ha</a:t>
+              <a:t> mode</a:t>
             </a:r>
             <a:r>
               <a:rPr lang="en-US" dirty="0"/>
-              <a:t>ve</a:t>
+              <a:t> are comprised of a </a:t>
             </a:r>
             <a:r>
               <a:rPr dirty="0"/>
-              <a:t> a flat structure</a:t>
-            </a:r>
+              <a:t>flat structure</a:t>
+            </a:r>
+            <a:r>
+              <a:rPr lang="en-US" dirty="0"/>
+              <a:t> model for each strata</a:t>
+            </a:r>
+          </a:p>
+          <a:p>
+            <a:pPr lvl="1"/>
+            <a:r>
+              <a:rPr lang="en-US" dirty="0"/>
+              <a:t>Common prior for all strata</a:t>
+            </a:r>
+            <a:endParaRPr dirty="0"/>
           </a:p>
         </p:txBody>
       </p:sp>
@@ -26853,26 +28304,39 @@
                                   </p:childTnLst>
                                 </p:cTn>
                               </p:par>
-                            </p:childTnLst>
-                          </p:cTn>
-                        </p:par>
-                      </p:childTnLst>
-                    </p:cTn>
-                  </p:par>
-                  <p:par>
-                    <p:cTn id="19" fill="hold">
-                      <p:stCondLst>
-                        <p:cond delay="indefinite"/>
-                      </p:stCondLst>
-                      <p:childTnLst>
-                        <p:par>
-                          <p:cTn id="20" fill="hold">
-                            <p:stCondLst>
-                              <p:cond delay="0"/>
-                            </p:stCondLst>
-                            <p:childTnLst>
                               <p:par>
-                                <p:cTn id="21" presetID="1" presetClass="entr" presetSubtype="0" fill="hold" nodeType="clickEffect">
+                                <p:cTn id="19" presetID="1" presetClass="entr" presetSubtype="0" fill="hold" nodeType="withEffect">
+                                  <p:stCondLst>
+                                    <p:cond delay="0"/>
+                                  </p:stCondLst>
+                                  <p:childTnLst>
+                                    <p:set>
+                                      <p:cBhvr>
+                                        <p:cTn id="20" dur="1" fill="hold">
+                                          <p:stCondLst>
+                                            <p:cond delay="0"/>
+                                          </p:stCondLst>
+                                        </p:cTn>
+                                        <p:tgtEl>
+                                          <p:spTgt spid="3">
+                                            <p:txEl>
+                                              <p:pRg st="6" end="6"/>
+                                            </p:txEl>
+                                          </p:spTgt>
+                                        </p:tgtEl>
+                                        <p:attrNameLst>
+                                          <p:attrName>style.visibility</p:attrName>
+                                        </p:attrNameLst>
+                                      </p:cBhvr>
+                                      <p:to>
+                                        <p:strVal val="visible"/>
+                                      </p:to>
+                                    </p:set>
+                                  </p:childTnLst>
+                                </p:cTn>
+                              </p:par>
+                              <p:par>
+                                <p:cTn id="21" presetID="1" presetClass="entr" presetSubtype="0" fill="hold" nodeType="withEffect">
                                   <p:stCondLst>
                                     <p:cond delay="0"/>
                                   </p:stCondLst>
@@ -26887,7 +28351,87 @@
                                         <p:tgtEl>
                                           <p:spTgt spid="3">
                                             <p:txEl>
-                                              <p:pRg st="6" end="6"/>
+                                              <p:pRg st="7" end="7"/>
+                                            </p:txEl>
+                                          </p:spTgt>
+                                        </p:tgtEl>
+                                        <p:attrNameLst>
+                                          <p:attrName>style.visibility</p:attrName>
+                                        </p:attrNameLst>
+                                      </p:cBhvr>
+                                      <p:to>
+                                        <p:strVal val="visible"/>
+                                      </p:to>
+                                    </p:set>
+                                  </p:childTnLst>
+                                </p:cTn>
+                              </p:par>
+                            </p:childTnLst>
+                          </p:cTn>
+                        </p:par>
+                      </p:childTnLst>
+                    </p:cTn>
+                  </p:par>
+                  <p:par>
+                    <p:cTn id="23" fill="hold">
+                      <p:stCondLst>
+                        <p:cond delay="indefinite"/>
+                      </p:stCondLst>
+                      <p:childTnLst>
+                        <p:par>
+                          <p:cTn id="24" fill="hold">
+                            <p:stCondLst>
+                              <p:cond delay="0"/>
+                            </p:stCondLst>
+                            <p:childTnLst>
+                              <p:par>
+                                <p:cTn id="25" presetID="1" presetClass="entr" presetSubtype="0" fill="hold" nodeType="clickEffect">
+                                  <p:stCondLst>
+                                    <p:cond delay="0"/>
+                                  </p:stCondLst>
+                                  <p:childTnLst>
+                                    <p:set>
+                                      <p:cBhvr>
+                                        <p:cTn id="26" dur="1" fill="hold">
+                                          <p:stCondLst>
+                                            <p:cond delay="0"/>
+                                          </p:stCondLst>
+                                        </p:cTn>
+                                        <p:tgtEl>
+                                          <p:spTgt spid="3">
+                                            <p:txEl>
+                                              <p:pRg st="8" end="8"/>
+                                            </p:txEl>
+                                          </p:spTgt>
+                                        </p:tgtEl>
+                                        <p:attrNameLst>
+                                          <p:attrName>style.visibility</p:attrName>
+                                        </p:attrNameLst>
+                                      </p:cBhvr>
+                                      <p:to>
+                                        <p:strVal val="visible"/>
+                                      </p:to>
+                                    </p:set>
+                                  </p:childTnLst>
+                                </p:cTn>
+                              </p:par>
+                              <p:par>
+                                <p:cTn id="27" presetID="1" presetClass="entr" presetSubtype="0" fill="hold" nodeType="withEffect">
+                                  <p:stCondLst>
+                                    <p:cond delay="0"/>
+                                  </p:stCondLst>
+                                  <p:childTnLst>
+                                    <p:set>
+                                      <p:cBhvr>
+                                        <p:cTn id="28" dur="1" fill="hold">
+                                          <p:stCondLst>
+                                            <p:cond delay="0"/>
+                                          </p:stCondLst>
+                                        </p:cTn>
+                                        <p:tgtEl>
+                                          <p:spTgt spid="3">
+                                            <p:txEl>
+                                              <p:pRg st="9" end="9"/>
                                             </p:txEl>
                                           </p:spTgt>
                                         </p:tgtEl>
@@ -27280,6 +28824,259 @@
   <p:clrMapOvr>
     <a:masterClrMapping/>
   </p:clrMapOvr>
+  <p:timing>
+    <p:tnLst>
+      <p:par>
+        <p:cTn id="1" dur="indefinite" restart="never" nodeType="tmRoot">
+          <p:childTnLst>
+            <p:seq concurrent="1" nextAc="seek">
+              <p:cTn id="2" dur="indefinite" nodeType="mainSeq">
+                <p:childTnLst>
+                  <p:par>
+                    <p:cTn id="3" fill="hold">
+                      <p:stCondLst>
+                        <p:cond delay="indefinite"/>
+                      </p:stCondLst>
+                      <p:childTnLst>
+                        <p:par>
+                          <p:cTn id="4" fill="hold">
+                            <p:stCondLst>
+                              <p:cond delay="0"/>
+                            </p:stCondLst>
+                            <p:childTnLst>
+                              <p:par>
+                                <p:cTn id="5" presetID="1" presetClass="entr" presetSubtype="0" fill="hold" nodeType="clickEffect">
+                                  <p:stCondLst>
+                                    <p:cond delay="0"/>
+                                  </p:stCondLst>
+                                  <p:childTnLst>
+                                    <p:set>
+                                      <p:cBhvr>
+                                        <p:cTn id="6" dur="1" fill="hold">
+                                          <p:stCondLst>
+                                            <p:cond delay="0"/>
+                                          </p:stCondLst>
+                                        </p:cTn>
+                                        <p:tgtEl>
+                                          <p:spTgt spid="6">
+                                            <p:txEl>
+                                              <p:pRg st="0" end="0"/>
+                                            </p:txEl>
+                                          </p:spTgt>
+                                        </p:tgtEl>
+                                        <p:attrNameLst>
+                                          <p:attrName>style.visibility</p:attrName>
+                                        </p:attrNameLst>
+                                      </p:cBhvr>
+                                      <p:to>
+                                        <p:strVal val="visible"/>
+                                      </p:to>
+                                    </p:set>
+                                  </p:childTnLst>
+                                </p:cTn>
+                              </p:par>
+                              <p:par>
+                                <p:cTn id="7" presetID="1" presetClass="entr" presetSubtype="0" fill="hold" nodeType="withEffect">
+                                  <p:stCondLst>
+                                    <p:cond delay="0"/>
+                                  </p:stCondLst>
+                                  <p:childTnLst>
+                                    <p:set>
+                                      <p:cBhvr>
+                                        <p:cTn id="8" dur="1" fill="hold">
+                                          <p:stCondLst>
+                                            <p:cond delay="0"/>
+                                          </p:stCondLst>
+                                        </p:cTn>
+                                        <p:tgtEl>
+                                          <p:spTgt spid="7"/>
+                                        </p:tgtEl>
+                                        <p:attrNameLst>
+                                          <p:attrName>style.visibility</p:attrName>
+                                        </p:attrNameLst>
+                                      </p:cBhvr>
+                                      <p:to>
+                                        <p:strVal val="visible"/>
+                                      </p:to>
+                                    </p:set>
+                                  </p:childTnLst>
+                                </p:cTn>
+                              </p:par>
+                            </p:childTnLst>
+                          </p:cTn>
+                        </p:par>
+                      </p:childTnLst>
+                    </p:cTn>
+                  </p:par>
+                  <p:par>
+                    <p:cTn id="9" fill="hold">
+                      <p:stCondLst>
+                        <p:cond delay="indefinite"/>
+                      </p:stCondLst>
+                      <p:childTnLst>
+                        <p:par>
+                          <p:cTn id="10" fill="hold">
+                            <p:stCondLst>
+                              <p:cond delay="0"/>
+                            </p:stCondLst>
+                            <p:childTnLst>
+                              <p:par>
+                                <p:cTn id="11" presetID="1" presetClass="entr" presetSubtype="0" fill="hold" nodeType="clickEffect">
+                                  <p:stCondLst>
+                                    <p:cond delay="0"/>
+                                  </p:stCondLst>
+                                  <p:childTnLst>
+                                    <p:set>
+                                      <p:cBhvr>
+                                        <p:cTn id="12" dur="1" fill="hold">
+                                          <p:stCondLst>
+                                            <p:cond delay="0"/>
+                                          </p:stCondLst>
+                                        </p:cTn>
+                                        <p:tgtEl>
+                                          <p:spTgt spid="6">
+                                            <p:txEl>
+                                              <p:pRg st="1" end="1"/>
+                                            </p:txEl>
+                                          </p:spTgt>
+                                        </p:tgtEl>
+                                        <p:attrNameLst>
+                                          <p:attrName>style.visibility</p:attrName>
+                                        </p:attrNameLst>
+                                      </p:cBhvr>
+                                      <p:to>
+                                        <p:strVal val="visible"/>
+                                      </p:to>
+                                    </p:set>
+                                  </p:childTnLst>
+                                </p:cTn>
+                              </p:par>
+                            </p:childTnLst>
+                          </p:cTn>
+                        </p:par>
+                      </p:childTnLst>
+                    </p:cTn>
+                  </p:par>
+                  <p:par>
+                    <p:cTn id="13" fill="hold">
+                      <p:stCondLst>
+                        <p:cond delay="indefinite"/>
+                      </p:stCondLst>
+                      <p:childTnLst>
+                        <p:par>
+                          <p:cTn id="14" fill="hold">
+                            <p:stCondLst>
+                              <p:cond delay="0"/>
+                            </p:stCondLst>
+                            <p:childTnLst>
+                              <p:par>
+                                <p:cTn id="15" presetID="1" presetClass="entr" presetSubtype="0" fill="hold" nodeType="clickEffect">
+                                  <p:stCondLst>
+                                    <p:cond delay="0"/>
+                                  </p:stCondLst>
+                                  <p:childTnLst>
+                                    <p:set>
+                                      <p:cBhvr>
+                                        <p:cTn id="16" dur="1" fill="hold">
+                                          <p:stCondLst>
+                                            <p:cond delay="0"/>
+                                          </p:stCondLst>
+                                        </p:cTn>
+                                        <p:tgtEl>
+                                          <p:spTgt spid="6">
+                                            <p:txEl>
+                                              <p:pRg st="2" end="2"/>
+                                            </p:txEl>
+                                          </p:spTgt>
+                                        </p:tgtEl>
+                                        <p:attrNameLst>
+                                          <p:attrName>style.visibility</p:attrName>
+                                        </p:attrNameLst>
+                                      </p:cBhvr>
+                                      <p:to>
+                                        <p:strVal val="visible"/>
+                                      </p:to>
+                                    </p:set>
+                                  </p:childTnLst>
+                                </p:cTn>
+                              </p:par>
+                            </p:childTnLst>
+                          </p:cTn>
+                        </p:par>
+                      </p:childTnLst>
+                    </p:cTn>
+                  </p:par>
+                  <p:par>
+                    <p:cTn id="17" fill="hold">
+                      <p:stCondLst>
+                        <p:cond delay="indefinite"/>
+                      </p:stCondLst>
+                      <p:childTnLst>
+                        <p:par>
+                          <p:cTn id="18" fill="hold">
+                            <p:stCondLst>
+                              <p:cond delay="0"/>
+                            </p:stCondLst>
+                            <p:childTnLst>
+                              <p:par>
+                                <p:cTn id="19" presetID="1" presetClass="entr" presetSubtype="0" fill="hold" nodeType="clickEffect">
+                                  <p:stCondLst>
+                                    <p:cond delay="0"/>
+                                  </p:stCondLst>
+                                  <p:childTnLst>
+                                    <p:set>
+                                      <p:cBhvr>
+                                        <p:cTn id="20" dur="1" fill="hold">
+                                          <p:stCondLst>
+                                            <p:cond delay="0"/>
+                                          </p:stCondLst>
+                                        </p:cTn>
+                                        <p:tgtEl>
+                                          <p:spTgt spid="6">
+                                            <p:txEl>
+                                              <p:pRg st="3" end="3"/>
+                                            </p:txEl>
+                                          </p:spTgt>
+                                        </p:tgtEl>
+                                        <p:attrNameLst>
+                                          <p:attrName>style.visibility</p:attrName>
+                                        </p:attrNameLst>
+                                      </p:cBhvr>
+                                      <p:to>
+                                        <p:strVal val="visible"/>
+                                      </p:to>
+                                    </p:set>
+                                  </p:childTnLst>
+                                </p:cTn>
+                              </p:par>
+                            </p:childTnLst>
+                          </p:cTn>
+                        </p:par>
+                      </p:childTnLst>
+                    </p:cTn>
+                  </p:par>
+                </p:childTnLst>
+              </p:cTn>
+              <p:prevCondLst>
+                <p:cond evt="onPrev" delay="0">
+                  <p:tgtEl>
+                    <p:sldTgt/>
+                  </p:tgtEl>
+                </p:cond>
+              </p:prevCondLst>
+              <p:nextCondLst>
+                <p:cond evt="onNext" delay="0">
+                  <p:tgtEl>
+                    <p:sldTgt/>
+                  </p:tgtEl>
+                </p:cond>
+              </p:nextCondLst>
+            </p:seq>
+          </p:childTnLst>
+        </p:cTn>
+      </p:par>
+    </p:tnLst>
+  </p:timing>
 </p:sld>
 </file>
 
@@ -28876,6 +30673,33 @@
                                   </p:childTnLst>
                                 </p:cTn>
                               </p:par>
+                              <p:par>
+                                <p:cTn id="7" presetID="1" presetClass="entr" presetSubtype="0" fill="hold" nodeType="withEffect">
+                                  <p:stCondLst>
+                                    <p:cond delay="0"/>
+                                  </p:stCondLst>
+                                  <p:childTnLst>
+                                    <p:set>
+                                      <p:cBhvr>
+                                        <p:cTn id="8" dur="1" fill="hold">
+                                          <p:stCondLst>
+                                            <p:cond delay="0"/>
+                                          </p:stCondLst>
+                                        </p:cTn>
+                                        <p:tgtEl>
+                                          <p:spTgt spid="5"/>
+                                        </p:tgtEl>
+                                        <p:attrNameLst>
+                                          <p:attrName>style.visibility</p:attrName>
+                                        </p:attrNameLst>
+                                      </p:cBhvr>
+                                      <p:to>
+                                        <p:strVal val="visible"/>
+                                      </p:to>
+                                    </p:set>
+                                  </p:childTnLst>
+                                </p:cTn>
+                              </p:par>
                             </p:childTnLst>
                           </p:cTn>
                         </p:par>
@@ -28883,26 +30707,26 @@
                     </p:cTn>
                   </p:par>
                   <p:par>
-                    <p:cTn id="7" fill="hold">
+                    <p:cTn id="9" fill="hold">
                       <p:stCondLst>
                         <p:cond delay="indefinite"/>
                       </p:stCondLst>
                       <p:childTnLst>
                         <p:par>
-                          <p:cTn id="8" fill="hold">
+                          <p:cTn id="10" fill="hold">
                             <p:stCondLst>
                               <p:cond delay="0"/>
                             </p:stCondLst>
                             <p:childTnLst>
                               <p:par>
-                                <p:cTn id="9" presetID="1" presetClass="entr" presetSubtype="0" fill="hold" nodeType="clickEffect">
+                                <p:cTn id="11" presetID="1" presetClass="entr" presetSubtype="0" fill="hold" nodeType="clickEffect">
                                   <p:stCondLst>
                                     <p:cond delay="0"/>
                                   </p:stCondLst>
                                   <p:childTnLst>
                                     <p:set>
                                       <p:cBhvr>
-                                        <p:cTn id="10" dur="1" fill="hold">
+                                        <p:cTn id="12" dur="1" fill="hold">
                                           <p:stCondLst>
                                             <p:cond delay="0"/>
                                           </p:stCondLst>
@@ -28932,26 +30756,26 @@
                     </p:cTn>
                   </p:par>
                   <p:par>
-                    <p:cTn id="11" fill="hold">
+                    <p:cTn id="13" fill="hold">
                       <p:stCondLst>
                         <p:cond delay="indefinite"/>
                       </p:stCondLst>
                       <p:childTnLst>
                         <p:par>
-                          <p:cTn id="12" fill="hold">
+                          <p:cTn id="14" fill="hold">
                             <p:stCondLst>
                               <p:cond delay="0"/>
                             </p:stCondLst>
                             <p:childTnLst>
                               <p:par>
-                                <p:cTn id="13" presetID="1" presetClass="entr" presetSubtype="0" fill="hold" nodeType="clickEffect">
+                                <p:cTn id="15" presetID="1" presetClass="entr" presetSubtype="0" fill="hold" nodeType="clickEffect">
                                   <p:stCondLst>
                                     <p:cond delay="0"/>
                                   </p:stCondLst>
                                   <p:childTnLst>
                                     <p:set>
                                       <p:cBhvr>
-                                        <p:cTn id="14" dur="1" fill="hold">
+                                        <p:cTn id="16" dur="1" fill="hold">
                                           <p:stCondLst>
                                             <p:cond delay="0"/>
                                           </p:stCondLst>
@@ -28981,26 +30805,26 @@
                     </p:cTn>
                   </p:par>
                   <p:par>
-                    <p:cTn id="15" fill="hold">
+                    <p:cTn id="17" fill="hold">
                       <p:stCondLst>
                         <p:cond delay="indefinite"/>
                       </p:stCondLst>
                       <p:childTnLst>
                         <p:par>
-                          <p:cTn id="16" fill="hold">
+                          <p:cTn id="18" fill="hold">
                             <p:stCondLst>
                               <p:cond delay="0"/>
                             </p:stCondLst>
                             <p:childTnLst>
                               <p:par>
-                                <p:cTn id="17" presetID="1" presetClass="entr" presetSubtype="0" fill="hold" nodeType="clickEffect">
+                                <p:cTn id="19" presetID="1" presetClass="entr" presetSubtype="0" fill="hold" nodeType="clickEffect">
                                   <p:stCondLst>
                                     <p:cond delay="0"/>
                                   </p:stCondLst>
                                   <p:childTnLst>
                                     <p:set>
                                       <p:cBhvr>
-                                        <p:cTn id="18" dur="1" fill="hold">
+                                        <p:cTn id="20" dur="1" fill="hold">
                                           <p:stCondLst>
                                             <p:cond delay="0"/>
                                           </p:stCondLst>
@@ -30103,7 +31927,7 @@
         <p:spPr/>
         <p:txBody>
           <a:bodyPr>
-            <a:normAutofit fontScale="92500" lnSpcReduction="20000"/>
+            <a:normAutofit fontScale="85000" lnSpcReduction="10000"/>
           </a:bodyPr>
           <a:lstStyle/>
           <a:p>
@@ -30187,9 +32011,15 @@
             </a:r>
             <a:r>
               <a:rPr lang="en-US" dirty="0"/>
-              <a:t>of observations within each strata for priors and posteriors</a:t>
-            </a:r>
-            <a:endParaRPr dirty="0"/>
+              <a:t>of observations within each strata for priors and posterior</a:t>
+            </a:r>
+          </a:p>
+          <a:p>
+            <a:pPr lvl="1"/>
+            <a:r>
+              <a:rPr lang="en-US" dirty="0"/>
+              <a:t>No exchangeability between strata</a:t>
+            </a:r>
           </a:p>
         </p:txBody>
       </p:sp>
@@ -30431,6 +32261,37 @@
                                           <p:spTgt spid="3">
                                             <p:txEl>
                                               <p:pRg st="5" end="5"/>
+                                            </p:txEl>
+                                          </p:spTgt>
+                                        </p:tgtEl>
+                                        <p:attrNameLst>
+                                          <p:attrName>style.visibility</p:attrName>
+                                        </p:attrNameLst>
+                                      </p:cBhvr>
+                                      <p:to>
+                                        <p:strVal val="visible"/>
+                                      </p:to>
+                                    </p:set>
+                                  </p:childTnLst>
+                                </p:cTn>
+                              </p:par>
+                              <p:par>
+                                <p:cTn id="23" presetID="1" presetClass="entr" presetSubtype="0" fill="hold" nodeType="withEffect">
+                                  <p:stCondLst>
+                                    <p:cond delay="0"/>
+                                  </p:stCondLst>
+                                  <p:childTnLst>
+                                    <p:set>
+                                      <p:cBhvr>
+                                        <p:cTn id="24" dur="1" fill="hold">
+                                          <p:stCondLst>
+                                            <p:cond delay="0"/>
+                                          </p:stCondLst>
+                                        </p:cTn>
+                                        <p:tgtEl>
+                                          <p:spTgt spid="3">
+                                            <p:txEl>
+                                              <p:pRg st="6" end="6"/>
                                             </p:txEl>
                                           </p:spTgt>
                                         </p:tgtEl>

--- a/LectureSlides/14_HierarchicalBayesModels.pptx
+++ b/LectureSlides/14_HierarchicalBayesModels.pptx
@@ -24765,7 +24765,22 @@
                 </a14:m>
                 <a:r>
                   <a:rPr lang="en-US" dirty="0"/>
-                  <a:t> LOO posterior density computed without the </a:t>
+                  <a:t> LOO posterior density of </a:t>
+                </a:r>
+                <a14:m>
+                  <m:oMath xmlns:m="http://schemas.openxmlformats.org/officeDocument/2006/math">
+                    <m:r>
+                      <a:rPr lang="en-US" i="1">
+                        <a:latin typeface="Cambria Math" panose="02040503050406030204" pitchFamily="18" charset="0"/>
+                        <a:ea typeface="Cambria Math" panose="02040503050406030204" pitchFamily="18" charset="0"/>
+                      </a:rPr>
+                      <m:t>𝜃</m:t>
+                    </m:r>
+                  </m:oMath>
+                </a14:m>
+                <a:r>
+                  <a:rPr lang="en-US" dirty="0"/>
+                  <a:t> computed without the </a:t>
                 </a:r>
                 <a:r>
                   <a:rPr lang="en-US" i="1" dirty="0" err="1"/>
@@ -28751,7 +28766,7 @@
           <a:p>
             <a:r>
               <a:rPr lang="en-US" sz="2000" dirty="0"/>
-              <a:t>The HDI of the hierarchical model is greater than the other two models</a:t>
+              <a:t>The ELPD HDI of the hierarchical model is greater than the other two models</a:t>
             </a:r>
           </a:p>
           <a:p>
@@ -29867,7 +29882,7 @@
         </p:spPr>
         <p:txBody>
           <a:bodyPr>
-            <a:normAutofit lnSpcReduction="10000"/>
+            <a:normAutofit fontScale="92500" lnSpcReduction="10000"/>
           </a:bodyPr>
           <a:lstStyle/>
           <a:p>
@@ -29917,7 +29932,7 @@
           <a:p>
             <a:r>
               <a:rPr lang="en-US" dirty="0"/>
-              <a:t>Shrinkage effect is greatest when there are many parameters</a:t>
+              <a:t>Shrinkage effect is greatest when there are many parameters or little data</a:t>
             </a:r>
           </a:p>
           <a:p>
@@ -30673,21 +30688,43 @@
                                   </p:childTnLst>
                                 </p:cTn>
                               </p:par>
+                            </p:childTnLst>
+                          </p:cTn>
+                        </p:par>
+                      </p:childTnLst>
+                    </p:cTn>
+                  </p:par>
+                  <p:par>
+                    <p:cTn id="7" fill="hold">
+                      <p:stCondLst>
+                        <p:cond delay="indefinite"/>
+                      </p:stCondLst>
+                      <p:childTnLst>
+                        <p:par>
+                          <p:cTn id="8" fill="hold">
+                            <p:stCondLst>
+                              <p:cond delay="0"/>
+                            </p:stCondLst>
+                            <p:childTnLst>
                               <p:par>
-                                <p:cTn id="7" presetID="1" presetClass="entr" presetSubtype="0" fill="hold" nodeType="withEffect">
+                                <p:cTn id="9" presetID="1" presetClass="entr" presetSubtype="0" fill="hold" nodeType="clickEffect">
                                   <p:stCondLst>
                                     <p:cond delay="0"/>
                                   </p:stCondLst>
                                   <p:childTnLst>
                                     <p:set>
                                       <p:cBhvr>
-                                        <p:cTn id="8" dur="1" fill="hold">
+                                        <p:cTn id="10" dur="1" fill="hold">
                                           <p:stCondLst>
                                             <p:cond delay="0"/>
                                           </p:stCondLst>
                                         </p:cTn>
                                         <p:tgtEl>
-                                          <p:spTgt spid="5"/>
+                                          <p:spTgt spid="6">
+                                            <p:txEl>
+                                              <p:pRg st="1" end="1"/>
+                                            </p:txEl>
+                                          </p:spTgt>
                                         </p:tgtEl>
                                         <p:attrNameLst>
                                           <p:attrName>style.visibility</p:attrName>
@@ -30700,26 +30737,8 @@
                                   </p:childTnLst>
                                 </p:cTn>
                               </p:par>
-                            </p:childTnLst>
-                          </p:cTn>
-                        </p:par>
-                      </p:childTnLst>
-                    </p:cTn>
-                  </p:par>
-                  <p:par>
-                    <p:cTn id="9" fill="hold">
-                      <p:stCondLst>
-                        <p:cond delay="indefinite"/>
-                      </p:stCondLst>
-                      <p:childTnLst>
-                        <p:par>
-                          <p:cTn id="10" fill="hold">
-                            <p:stCondLst>
-                              <p:cond delay="0"/>
-                            </p:stCondLst>
-                            <p:childTnLst>
                               <p:par>
-                                <p:cTn id="11" presetID="1" presetClass="entr" presetSubtype="0" fill="hold" nodeType="clickEffect">
+                                <p:cTn id="11" presetID="1" presetClass="entr" presetSubtype="0" fill="hold" nodeType="withEffect">
                                   <p:stCondLst>
                                     <p:cond delay="0"/>
                                   </p:stCondLst>
@@ -30732,11 +30751,7 @@
                                           </p:stCondLst>
                                         </p:cTn>
                                         <p:tgtEl>
-                                          <p:spTgt spid="6">
-                                            <p:txEl>
-                                              <p:pRg st="1" end="1"/>
-                                            </p:txEl>
-                                          </p:spTgt>
+                                          <p:spTgt spid="5"/>
                                         </p:tgtEl>
                                         <p:attrNameLst>
                                           <p:attrName>style.visibility</p:attrName>
